--- a/sunumlar/6-sinif-unite4-scratch-ileri-DETAYLI.pptx
+++ b/sunumlar/6-sinif-unite4-scratch-ileri-DETAYLI.pptx
@@ -112,6 +112,1259 @@
     </a:lvl9pPr>
   </p:defaultTextStyle>
 </p:presentation>
+</file>
+
+<file path=ppt/notesMasters/notesMaster1.xml><?xml version="1.0" encoding="utf-8"?>
+<p:notesMaster xmlns:a="http://schemas.openxmlformats.org/drawingml/2006/main" xmlns:p="http://schemas.openxmlformats.org/presentationml/2006/main" xmlns:r="http://schemas.openxmlformats.org/officeDocument/2006/relationships">
+  <p:cSld>
+    <p:bg>
+      <p:bgRef idx="1001">
+        <a:schemeClr val="bg1"/>
+      </p:bgRef>
+    </p:bg>
+    <p:spTree>
+      <p:nvGrpSpPr>
+        <p:cNvPr id="1" name=""/>
+        <p:cNvGrpSpPr/>
+        <p:nvPr/>
+      </p:nvGrpSpPr>
+      <p:grpSpPr>
+        <a:xfrm>
+          <a:off x="0" y="0"/>
+          <a:ext cx="0" cy="0"/>
+          <a:chOff x="0" y="0"/>
+          <a:chExt cx="0" cy="0"/>
+        </a:xfrm>
+      </p:grpSpPr>
+      <p:sp>
+        <p:nvSpPr>
+          <p:cNvPr id="2" name="Header Placeholder 1"/>
+          <p:cNvSpPr>
+            <a:spLocks noGrp="1"/>
+          </p:cNvSpPr>
+          <p:nvPr>
+            <p:ph type="hdr" sz="quarter"/>
+          </p:nvPr>
+        </p:nvSpPr>
+        <p:spPr>
+          <a:xfrm>
+            <a:off x="0" y="0"/>
+            <a:ext cx="2971800" cy="457200"/>
+          </a:xfrm>
+          <a:prstGeom prst="rect">
+            <a:avLst/>
+          </a:prstGeom>
+        </p:spPr>
+        <p:txBody>
+          <a:bodyPr vert="horz" lIns="91440" tIns="45720" rIns="91440" bIns="45720" rtlCol="0"/>
+          <a:lstStyle>
+            <a:lvl1pPr algn="l">
+              <a:defRPr sz="1200"/>
+            </a:lvl1pPr>
+          </a:lstStyle>
+          <a:p>
+            <a:endParaRPr lang="en-US"/>
+          </a:p>
+        </p:txBody>
+      </p:sp>
+      <p:sp>
+        <p:nvSpPr>
+          <p:cNvPr id="3" name="Date Placeholder 2"/>
+          <p:cNvSpPr>
+            <a:spLocks noGrp="1"/>
+          </p:cNvSpPr>
+          <p:nvPr>
+            <p:ph type="dt" idx="1"/>
+          </p:nvPr>
+        </p:nvSpPr>
+        <p:spPr>
+          <a:xfrm>
+            <a:off x="3884613" y="0"/>
+            <a:ext cx="2971800" cy="457200"/>
+          </a:xfrm>
+          <a:prstGeom prst="rect">
+            <a:avLst/>
+          </a:prstGeom>
+        </p:spPr>
+        <p:txBody>
+          <a:bodyPr vert="horz" lIns="91440" tIns="45720" rIns="91440" bIns="45720" rtlCol="0"/>
+          <a:lstStyle>
+            <a:lvl1pPr algn="r">
+              <a:defRPr sz="1200"/>
+            </a:lvl1pPr>
+          </a:lstStyle>
+          <a:p>
+            <a:fld id="{0F89C1C7-3DCD-1040-A9CF-14679D8B5DDD}" type="datetimeFigureOut">
+              <a:rPr lang="en-US" smtClean="0"/>
+              <a:t>10/17/16</a:t>
+            </a:fld>
+            <a:endParaRPr lang="en-US"/>
+          </a:p>
+        </p:txBody>
+      </p:sp>
+      <p:sp>
+        <p:nvSpPr>
+          <p:cNvPr id="4" name="Slide Image Placeholder 3"/>
+          <p:cNvSpPr>
+            <a:spLocks noGrp="1" noRot="1" noChangeAspect="1"/>
+          </p:cNvSpPr>
+          <p:nvPr>
+            <p:ph type="sldImg" idx="2"/>
+          </p:nvPr>
+        </p:nvSpPr>
+        <p:spPr>
+          <a:xfrm>
+            <a:off x="1143000" y="685800"/>
+            <a:ext cx="4572000" cy="3429000"/>
+          </a:xfrm>
+          <a:prstGeom prst="rect">
+            <a:avLst/>
+          </a:prstGeom>
+          <a:noFill/>
+          <a:ln w="12700">
+            <a:solidFill>
+              <a:prstClr val="black"/>
+            </a:solidFill>
+          </a:ln>
+        </p:spPr>
+        <p:txBody>
+          <a:bodyPr vert="horz" lIns="91440" tIns="45720" rIns="91440" bIns="45720" rtlCol="0" anchor="ctr"/>
+          <a:lstStyle/>
+          <a:p>
+            <a:endParaRPr lang="en-US"/>
+          </a:p>
+        </p:txBody>
+      </p:sp>
+      <p:sp>
+        <p:nvSpPr>
+          <p:cNvPr id="5" name="Notes Placeholder 4"/>
+          <p:cNvSpPr>
+            <a:spLocks noGrp="1"/>
+          </p:cNvSpPr>
+          <p:nvPr>
+            <p:ph type="body" sz="quarter" idx="3"/>
+          </p:nvPr>
+        </p:nvSpPr>
+        <p:spPr>
+          <a:xfrm>
+            <a:off x="685800" y="4343400"/>
+            <a:ext cx="5486400" cy="4114800"/>
+          </a:xfrm>
+          <a:prstGeom prst="rect">
+            <a:avLst/>
+          </a:prstGeom>
+        </p:spPr>
+        <p:txBody>
+          <a:bodyPr vert="horz" lIns="91440" tIns="45720" rIns="91440" bIns="45720" rtlCol="0"/>
+          <a:lstStyle/>
+          <a:p>
+            <a:pPr lvl="0"/>
+            <a:r>
+              <a:rPr lang="en-US" smtClean="0"/>
+              <a:t>Click to edit Master text styles</a:t>
+            </a:r>
+          </a:p>
+          <a:p>
+            <a:pPr lvl="1"/>
+            <a:r>
+              <a:rPr lang="en-US" smtClean="0"/>
+              <a:t>Second level</a:t>
+            </a:r>
+          </a:p>
+          <a:p>
+            <a:pPr lvl="2"/>
+            <a:r>
+              <a:rPr lang="en-US" smtClean="0"/>
+              <a:t>Third level</a:t>
+            </a:r>
+          </a:p>
+          <a:p>
+            <a:pPr lvl="3"/>
+            <a:r>
+              <a:rPr lang="en-US" smtClean="0"/>
+              <a:t>Fourth level</a:t>
+            </a:r>
+          </a:p>
+          <a:p>
+            <a:pPr lvl="4"/>
+            <a:r>
+              <a:rPr lang="en-US" smtClean="0"/>
+              <a:t>Fifth level</a:t>
+            </a:r>
+            <a:endParaRPr lang="en-US"/>
+          </a:p>
+        </p:txBody>
+      </p:sp>
+      <p:sp>
+        <p:nvSpPr>
+          <p:cNvPr id="6" name="Footer Placeholder 5"/>
+          <p:cNvSpPr>
+            <a:spLocks noGrp="1"/>
+          </p:cNvSpPr>
+          <p:nvPr>
+            <p:ph type="ftr" sz="quarter" idx="4"/>
+          </p:nvPr>
+        </p:nvSpPr>
+        <p:spPr>
+          <a:xfrm>
+            <a:off x="0" y="8685213"/>
+            <a:ext cx="2971800" cy="457200"/>
+          </a:xfrm>
+          <a:prstGeom prst="rect">
+            <a:avLst/>
+          </a:prstGeom>
+        </p:spPr>
+        <p:txBody>
+          <a:bodyPr vert="horz" lIns="91440" tIns="45720" rIns="91440" bIns="45720" rtlCol="0" anchor="b"/>
+          <a:lstStyle>
+            <a:lvl1pPr algn="l">
+              <a:defRPr sz="1200"/>
+            </a:lvl1pPr>
+          </a:lstStyle>
+          <a:p>
+            <a:endParaRPr lang="en-US"/>
+          </a:p>
+        </p:txBody>
+      </p:sp>
+      <p:sp>
+        <p:nvSpPr>
+          <p:cNvPr id="7" name="Slide Number Placeholder 6"/>
+          <p:cNvSpPr>
+            <a:spLocks noGrp="1"/>
+          </p:cNvSpPr>
+          <p:nvPr>
+            <p:ph type="sldNum" sz="quarter" idx="5"/>
+          </p:nvPr>
+        </p:nvSpPr>
+        <p:spPr>
+          <a:xfrm>
+            <a:off x="3884613" y="8685213"/>
+            <a:ext cx="2971800" cy="457200"/>
+          </a:xfrm>
+          <a:prstGeom prst="rect">
+            <a:avLst/>
+          </a:prstGeom>
+        </p:spPr>
+        <p:txBody>
+          <a:bodyPr vert="horz" lIns="91440" tIns="45720" rIns="91440" bIns="45720" rtlCol="0" anchor="b"/>
+          <a:lstStyle>
+            <a:lvl1pPr algn="r">
+              <a:defRPr sz="1200"/>
+            </a:lvl1pPr>
+          </a:lstStyle>
+          <a:p>
+            <a:fld id="{BB5E49A5-4136-284D-997B-48E1D791AD67}" type="slidenum">
+              <a:rPr lang="en-US" smtClean="0"/>
+              <a:t>‹#›</a:t>
+            </a:fld>
+            <a:endParaRPr lang="en-US"/>
+          </a:p>
+        </p:txBody>
+      </p:sp>
+    </p:spTree>
+    <p:extLst>
+      <p:ext uri="{BB962C8B-B14F-4D97-AF65-F5344CB8AC3E}">
+        <p14:creationId xmlns:p14="http://schemas.microsoft.com/office/powerpoint/2010/main" val="2623252185"/>
+      </p:ext>
+    </p:extLst>
+  </p:cSld>
+  <p:clrMap bg1="lt1" tx1="dk1" bg2="lt2" tx2="dk2" accent1="accent1" accent2="accent2" accent3="accent3" accent4="accent4" accent5="accent5" accent6="accent6" hlink="hlink" folHlink="folHlink"/>
+  <p:notesStyle>
+    <a:lvl1pPr marL="0" algn="l" defTabSz="457200" rtl="0" eaLnBrk="1" latinLnBrk="0" hangingPunct="1">
+      <a:defRPr sz="1200" kern="1200">
+        <a:solidFill>
+          <a:schemeClr val="tx1"/>
+        </a:solidFill>
+        <a:latin typeface="+mn-lt"/>
+        <a:ea typeface="+mn-ea"/>
+        <a:cs typeface="+mn-cs"/>
+      </a:defRPr>
+    </a:lvl1pPr>
+    <a:lvl2pPr marL="457200" algn="l" defTabSz="457200" rtl="0" eaLnBrk="1" latinLnBrk="0" hangingPunct="1">
+      <a:defRPr sz="1200" kern="1200">
+        <a:solidFill>
+          <a:schemeClr val="tx1"/>
+        </a:solidFill>
+        <a:latin typeface="+mn-lt"/>
+        <a:ea typeface="+mn-ea"/>
+        <a:cs typeface="+mn-cs"/>
+      </a:defRPr>
+    </a:lvl2pPr>
+    <a:lvl3pPr marL="914400" algn="l" defTabSz="457200" rtl="0" eaLnBrk="1" latinLnBrk="0" hangingPunct="1">
+      <a:defRPr sz="1200" kern="1200">
+        <a:solidFill>
+          <a:schemeClr val="tx1"/>
+        </a:solidFill>
+        <a:latin typeface="+mn-lt"/>
+        <a:ea typeface="+mn-ea"/>
+        <a:cs typeface="+mn-cs"/>
+      </a:defRPr>
+    </a:lvl3pPr>
+    <a:lvl4pPr marL="1371600" algn="l" defTabSz="457200" rtl="0" eaLnBrk="1" latinLnBrk="0" hangingPunct="1">
+      <a:defRPr sz="1200" kern="1200">
+        <a:solidFill>
+          <a:schemeClr val="tx1"/>
+        </a:solidFill>
+        <a:latin typeface="+mn-lt"/>
+        <a:ea typeface="+mn-ea"/>
+        <a:cs typeface="+mn-cs"/>
+      </a:defRPr>
+    </a:lvl4pPr>
+    <a:lvl5pPr marL="1828800" algn="l" defTabSz="457200" rtl="0" eaLnBrk="1" latinLnBrk="0" hangingPunct="1">
+      <a:defRPr sz="1200" kern="1200">
+        <a:solidFill>
+          <a:schemeClr val="tx1"/>
+        </a:solidFill>
+        <a:latin typeface="+mn-lt"/>
+        <a:ea typeface="+mn-ea"/>
+        <a:cs typeface="+mn-cs"/>
+      </a:defRPr>
+    </a:lvl5pPr>
+    <a:lvl6pPr marL="2286000" algn="l" defTabSz="457200" rtl="0" eaLnBrk="1" latinLnBrk="0" hangingPunct="1">
+      <a:defRPr sz="1200" kern="1200">
+        <a:solidFill>
+          <a:schemeClr val="tx1"/>
+        </a:solidFill>
+        <a:latin typeface="+mn-lt"/>
+        <a:ea typeface="+mn-ea"/>
+        <a:cs typeface="+mn-cs"/>
+      </a:defRPr>
+    </a:lvl6pPr>
+    <a:lvl7pPr marL="2743200" algn="l" defTabSz="457200" rtl="0" eaLnBrk="1" latinLnBrk="0" hangingPunct="1">
+      <a:defRPr sz="1200" kern="1200">
+        <a:solidFill>
+          <a:schemeClr val="tx1"/>
+        </a:solidFill>
+        <a:latin typeface="+mn-lt"/>
+        <a:ea typeface="+mn-ea"/>
+        <a:cs typeface="+mn-cs"/>
+      </a:defRPr>
+    </a:lvl7pPr>
+    <a:lvl8pPr marL="3200400" algn="l" defTabSz="457200" rtl="0" eaLnBrk="1" latinLnBrk="0" hangingPunct="1">
+      <a:defRPr sz="1200" kern="1200">
+        <a:solidFill>
+          <a:schemeClr val="tx1"/>
+        </a:solidFill>
+        <a:latin typeface="+mn-lt"/>
+        <a:ea typeface="+mn-ea"/>
+        <a:cs typeface="+mn-cs"/>
+      </a:defRPr>
+    </a:lvl8pPr>
+    <a:lvl9pPr marL="3657600" algn="l" defTabSz="457200" rtl="0" eaLnBrk="1" latinLnBrk="0" hangingPunct="1">
+      <a:defRPr sz="1200" kern="1200">
+        <a:solidFill>
+          <a:schemeClr val="tx1"/>
+        </a:solidFill>
+        <a:latin typeface="+mn-lt"/>
+        <a:ea typeface="+mn-ea"/>
+        <a:cs typeface="+mn-cs"/>
+      </a:defRPr>
+    </a:lvl9pPr>
+  </p:notesStyle>
+</p:notesMaster>
+</file>
+
+<file path=ppt/notesSlides/notesSlide1.xml><?xml version="1.0" encoding="utf-8"?>
+<p:notes xmlns:a="http://schemas.openxmlformats.org/drawingml/2006/main" xmlns:p="http://schemas.openxmlformats.org/presentationml/2006/main" xmlns:r="http://schemas.openxmlformats.org/officeDocument/2006/relationships">
+  <p:cSld>
+    <p:spTree>
+      <p:nvGrpSpPr>
+        <p:cNvPr id="1" name=""/>
+        <p:cNvGrpSpPr/>
+        <p:nvPr/>
+      </p:nvGrpSpPr>
+      <p:grpSpPr>
+        <a:xfrm>
+          <a:off x="0" y="0"/>
+          <a:ext cx="0" cy="0"/>
+          <a:chOff x="0" y="0"/>
+          <a:chExt cx="0" cy="0"/>
+        </a:xfrm>
+      </p:grpSpPr>
+      <p:sp>
+        <p:nvSpPr>
+          <p:cNvPr id="2" name="Slide Image Placeholder 1"/>
+          <p:cNvSpPr>
+            <a:spLocks noGrp="1"/>
+          </p:cNvSpPr>
+          <p:nvPr>
+            <p:ph type="sldImg" idx="2"/>
+          </p:nvPr>
+        </p:nvSpPr>
+        <p:spPr/>
+      </p:sp>
+      <p:sp>
+        <p:nvSpPr>
+          <p:cNvPr id="3" name="Notes Placeholder 2"/>
+          <p:cNvSpPr>
+            <a:spLocks noGrp="1"/>
+          </p:cNvSpPr>
+          <p:nvPr>
+            <p:ph type="body" idx="3" sz="quarter"/>
+          </p:nvPr>
+        </p:nvSpPr>
+        <p:spPr/>
+        <p:txBody>
+          <a:bodyPr/>
+          <a:lstStyle/>
+          <a:p>
+            <a:r>
+              <a:t>🎨 GÖRSELLEŞTİRME ÖNERİLERİ:</a:t>
+            </a:r>
+          </a:p>
+          <a:p/>
+          <a:p>
+            <a:r>
+              <a:t>📸 Görsel: CPU, RAM ve anakart fotoğrafları</a:t>
+            </a:r>
+          </a:p>
+          <a:p>
+            <a:r>
+              <a:t>🎬 Video: Bilgisayar donanımı tanıtım videosu (1-2 dk)</a:t>
+            </a:r>
+          </a:p>
+          <a:p>
+            <a:r>
+              <a:t>💡 İnfografik: Bilgisayar bileşenleri şeması</a:t>
+            </a:r>
+          </a:p>
+          <a:p>
+            <a:r>
+              <a:t>📸 Görsel: Scratch arayüzü ekran görüntüsü</a:t>
+            </a:r>
+          </a:p>
+          <a:p>
+            <a:r>
+              <a:t>🎬 Video: Scratch ile basit oyun yapımı (3-5 dk)</a:t>
+            </a:r>
+          </a:p>
+          <a:p>
+            <a:r>
+              <a:t>💡 Ekran kaydı: Adım adım Scratch projesi</a:t>
+            </a:r>
+          </a:p>
+          <a:p>
+            <a:r>
+              <a:t>📸 Görsel: Koşullu yapılar akış diyagramı</a:t>
+            </a:r>
+          </a:p>
+          <a:p>
+            <a:r>
+              <a:t>🎬 Video: Koşullu ifadeler Scratch'te</a:t>
+            </a:r>
+          </a:p>
+        </p:txBody>
+      </p:sp>
+      <p:sp>
+        <p:nvSpPr>
+          <p:cNvPr id="4" name="Slide Number Placeholder 3"/>
+          <p:cNvSpPr>
+            <a:spLocks noGrp="1"/>
+          </p:cNvSpPr>
+          <p:nvPr>
+            <p:ph type="sldNum" idx="5" sz="quarter"/>
+          </p:nvPr>
+        </p:nvSpPr>
+        <p:spPr/>
+      </p:sp>
+    </p:spTree>
+  </p:cSld>
+  <p:clrMapOvr>
+    <a:masterClrMapping/>
+  </p:clrMapOvr>
+</p:notes>
+</file>
+
+<file path=ppt/notesSlides/notesSlide2.xml><?xml version="1.0" encoding="utf-8"?>
+<p:notes xmlns:a="http://schemas.openxmlformats.org/drawingml/2006/main" xmlns:p="http://schemas.openxmlformats.org/presentationml/2006/main" xmlns:r="http://schemas.openxmlformats.org/officeDocument/2006/relationships">
+  <p:cSld>
+    <p:spTree>
+      <p:nvGrpSpPr>
+        <p:cNvPr id="1" name=""/>
+        <p:cNvGrpSpPr/>
+        <p:nvPr/>
+      </p:nvGrpSpPr>
+      <p:grpSpPr>
+        <a:xfrm>
+          <a:off x="0" y="0"/>
+          <a:ext cx="0" cy="0"/>
+          <a:chOff x="0" y="0"/>
+          <a:chExt cx="0" cy="0"/>
+        </a:xfrm>
+      </p:grpSpPr>
+      <p:sp>
+        <p:nvSpPr>
+          <p:cNvPr id="2" name="Slide Image Placeholder 1"/>
+          <p:cNvSpPr>
+            <a:spLocks noGrp="1"/>
+          </p:cNvSpPr>
+          <p:nvPr>
+            <p:ph type="sldImg" idx="2"/>
+          </p:nvPr>
+        </p:nvSpPr>
+        <p:spPr/>
+      </p:sp>
+      <p:sp>
+        <p:nvSpPr>
+          <p:cNvPr id="3" name="Notes Placeholder 2"/>
+          <p:cNvSpPr>
+            <a:spLocks noGrp="1"/>
+          </p:cNvSpPr>
+          <p:nvPr>
+            <p:ph type="body" idx="3" sz="quarter"/>
+          </p:nvPr>
+        </p:nvSpPr>
+        <p:spPr/>
+        <p:txBody>
+          <a:bodyPr/>
+          <a:lstStyle/>
+          <a:p>
+            <a:r>
+              <a:t>🎨 GÖRSELLEŞTİRME ÖNERİLERİ:</a:t>
+            </a:r>
+          </a:p>
+          <a:p/>
+          <a:p>
+            <a:r>
+              <a:t>📸 Görsel: CPU, RAM ve anakart fotoğrafları</a:t>
+            </a:r>
+          </a:p>
+          <a:p>
+            <a:r>
+              <a:t>🎬 Video: Bilgisayar donanımı tanıtım videosu (1-2 dk)</a:t>
+            </a:r>
+          </a:p>
+          <a:p>
+            <a:r>
+              <a:t>💡 İnfografik: Bilgisayar bileşenleri şeması</a:t>
+            </a:r>
+          </a:p>
+          <a:p>
+            <a:r>
+              <a:t>📸 Görsel: Yapay zeka uygulama örnekleri (Siri, Alexa, ChatGPT)</a:t>
+            </a:r>
+          </a:p>
+          <a:p>
+            <a:r>
+              <a:t>🎬 Video: Yapay zeka nedir? Çocuklar için anlatım</a:t>
+            </a:r>
+          </a:p>
+          <a:p>
+            <a:r>
+              <a:t>💡 İnfografik: AI kullanım alanları</a:t>
+            </a:r>
+          </a:p>
+          <a:p>
+            <a:r>
+              <a:t>📸 Görsel: Scratch arayüzü ekran görüntüsü</a:t>
+            </a:r>
+          </a:p>
+          <a:p>
+            <a:r>
+              <a:t>🎬 Video: Scratch ile basit oyun yapımı (3-5 dk)</a:t>
+            </a:r>
+          </a:p>
+          <a:p>
+            <a:r>
+              <a:t>💡 Ekran kaydı: Adım adım Scratch projesi</a:t>
+            </a:r>
+          </a:p>
+          <a:p>
+            <a:r>
+              <a:t>📸 Görsel: Değişken kavramı görselleştirmesi</a:t>
+            </a:r>
+          </a:p>
+          <a:p>
+            <a:r>
+              <a:t>🎬 Video: Scratch'te değişken kullanımı</a:t>
+            </a:r>
+          </a:p>
+        </p:txBody>
+      </p:sp>
+      <p:sp>
+        <p:nvSpPr>
+          <p:cNvPr id="4" name="Slide Number Placeholder 3"/>
+          <p:cNvSpPr>
+            <a:spLocks noGrp="1"/>
+          </p:cNvSpPr>
+          <p:nvPr>
+            <p:ph type="sldNum" idx="5" sz="quarter"/>
+          </p:nvPr>
+        </p:nvSpPr>
+        <p:spPr/>
+      </p:sp>
+    </p:spTree>
+  </p:cSld>
+  <p:clrMapOvr>
+    <a:masterClrMapping/>
+  </p:clrMapOvr>
+</p:notes>
+</file>
+
+<file path=ppt/notesSlides/notesSlide3.xml><?xml version="1.0" encoding="utf-8"?>
+<p:notes xmlns:a="http://schemas.openxmlformats.org/drawingml/2006/main" xmlns:p="http://schemas.openxmlformats.org/presentationml/2006/main" xmlns:r="http://schemas.openxmlformats.org/officeDocument/2006/relationships">
+  <p:cSld>
+    <p:spTree>
+      <p:nvGrpSpPr>
+        <p:cNvPr id="1" name=""/>
+        <p:cNvGrpSpPr/>
+        <p:nvPr/>
+      </p:nvGrpSpPr>
+      <p:grpSpPr>
+        <a:xfrm>
+          <a:off x="0" y="0"/>
+          <a:ext cx="0" cy="0"/>
+          <a:chOff x="0" y="0"/>
+          <a:chExt cx="0" cy="0"/>
+        </a:xfrm>
+      </p:grpSpPr>
+      <p:sp>
+        <p:nvSpPr>
+          <p:cNvPr id="2" name="Slide Image Placeholder 1"/>
+          <p:cNvSpPr>
+            <a:spLocks noGrp="1"/>
+          </p:cNvSpPr>
+          <p:nvPr>
+            <p:ph type="sldImg" idx="2"/>
+          </p:nvPr>
+        </p:nvSpPr>
+        <p:spPr/>
+      </p:sp>
+      <p:sp>
+        <p:nvSpPr>
+          <p:cNvPr id="3" name="Notes Placeholder 2"/>
+          <p:cNvSpPr>
+            <a:spLocks noGrp="1"/>
+          </p:cNvSpPr>
+          <p:nvPr>
+            <p:ph type="body" idx="3" sz="quarter"/>
+          </p:nvPr>
+        </p:nvSpPr>
+        <p:spPr/>
+        <p:txBody>
+          <a:bodyPr/>
+          <a:lstStyle/>
+          <a:p>
+            <a:r>
+              <a:t>🎨 GÖRSELLEŞTİRME ÖNERİLERİ:</a:t>
+            </a:r>
+          </a:p>
+          <a:p/>
+          <a:p>
+            <a:r>
+              <a:t>📸 Görsel: LAN ve WAN ağ topolojileri şeması</a:t>
+            </a:r>
+          </a:p>
+          <a:p>
+            <a:r>
+              <a:t>🎬 Video: İnternet nasıl çalışır? Animasyonlu anlatım</a:t>
+            </a:r>
+          </a:p>
+          <a:p>
+            <a:r>
+              <a:t>💡 İnfografik: Ev ağı kurulumu diyagramı</a:t>
+            </a:r>
+          </a:p>
+          <a:p>
+            <a:r>
+              <a:t>📸 Görsel: Scratch arayüzü ekran görüntüsü</a:t>
+            </a:r>
+          </a:p>
+          <a:p>
+            <a:r>
+              <a:t>🎬 Video: Scratch ile basit oyun yapımı (3-5 dk)</a:t>
+            </a:r>
+          </a:p>
+          <a:p>
+            <a:r>
+              <a:t>💡 Ekran kaydı: Adım adım Scratch projesi</a:t>
+            </a:r>
+          </a:p>
+          <a:p>
+            <a:r>
+              <a:t>📸 Görsel: Döngü mantığı şeması</a:t>
+            </a:r>
+          </a:p>
+          <a:p>
+            <a:r>
+              <a:t>🎬 Video: Döngüler Scratch'te nasıl kullanılır?</a:t>
+            </a:r>
+          </a:p>
+        </p:txBody>
+      </p:sp>
+      <p:sp>
+        <p:nvSpPr>
+          <p:cNvPr id="4" name="Slide Number Placeholder 3"/>
+          <p:cNvSpPr>
+            <a:spLocks noGrp="1"/>
+          </p:cNvSpPr>
+          <p:nvPr>
+            <p:ph type="sldNum" idx="5" sz="quarter"/>
+          </p:nvPr>
+        </p:nvSpPr>
+        <p:spPr/>
+      </p:sp>
+    </p:spTree>
+  </p:cSld>
+  <p:clrMapOvr>
+    <a:masterClrMapping/>
+  </p:clrMapOvr>
+</p:notes>
+</file>
+
+<file path=ppt/notesSlides/notesSlide4.xml><?xml version="1.0" encoding="utf-8"?>
+<p:notes xmlns:a="http://schemas.openxmlformats.org/drawingml/2006/main" xmlns:p="http://schemas.openxmlformats.org/presentationml/2006/main" xmlns:r="http://schemas.openxmlformats.org/officeDocument/2006/relationships">
+  <p:cSld>
+    <p:spTree>
+      <p:nvGrpSpPr>
+        <p:cNvPr id="1" name=""/>
+        <p:cNvGrpSpPr/>
+        <p:nvPr/>
+      </p:nvGrpSpPr>
+      <p:grpSpPr>
+        <a:xfrm>
+          <a:off x="0" y="0"/>
+          <a:ext cx="0" cy="0"/>
+          <a:chOff x="0" y="0"/>
+          <a:chExt cx="0" cy="0"/>
+        </a:xfrm>
+      </p:grpSpPr>
+      <p:sp>
+        <p:nvSpPr>
+          <p:cNvPr id="2" name="Slide Image Placeholder 1"/>
+          <p:cNvSpPr>
+            <a:spLocks noGrp="1"/>
+          </p:cNvSpPr>
+          <p:nvPr>
+            <p:ph type="sldImg" idx="2"/>
+          </p:nvPr>
+        </p:nvSpPr>
+        <p:spPr/>
+      </p:sp>
+      <p:sp>
+        <p:nvSpPr>
+          <p:cNvPr id="3" name="Notes Placeholder 2"/>
+          <p:cNvSpPr>
+            <a:spLocks noGrp="1"/>
+          </p:cNvSpPr>
+          <p:nvPr>
+            <p:ph type="body" idx="3" sz="quarter"/>
+          </p:nvPr>
+        </p:nvSpPr>
+        <p:spPr/>
+        <p:txBody>
+          <a:bodyPr/>
+          <a:lstStyle/>
+          <a:p>
+            <a:r>
+              <a:t>🎨 GÖRSELLEŞTİRME ÖNERİLERİ:</a:t>
+            </a:r>
+          </a:p>
+          <a:p/>
+          <a:p>
+            <a:r>
+              <a:t>📸 Görsel: LAN ve WAN ağ topolojileri şeması</a:t>
+            </a:r>
+          </a:p>
+          <a:p>
+            <a:r>
+              <a:t>🎬 Video: İnternet nasıl çalışır? Animasyonlu anlatım</a:t>
+            </a:r>
+          </a:p>
+          <a:p>
+            <a:r>
+              <a:t>💡 İnfografik: Ev ağı kurulumu diyagramı</a:t>
+            </a:r>
+          </a:p>
+          <a:p>
+            <a:r>
+              <a:t>📸 Görsel: Scratch arayüzü ekran görüntüsü</a:t>
+            </a:r>
+          </a:p>
+          <a:p>
+            <a:r>
+              <a:t>🎬 Video: Scratch ile basit oyun yapımı (3-5 dk)</a:t>
+            </a:r>
+          </a:p>
+          <a:p>
+            <a:r>
+              <a:t>💡 Ekran kaydı: Adım adım Scratch projesi</a:t>
+            </a:r>
+          </a:p>
+        </p:txBody>
+      </p:sp>
+      <p:sp>
+        <p:nvSpPr>
+          <p:cNvPr id="4" name="Slide Number Placeholder 3"/>
+          <p:cNvSpPr>
+            <a:spLocks noGrp="1"/>
+          </p:cNvSpPr>
+          <p:nvPr>
+            <p:ph type="sldNum" idx="5" sz="quarter"/>
+          </p:nvPr>
+        </p:nvSpPr>
+        <p:spPr/>
+      </p:sp>
+    </p:spTree>
+  </p:cSld>
+  <p:clrMapOvr>
+    <a:masterClrMapping/>
+  </p:clrMapOvr>
+</p:notes>
+</file>
+
+<file path=ppt/notesSlides/notesSlide5.xml><?xml version="1.0" encoding="utf-8"?>
+<p:notes xmlns:a="http://schemas.openxmlformats.org/drawingml/2006/main" xmlns:p="http://schemas.openxmlformats.org/presentationml/2006/main" xmlns:r="http://schemas.openxmlformats.org/officeDocument/2006/relationships">
+  <p:cSld>
+    <p:spTree>
+      <p:nvGrpSpPr>
+        <p:cNvPr id="1" name=""/>
+        <p:cNvGrpSpPr/>
+        <p:nvPr/>
+      </p:nvGrpSpPr>
+      <p:grpSpPr>
+        <a:xfrm>
+          <a:off x="0" y="0"/>
+          <a:ext cx="0" cy="0"/>
+          <a:chOff x="0" y="0"/>
+          <a:chExt cx="0" cy="0"/>
+        </a:xfrm>
+      </p:grpSpPr>
+      <p:sp>
+        <p:nvSpPr>
+          <p:cNvPr id="2" name="Slide Image Placeholder 1"/>
+          <p:cNvSpPr>
+            <a:spLocks noGrp="1"/>
+          </p:cNvSpPr>
+          <p:nvPr>
+            <p:ph type="sldImg" idx="2"/>
+          </p:nvPr>
+        </p:nvSpPr>
+        <p:spPr/>
+      </p:sp>
+      <p:sp>
+        <p:nvSpPr>
+          <p:cNvPr id="3" name="Notes Placeholder 2"/>
+          <p:cNvSpPr>
+            <a:spLocks noGrp="1"/>
+          </p:cNvSpPr>
+          <p:nvPr>
+            <p:ph type="body" idx="3" sz="quarter"/>
+          </p:nvPr>
+        </p:nvSpPr>
+        <p:spPr/>
+        <p:txBody>
+          <a:bodyPr/>
+          <a:lstStyle/>
+          <a:p>
+            <a:r>
+              <a:t>🎨 GÖRSELLEŞTİRME ÖNERİLERİ:</a:t>
+            </a:r>
+          </a:p>
+          <a:p/>
+          <a:p>
+            <a:r>
+              <a:t>📸 Görsel: Çeşitli giriş aygıtları (klavye, fare, mikrofon, kamera)</a:t>
+            </a:r>
+          </a:p>
+          <a:p>
+            <a:r>
+              <a:t>🎬 Video: Giriş aygıtlarının nasıl çalıştığını gösteren animasyon</a:t>
+            </a:r>
+          </a:p>
+          <a:p>
+            <a:r>
+              <a:t>📸 Görsel: LAN ve WAN ağ topolojileri şeması</a:t>
+            </a:r>
+          </a:p>
+          <a:p>
+            <a:r>
+              <a:t>🎬 Video: İnternet nasıl çalışır? Animasyonlu anlatım</a:t>
+            </a:r>
+          </a:p>
+          <a:p>
+            <a:r>
+              <a:t>💡 İnfografik: Ev ağı kurulumu diyagramı</a:t>
+            </a:r>
+          </a:p>
+          <a:p>
+            <a:r>
+              <a:t>📸 Görsel: Yapay zeka uygulama örnekleri (Siri, Alexa, ChatGPT)</a:t>
+            </a:r>
+          </a:p>
+          <a:p>
+            <a:r>
+              <a:t>🎬 Video: Yapay zeka nedir? Çocuklar için anlatım</a:t>
+            </a:r>
+          </a:p>
+          <a:p>
+            <a:r>
+              <a:t>💡 İnfografik: AI kullanım alanları</a:t>
+            </a:r>
+          </a:p>
+          <a:p>
+            <a:r>
+              <a:t>📸 Görsel: Scratch arayüzü ekran görüntüsü</a:t>
+            </a:r>
+          </a:p>
+          <a:p>
+            <a:r>
+              <a:t>🎬 Video: Scratch ile basit oyun yapımı (3-5 dk)</a:t>
+            </a:r>
+          </a:p>
+          <a:p>
+            <a:r>
+              <a:t>💡 Ekran kaydı: Adım adım Scratch projesi</a:t>
+            </a:r>
+          </a:p>
+          <a:p>
+            <a:r>
+              <a:t>📸 Görsel: Döngü mantığı şeması</a:t>
+            </a:r>
+          </a:p>
+          <a:p>
+            <a:r>
+              <a:t>🎬 Video: Döngüler Scratch'te nasıl kullanılır?</a:t>
+            </a:r>
+          </a:p>
+          <a:p>
+            <a:r>
+              <a:t>📸 Görsel: Paint araçları ekran görüntüsü</a:t>
+            </a:r>
+          </a:p>
+          <a:p>
+            <a:r>
+              <a:t>🎬 Video: Paint ile basit çizim teknikleri</a:t>
+            </a:r>
+          </a:p>
+        </p:txBody>
+      </p:sp>
+      <p:sp>
+        <p:nvSpPr>
+          <p:cNvPr id="4" name="Slide Number Placeholder 3"/>
+          <p:cNvSpPr>
+            <a:spLocks noGrp="1"/>
+          </p:cNvSpPr>
+          <p:nvPr>
+            <p:ph type="sldNum" idx="5" sz="quarter"/>
+          </p:nvPr>
+        </p:nvSpPr>
+        <p:spPr/>
+      </p:sp>
+    </p:spTree>
+  </p:cSld>
+  <p:clrMapOvr>
+    <a:masterClrMapping/>
+  </p:clrMapOvr>
+</p:notes>
+</file>
+
+<file path=ppt/notesSlides/notesSlide6.xml><?xml version="1.0" encoding="utf-8"?>
+<p:notes xmlns:a="http://schemas.openxmlformats.org/drawingml/2006/main" xmlns:p="http://schemas.openxmlformats.org/presentationml/2006/main" xmlns:r="http://schemas.openxmlformats.org/officeDocument/2006/relationships">
+  <p:cSld>
+    <p:spTree>
+      <p:nvGrpSpPr>
+        <p:cNvPr id="1" name=""/>
+        <p:cNvGrpSpPr/>
+        <p:nvPr/>
+      </p:nvGrpSpPr>
+      <p:grpSpPr>
+        <a:xfrm>
+          <a:off x="0" y="0"/>
+          <a:ext cx="0" cy="0"/>
+          <a:chOff x="0" y="0"/>
+          <a:chExt cx="0" cy="0"/>
+        </a:xfrm>
+      </p:grpSpPr>
+      <p:sp>
+        <p:nvSpPr>
+          <p:cNvPr id="2" name="Slide Image Placeholder 1"/>
+          <p:cNvSpPr>
+            <a:spLocks noGrp="1"/>
+          </p:cNvSpPr>
+          <p:nvPr>
+            <p:ph type="sldImg" idx="2"/>
+          </p:nvPr>
+        </p:nvSpPr>
+        <p:spPr/>
+      </p:sp>
+      <p:sp>
+        <p:nvSpPr>
+          <p:cNvPr id="3" name="Notes Placeholder 2"/>
+          <p:cNvSpPr>
+            <a:spLocks noGrp="1"/>
+          </p:cNvSpPr>
+          <p:nvPr>
+            <p:ph type="body" idx="3" sz="quarter"/>
+          </p:nvPr>
+        </p:nvSpPr>
+        <p:spPr/>
+        <p:txBody>
+          <a:bodyPr/>
+          <a:lstStyle/>
+          <a:p>
+            <a:r>
+              <a:t>🎨 GÖRSELLEŞTİRME ÖNERİLERİ:</a:t>
+            </a:r>
+          </a:p>
+          <a:p/>
+          <a:p>
+            <a:r>
+              <a:t>📸 Görsel: Scratch arayüzü ekran görüntüsü</a:t>
+            </a:r>
+          </a:p>
+          <a:p>
+            <a:r>
+              <a:t>🎬 Video: Scratch ile basit oyun yapımı (3-5 dk)</a:t>
+            </a:r>
+          </a:p>
+          <a:p>
+            <a:r>
+              <a:t>💡 Ekran kaydı: Adım adım Scratch projesi</a:t>
+            </a:r>
+          </a:p>
+        </p:txBody>
+      </p:sp>
+      <p:sp>
+        <p:nvSpPr>
+          <p:cNvPr id="4" name="Slide Number Placeholder 3"/>
+          <p:cNvSpPr>
+            <a:spLocks noGrp="1"/>
+          </p:cNvSpPr>
+          <p:nvPr>
+            <p:ph type="sldNum" idx="5" sz="quarter"/>
+          </p:nvPr>
+        </p:nvSpPr>
+        <p:spPr/>
+      </p:sp>
+    </p:spTree>
+  </p:cSld>
+  <p:clrMapOvr>
+    <a:masterClrMapping/>
+  </p:clrMapOvr>
+</p:notes>
+</file>
+
+<file path=ppt/notesSlides/notesSlide7.xml><?xml version="1.0" encoding="utf-8"?>
+<p:notes xmlns:a="http://schemas.openxmlformats.org/drawingml/2006/main" xmlns:p="http://schemas.openxmlformats.org/presentationml/2006/main" xmlns:r="http://schemas.openxmlformats.org/officeDocument/2006/relationships">
+  <p:cSld>
+    <p:spTree>
+      <p:nvGrpSpPr>
+        <p:cNvPr id="1" name=""/>
+        <p:cNvGrpSpPr/>
+        <p:nvPr/>
+      </p:nvGrpSpPr>
+      <p:grpSpPr>
+        <a:xfrm>
+          <a:off x="0" y="0"/>
+          <a:ext cx="0" cy="0"/>
+          <a:chOff x="0" y="0"/>
+          <a:chExt cx="0" cy="0"/>
+        </a:xfrm>
+      </p:grpSpPr>
+      <p:sp>
+        <p:nvSpPr>
+          <p:cNvPr id="2" name="Slide Image Placeholder 1"/>
+          <p:cNvSpPr>
+            <a:spLocks noGrp="1"/>
+          </p:cNvSpPr>
+          <p:nvPr>
+            <p:ph type="sldImg" idx="2"/>
+          </p:nvPr>
+        </p:nvSpPr>
+        <p:spPr/>
+      </p:sp>
+      <p:sp>
+        <p:nvSpPr>
+          <p:cNvPr id="3" name="Notes Placeholder 2"/>
+          <p:cNvSpPr>
+            <a:spLocks noGrp="1"/>
+          </p:cNvSpPr>
+          <p:nvPr>
+            <p:ph type="body" idx="3" sz="quarter"/>
+          </p:nvPr>
+        </p:nvSpPr>
+        <p:spPr/>
+        <p:txBody>
+          <a:bodyPr/>
+          <a:lstStyle/>
+          <a:p>
+            <a:r>
+              <a:t>🎨 GÖRSELLEŞTİRME ÖNERİLERİ:</a:t>
+            </a:r>
+          </a:p>
+          <a:p/>
+          <a:p>
+            <a:r>
+              <a:t>📸 Görsel: LAN ve WAN ağ topolojileri şeması</a:t>
+            </a:r>
+          </a:p>
+          <a:p>
+            <a:r>
+              <a:t>🎬 Video: İnternet nasıl çalışır? Animasyonlu anlatım</a:t>
+            </a:r>
+          </a:p>
+          <a:p>
+            <a:r>
+              <a:t>💡 İnfografik: Ev ağı kurulumu diyagramı</a:t>
+            </a:r>
+          </a:p>
+          <a:p>
+            <a:r>
+              <a:t>📸 Görsel: Yapay zeka uygulama örnekleri (Siri, Alexa, ChatGPT)</a:t>
+            </a:r>
+          </a:p>
+          <a:p>
+            <a:r>
+              <a:t>🎬 Video: Yapay zeka nedir? Çocuklar için anlatım</a:t>
+            </a:r>
+          </a:p>
+          <a:p>
+            <a:r>
+              <a:t>💡 İnfografik: AI kullanım alanları</a:t>
+            </a:r>
+          </a:p>
+          <a:p>
+            <a:r>
+              <a:t>📸 Görsel: Değişken kavramı görselleştirmesi</a:t>
+            </a:r>
+          </a:p>
+          <a:p>
+            <a:r>
+              <a:t>🎬 Video: Scratch'te değişken kullanımı</a:t>
+            </a:r>
+          </a:p>
+          <a:p>
+            <a:r>
+              <a:t>📸 Görsel: Temel tasarım prensipleri</a:t>
+            </a:r>
+          </a:p>
+          <a:p>
+            <a:r>
+              <a:t>🎬 Video: Dijital tasarıma giriş</a:t>
+            </a:r>
+          </a:p>
+          <a:p>
+            <a:r>
+              <a:t>💡 İnfografik: Renk teorisi ve uyumu</a:t>
+            </a:r>
+          </a:p>
+        </p:txBody>
+      </p:sp>
+      <p:sp>
+        <p:nvSpPr>
+          <p:cNvPr id="4" name="Slide Number Placeholder 3"/>
+          <p:cNvSpPr>
+            <a:spLocks noGrp="1"/>
+          </p:cNvSpPr>
+          <p:nvPr>
+            <p:ph type="sldNum" idx="5" sz="quarter"/>
+          </p:nvPr>
+        </p:nvSpPr>
+        <p:spPr/>
+      </p:sp>
+    </p:spTree>
+  </p:cSld>
+  <p:clrMapOvr>
+    <a:masterClrMapping/>
+  </p:clrMapOvr>
+</p:notes>
+</file>
+
+<file path=ppt/notesSlides/notesSlide8.xml><?xml version="1.0" encoding="utf-8"?>
+<p:notes xmlns:a="http://schemas.openxmlformats.org/drawingml/2006/main" xmlns:p="http://schemas.openxmlformats.org/presentationml/2006/main" xmlns:r="http://schemas.openxmlformats.org/officeDocument/2006/relationships">
+  <p:cSld>
+    <p:spTree>
+      <p:nvGrpSpPr>
+        <p:cNvPr id="1" name=""/>
+        <p:cNvGrpSpPr/>
+        <p:nvPr/>
+      </p:nvGrpSpPr>
+      <p:grpSpPr>
+        <a:xfrm>
+          <a:off x="0" y="0"/>
+          <a:ext cx="0" cy="0"/>
+          <a:chOff x="0" y="0"/>
+          <a:chExt cx="0" cy="0"/>
+        </a:xfrm>
+      </p:grpSpPr>
+      <p:sp>
+        <p:nvSpPr>
+          <p:cNvPr id="2" name="Slide Image Placeholder 1"/>
+          <p:cNvSpPr>
+            <a:spLocks noGrp="1"/>
+          </p:cNvSpPr>
+          <p:nvPr>
+            <p:ph type="sldImg" idx="2"/>
+          </p:nvPr>
+        </p:nvSpPr>
+        <p:spPr/>
+      </p:sp>
+      <p:sp>
+        <p:nvSpPr>
+          <p:cNvPr id="3" name="Notes Placeholder 2"/>
+          <p:cNvSpPr>
+            <a:spLocks noGrp="1"/>
+          </p:cNvSpPr>
+          <p:nvPr>
+            <p:ph type="body" idx="3" sz="quarter"/>
+          </p:nvPr>
+        </p:nvSpPr>
+        <p:spPr/>
+        <p:txBody>
+          <a:bodyPr/>
+          <a:lstStyle/>
+          <a:p>
+            <a:r>
+              <a:t>🎨 GÖRSELLEŞTİRME ÖNERİLERİ:</a:t>
+            </a:r>
+          </a:p>
+          <a:p/>
+          <a:p>
+            <a:r>
+              <a:t>📸 Görsel: Scratch arayüzü ekran görüntüsü</a:t>
+            </a:r>
+          </a:p>
+          <a:p>
+            <a:r>
+              <a:t>🎬 Video: Scratch ile basit oyun yapımı (3-5 dk)</a:t>
+            </a:r>
+          </a:p>
+          <a:p>
+            <a:r>
+              <a:t>💡 Ekran kaydı: Adım adım Scratch projesi</a:t>
+            </a:r>
+          </a:p>
+          <a:p>
+            <a:r>
+              <a:t>📸 Görsel: Paint araçları ekran görüntüsü</a:t>
+            </a:r>
+          </a:p>
+          <a:p>
+            <a:r>
+              <a:t>🎬 Video: Paint ile basit çizim teknikleri</a:t>
+            </a:r>
+          </a:p>
+        </p:txBody>
+      </p:sp>
+      <p:sp>
+        <p:nvSpPr>
+          <p:cNvPr id="4" name="Slide Number Placeholder 3"/>
+          <p:cNvSpPr>
+            <a:spLocks noGrp="1"/>
+          </p:cNvSpPr>
+          <p:nvPr>
+            <p:ph type="sldNum" idx="5" sz="quarter"/>
+          </p:nvPr>
+        </p:nvSpPr>
+        <p:spPr/>
+      </p:sp>
+    </p:spTree>
+  </p:cSld>
+  <p:clrMapOvr>
+    <a:masterClrMapping/>
+  </p:clrMapOvr>
+</p:notes>
 </file>
 
 <file path=ppt/slideLayouts/slideLayout1.xml><?xml version="1.0" encoding="utf-8"?>
@@ -3501,6 +4754,7 @@
               <a:defRPr sz="1900"/>
             </a:pPr>
             <a:r>
+              <a:rPr sz="1600"/>
               <a:t>Klonlama = Sprite'ın kopyalarını oluşturma</a:t>
             </a:r>
           </a:p>
@@ -3520,6 +4774,7 @@
               <a:defRPr sz="1900"/>
             </a:pPr>
             <a:r>
+              <a:rPr sz="1600"/>
               <a:t>✅ Neden Kullanılır?</a:t>
             </a:r>
           </a:p>
@@ -3531,6 +4786,7 @@
               <a:defRPr sz="1700"/>
             </a:pPr>
             <a:r>
+              <a:rPr sz="1600"/>
               <a:t>    • Çok nesne oluşturmak (düşmanlar, mermiler)</a:t>
             </a:r>
           </a:p>
@@ -3542,6 +4798,7 @@
               <a:defRPr sz="1700"/>
             </a:pPr>
             <a:r>
+              <a:rPr sz="1600"/>
               <a:t>    • Dinamik oyunlar</a:t>
             </a:r>
           </a:p>
@@ -3561,6 +4818,7 @@
               <a:defRPr sz="1900"/>
             </a:pPr>
             <a:r>
+              <a:rPr sz="1600"/>
               <a:t>✅ Klonlama Blokları:</a:t>
             </a:r>
           </a:p>
@@ -3580,6 +4838,7 @@
               <a:defRPr sz="1900"/>
             </a:pPr>
             <a:r>
+              <a:rPr sz="1600"/>
               <a:t>🔹 'Kendimin klonunu oluştur'</a:t>
             </a:r>
           </a:p>
@@ -3591,6 +4850,7 @@
               <a:defRPr sz="1900"/>
             </a:pPr>
             <a:r>
+              <a:rPr sz="1600"/>
               <a:t>🔹 'Klon olarak başladığımda'</a:t>
             </a:r>
           </a:p>
@@ -3602,6 +4862,7 @@
               <a:defRPr sz="1900"/>
             </a:pPr>
             <a:r>
+              <a:rPr sz="1600"/>
               <a:t>🔹 'Bu klonu sil'</a:t>
             </a:r>
           </a:p>
@@ -3621,6 +4882,7 @@
               <a:defRPr sz="1900"/>
             </a:pPr>
             <a:r>
+              <a:rPr sz="1600"/>
               <a:t>📌 Örnek: Yıldız Yağmuru</a:t>
             </a:r>
           </a:p>
@@ -3640,6 +4902,7 @@
               <a:defRPr sz="1900"/>
             </a:pPr>
             <a:r>
+              <a:rPr sz="1600"/>
               <a:t>[Yeşil bayrak]</a:t>
             </a:r>
           </a:p>
@@ -3651,6 +4914,7 @@
               <a:defRPr sz="1900"/>
             </a:pPr>
             <a:r>
+              <a:rPr sz="1600"/>
               <a:t>[Sürekli tekrarla]</a:t>
             </a:r>
           </a:p>
@@ -3662,6 +4926,7 @@
               <a:defRPr sz="1700"/>
             </a:pPr>
             <a:r>
+              <a:rPr sz="1600"/>
               <a:t>    [Kendimin klonunu oluştur]</a:t>
             </a:r>
           </a:p>
@@ -3673,6 +4938,7 @@
               <a:defRPr sz="1700"/>
             </a:pPr>
             <a:r>
+              <a:rPr sz="1600"/>
               <a:t>    [1 saniye bekle]</a:t>
             </a:r>
           </a:p>
@@ -3692,6 +4958,7 @@
               <a:defRPr sz="1900"/>
             </a:pPr>
             <a:r>
+              <a:rPr sz="1600"/>
               <a:t>[Klon olarak başladığımda]</a:t>
             </a:r>
           </a:p>
@@ -3703,6 +4970,7 @@
               <a:defRPr sz="1900"/>
             </a:pPr>
             <a:r>
+              <a:rPr sz="1600"/>
               <a:t>[Rastgele x, y=180]</a:t>
             </a:r>
           </a:p>
@@ -3714,6 +4982,7 @@
               <a:defRPr sz="1900"/>
             </a:pPr>
             <a:r>
+              <a:rPr sz="1600"/>
               <a:t>[y &lt; -180 olana kadar]</a:t>
             </a:r>
           </a:p>
@@ -3725,6 +4994,7 @@
               <a:defRPr sz="1700"/>
             </a:pPr>
             <a:r>
+              <a:rPr sz="1600"/>
               <a:t>    [y'yi 10 azalt]</a:t>
             </a:r>
           </a:p>
@@ -3736,6 +5006,7 @@
               <a:defRPr sz="1900"/>
             </a:pPr>
             <a:r>
+              <a:rPr sz="1600"/>
               <a:t>[Bu klonu sil]</a:t>
             </a:r>
           </a:p>
@@ -3755,6 +5026,7 @@
               <a:defRPr sz="1900"/>
             </a:pPr>
             <a:r>
+              <a:rPr sz="1600"/>
               <a:t>💡 Klonlar performans için önemli!</a:t>
             </a:r>
           </a:p>
@@ -3853,6 +5125,7 @@
               <a:defRPr sz="1900"/>
             </a:pPr>
             <a:r>
+              <a:rPr sz="1600"/>
               <a:t>Sprite'lar arasında iletişim</a:t>
             </a:r>
           </a:p>
@@ -3872,6 +5145,7 @@
               <a:defRPr sz="1900"/>
             </a:pPr>
             <a:r>
+              <a:rPr sz="1600"/>
               <a:t>✅ Mesaj Blokları:</a:t>
             </a:r>
           </a:p>
@@ -3883,6 +5157,7 @@
               <a:defRPr sz="1700"/>
             </a:pPr>
             <a:r>
+              <a:rPr sz="1600"/>
               <a:t>    • 'mesaj1 mesajını yayınla'</a:t>
             </a:r>
           </a:p>
@@ -3894,6 +5169,7 @@
               <a:defRPr sz="1700"/>
             </a:pPr>
             <a:r>
+              <a:rPr sz="1600"/>
               <a:t>    • 'mesaj1 mesajını aldığımda'</a:t>
             </a:r>
           </a:p>
@@ -3905,6 +5181,7 @@
               <a:defRPr sz="1700"/>
             </a:pPr>
             <a:r>
+              <a:rPr sz="1600"/>
               <a:t>    • 'mesaj1 yayınla ve bekle'</a:t>
             </a:r>
           </a:p>
@@ -3924,6 +5201,7 @@
               <a:defRPr sz="1900"/>
             </a:pPr>
             <a:r>
+              <a:rPr sz="1600"/>
               <a:t>📌 Örnek: Oyun Başlatma</a:t>
             </a:r>
           </a:p>
@@ -3943,6 +5221,7 @@
               <a:defRPr sz="1900"/>
             </a:pPr>
             <a:r>
+              <a:rPr sz="1600"/>
               <a:t>Buton Sprite:</a:t>
             </a:r>
           </a:p>
@@ -3954,6 +5233,7 @@
               <a:defRPr sz="1900"/>
             </a:pPr>
             <a:r>
+              <a:rPr sz="1600"/>
               <a:t>[Bu sprite tıklandığında]</a:t>
             </a:r>
           </a:p>
@@ -3965,6 +5245,7 @@
               <a:defRPr sz="1900"/>
             </a:pPr>
             <a:r>
+              <a:rPr sz="1600"/>
               <a:t>['OyunBasla' mesajını yayınla]</a:t>
             </a:r>
           </a:p>
@@ -3984,6 +5265,7 @@
               <a:defRPr sz="1900"/>
             </a:pPr>
             <a:r>
+              <a:rPr sz="1600"/>
               <a:t>Oyuncu Sprite:</a:t>
             </a:r>
           </a:p>
@@ -3995,6 +5277,7 @@
               <a:defRPr sz="1900"/>
             </a:pPr>
             <a:r>
+              <a:rPr sz="1600"/>
               <a:t>['OyunBasla' mesajını aldığında]</a:t>
             </a:r>
           </a:p>
@@ -4006,6 +5289,7 @@
               <a:defRPr sz="1900"/>
             </a:pPr>
             <a:r>
+              <a:rPr sz="1600"/>
               <a:t>[Oyun kodları...]</a:t>
             </a:r>
           </a:p>
@@ -4025,6 +5309,7 @@
               <a:defRPr sz="1900"/>
             </a:pPr>
             <a:r>
+              <a:rPr sz="1600"/>
               <a:t>Düşman Sprite:</a:t>
             </a:r>
           </a:p>
@@ -4036,6 +5321,7 @@
               <a:defRPr sz="1900"/>
             </a:pPr>
             <a:r>
+              <a:rPr sz="1600"/>
               <a:t>['OyunBasla' mesajını aldığında]</a:t>
             </a:r>
           </a:p>
@@ -4047,6 +5333,7 @@
               <a:defRPr sz="1900"/>
             </a:pPr>
             <a:r>
+              <a:rPr sz="1600"/>
               <a:t>[Hareket et...]</a:t>
             </a:r>
           </a:p>
@@ -4066,6 +5353,7 @@
               <a:defRPr sz="1900"/>
             </a:pPr>
             <a:r>
+              <a:rPr sz="1600"/>
               <a:t>💡 Mesajlar koordinasyon sağlar</a:t>
             </a:r>
           </a:p>
@@ -4077,6 +5365,7 @@
               <a:defRPr sz="1900"/>
             </a:pPr>
             <a:r>
+              <a:rPr sz="1600"/>
               <a:t>Tüm sprite'lar senkronize çalışır</a:t>
             </a:r>
           </a:p>
@@ -4175,6 +5464,7 @@
               <a:defRPr sz="1900"/>
             </a:pPr>
             <a:r>
+              <a:rPr sz="1600"/>
               <a:t>Çizim yapmak için uzantı</a:t>
             </a:r>
           </a:p>
@@ -4194,6 +5484,7 @@
               <a:defRPr sz="1900"/>
             </a:pPr>
             <a:r>
+              <a:rPr sz="1600"/>
               <a:t>✅ Uzantı Ekleme:</a:t>
             </a:r>
           </a:p>
@@ -4205,6 +5496,7 @@
               <a:defRPr sz="1700"/>
             </a:pPr>
             <a:r>
+              <a:rPr sz="1600"/>
               <a:t>    • Sol altta 'Uzantı Ekle'</a:t>
             </a:r>
           </a:p>
@@ -4216,6 +5508,7 @@
               <a:defRPr sz="1700"/>
             </a:pPr>
             <a:r>
+              <a:rPr sz="1600"/>
               <a:t>    • Kalem'i seç</a:t>
             </a:r>
           </a:p>
@@ -4235,6 +5528,7 @@
               <a:defRPr sz="1900"/>
             </a:pPr>
             <a:r>
+              <a:rPr sz="1600"/>
               <a:t>✅ Kalem Blokları:</a:t>
             </a:r>
           </a:p>
@@ -4246,6 +5540,7 @@
               <a:defRPr sz="1700"/>
             </a:pPr>
             <a:r>
+              <a:rPr sz="1600"/>
               <a:t>    • 'Hepsini temizle'</a:t>
             </a:r>
           </a:p>
@@ -4257,6 +5552,7 @@
               <a:defRPr sz="1700"/>
             </a:pPr>
             <a:r>
+              <a:rPr sz="1600"/>
               <a:t>    • 'Damga'</a:t>
             </a:r>
           </a:p>
@@ -4268,6 +5564,7 @@
               <a:defRPr sz="1700"/>
             </a:pPr>
             <a:r>
+              <a:rPr sz="1600"/>
               <a:t>    • 'Kalemi indir/kaldır'</a:t>
             </a:r>
           </a:p>
@@ -4279,6 +5576,7 @@
               <a:defRPr sz="1700"/>
             </a:pPr>
             <a:r>
+              <a:rPr sz="1600"/>
               <a:t>    • 'Kalem rengini ... yap'</a:t>
             </a:r>
           </a:p>
@@ -4290,6 +5588,7 @@
               <a:defRPr sz="1700"/>
             </a:pPr>
             <a:r>
+              <a:rPr sz="1600"/>
               <a:t>    • 'Kalem kalınlığını ... yap'</a:t>
             </a:r>
           </a:p>
@@ -4309,6 +5608,7 @@
               <a:defRPr sz="1900"/>
             </a:pPr>
             <a:r>
+              <a:rPr sz="1600"/>
               <a:t>📌 Proje: Paint Uygulaması</a:t>
             </a:r>
           </a:p>
@@ -4328,6 +5628,7 @@
               <a:defRPr sz="1900"/>
             </a:pPr>
             <a:r>
+              <a:rPr sz="1600"/>
               <a:t>[Sürekli tekrarla]</a:t>
             </a:r>
           </a:p>
@@ -4339,6 +5640,7 @@
               <a:defRPr sz="1700"/>
             </a:pPr>
             <a:r>
+              <a:rPr sz="1600"/>
               <a:t>    [Fare x, y'ye git]</a:t>
             </a:r>
           </a:p>
@@ -4350,6 +5652,7 @@
               <a:defRPr sz="1700"/>
             </a:pPr>
             <a:r>
+              <a:rPr sz="1600"/>
               <a:t>    [Eğer fare tıklandı ise]</a:t>
             </a:r>
           </a:p>
@@ -4361,6 +5664,7 @@
               <a:defRPr sz="1700"/>
             </a:pPr>
             <a:r>
+              <a:rPr sz="1600"/>
               <a:t>        [Kalemi indir]</a:t>
             </a:r>
           </a:p>
@@ -4372,6 +5676,7 @@
               <a:defRPr sz="1700"/>
             </a:pPr>
             <a:r>
+              <a:rPr sz="1600"/>
               <a:t>    [Değilse]</a:t>
             </a:r>
           </a:p>
@@ -4383,6 +5688,7 @@
               <a:defRPr sz="1700"/>
             </a:pPr>
             <a:r>
+              <a:rPr sz="1600"/>
               <a:t>        [Kalemi kaldır]</a:t>
             </a:r>
           </a:p>
@@ -4402,6 +5708,7 @@
               <a:defRPr sz="1900"/>
             </a:pPr>
             <a:r>
+              <a:rPr sz="1600"/>
               <a:t>💡 Geometri çizim öğretimi için harika!</a:t>
             </a:r>
           </a:p>
@@ -4833,6 +6140,7 @@
               <a:defRPr sz="1900"/>
             </a:pPr>
             <a:r>
+              <a:rPr sz="1600"/>
               <a:t>Final Proje: Kendi platform oyununu yap!</a:t>
             </a:r>
           </a:p>
@@ -4852,6 +6160,7 @@
               <a:defRPr sz="1900"/>
             </a:pPr>
             <a:r>
+              <a:rPr sz="1600"/>
               <a:t>✅ Gereksinimler:</a:t>
             </a:r>
           </a:p>
@@ -4863,6 +6172,7 @@
               <a:defRPr sz="1700"/>
             </a:pPr>
             <a:r>
+              <a:rPr sz="1600"/>
               <a:t>    • Oyuncu karakteri (zıplama, hareket)</a:t>
             </a:r>
           </a:p>
@@ -4874,6 +6184,7 @@
               <a:defRPr sz="1700"/>
             </a:pPr>
             <a:r>
+              <a:rPr sz="1600"/>
               <a:t>    • Platformlar</a:t>
             </a:r>
           </a:p>
@@ -4885,6 +6196,7 @@
               <a:defRPr sz="1700"/>
             </a:pPr>
             <a:r>
+              <a:rPr sz="1600"/>
               <a:t>    • Düşmanlar (AI)</a:t>
             </a:r>
           </a:p>
@@ -4896,6 +6208,7 @@
               <a:defRPr sz="1700"/>
             </a:pPr>
             <a:r>
+              <a:rPr sz="1600"/>
               <a:t>    • Puanlama sistemi</a:t>
             </a:r>
           </a:p>
@@ -4907,6 +6220,7 @@
               <a:defRPr sz="1700"/>
             </a:pPr>
             <a:r>
+              <a:rPr sz="1600"/>
               <a:t>    • Seviye tasarımı</a:t>
             </a:r>
           </a:p>
@@ -4918,6 +6232,7 @@
               <a:defRPr sz="1700"/>
             </a:pPr>
             <a:r>
+              <a:rPr sz="1600"/>
               <a:t>    • Yer çekimi mekaniği</a:t>
             </a:r>
           </a:p>
@@ -4937,6 +6252,7 @@
               <a:defRPr sz="1900"/>
             </a:pPr>
             <a:r>
+              <a:rPr sz="1600"/>
               <a:t>📌 Teknik Özellikler:</a:t>
             </a:r>
           </a:p>
@@ -4948,6 +6264,7 @@
               <a:defRPr sz="1700"/>
             </a:pPr>
             <a:r>
+              <a:rPr sz="1600"/>
               <a:t>    • Klonlama kullan</a:t>
             </a:r>
           </a:p>
@@ -4959,6 +6276,7 @@
               <a:defRPr sz="1700"/>
             </a:pPr>
             <a:r>
+              <a:rPr sz="1600"/>
               <a:t>    • Mesajlaşma kullan</a:t>
             </a:r>
           </a:p>
@@ -4970,6 +6288,7 @@
               <a:defRPr sz="1700"/>
             </a:pPr>
             <a:r>
+              <a:rPr sz="1600"/>
               <a:t>    • Değişkenler (puan, can)</a:t>
             </a:r>
           </a:p>
@@ -4981,6 +6300,7 @@
               <a:defRPr sz="1700"/>
             </a:pPr>
             <a:r>
+              <a:rPr sz="1600"/>
               <a:t>    • Çarpışma algılama</a:t>
             </a:r>
           </a:p>
@@ -4992,6 +6312,7 @@
               <a:defRPr sz="1700"/>
             </a:pPr>
             <a:r>
+              <a:rPr sz="1600"/>
               <a:t>    • Ses efektleri</a:t>
             </a:r>
           </a:p>
@@ -5011,6 +6332,7 @@
               <a:defRPr sz="1900"/>
             </a:pPr>
             <a:r>
+              <a:rPr sz="1600"/>
               <a:t>💡 Örnek Oyunlar:</a:t>
             </a:r>
           </a:p>
@@ -5022,6 +6344,7 @@
               <a:defRPr sz="1700"/>
             </a:pPr>
             <a:r>
+              <a:rPr sz="1600"/>
               <a:t>    • Mario benzeri</a:t>
             </a:r>
           </a:p>
@@ -5033,6 +6356,7 @@
               <a:defRPr sz="1700"/>
             </a:pPr>
             <a:r>
+              <a:rPr sz="1600"/>
               <a:t>    • Sonic benzeri</a:t>
             </a:r>
           </a:p>
@@ -5044,6 +6368,7 @@
               <a:defRPr sz="1700"/>
             </a:pPr>
             <a:r>
+              <a:rPr sz="1600"/>
               <a:t>    • Geometry Dash benzeri</a:t>
             </a:r>
           </a:p>
@@ -5063,6 +6388,7 @@
               <a:defRPr sz="1900"/>
             </a:pPr>
             <a:r>
+              <a:rPr sz="1600"/>
               <a:t>🎯 Bu proje tüm öğrendiklerini birleştiriyor!</a:t>
             </a:r>
           </a:p>
@@ -5637,4 +6963,324 @@
   </a:objectDefaults>
   <a:extraClrSchemeLst/>
 </a:theme>
+</file>
+
+<file path=ppt/theme/theme2.xml><?xml version="1.0" encoding="utf-8"?>
+<a:theme xmlns:a="http://schemas.openxmlformats.org/drawingml/2006/main" name="Office Theme">
+  <a:themeElements>
+    <a:clrScheme name="Office">
+      <a:dk1>
+        <a:sysClr val="windowText" lastClr="000000"/>
+      </a:dk1>
+      <a:lt1>
+        <a:sysClr val="window" lastClr="FFFFFF"/>
+      </a:lt1>
+      <a:dk2>
+        <a:srgbClr val="1F497D"/>
+      </a:dk2>
+      <a:lt2>
+        <a:srgbClr val="EEECE1"/>
+      </a:lt2>
+      <a:accent1>
+        <a:srgbClr val="4F81BD"/>
+      </a:accent1>
+      <a:accent2>
+        <a:srgbClr val="C0504D"/>
+      </a:accent2>
+      <a:accent3>
+        <a:srgbClr val="9BBB59"/>
+      </a:accent3>
+      <a:accent4>
+        <a:srgbClr val="8064A2"/>
+      </a:accent4>
+      <a:accent5>
+        <a:srgbClr val="4BACC6"/>
+      </a:accent5>
+      <a:accent6>
+        <a:srgbClr val="F79646"/>
+      </a:accent6>
+      <a:hlink>
+        <a:srgbClr val="0000FF"/>
+      </a:hlink>
+      <a:folHlink>
+        <a:srgbClr val="800080"/>
+      </a:folHlink>
+    </a:clrScheme>
+    <a:fontScheme name="Office">
+      <a:majorFont>
+        <a:latin typeface="Calibri"/>
+        <a:ea typeface=""/>
+        <a:cs typeface=""/>
+        <a:font script="Jpan" typeface="ＭＳ Ｐゴシック"/>
+        <a:font script="Hang" typeface="맑은 고딕"/>
+        <a:font script="Hans" typeface="宋体"/>
+        <a:font script="Hant" typeface="新細明體"/>
+        <a:font script="Arab" typeface="Times New Roman"/>
+        <a:font script="Hebr" typeface="Times New Roman"/>
+        <a:font script="Thai" typeface="Angsana New"/>
+        <a:font script="Ethi" typeface="Nyala"/>
+        <a:font script="Beng" typeface="Vrinda"/>
+        <a:font script="Gujr" typeface="Shruti"/>
+        <a:font script="Khmr" typeface="MoolBoran"/>
+        <a:font script="Knda" typeface="Tunga"/>
+        <a:font script="Guru" typeface="Raavi"/>
+        <a:font script="Cans" typeface="Euphemia"/>
+        <a:font script="Cher" typeface="Plantagenet Cherokee"/>
+        <a:font script="Yiii" typeface="Microsoft Yi Baiti"/>
+        <a:font script="Tibt" typeface="Microsoft Himalaya"/>
+        <a:font script="Thaa" typeface="MV Boli"/>
+        <a:font script="Deva" typeface="Mangal"/>
+        <a:font script="Telu" typeface="Gautami"/>
+        <a:font script="Taml" typeface="Latha"/>
+        <a:font script="Syrc" typeface="Estrangelo Edessa"/>
+        <a:font script="Orya" typeface="Kalinga"/>
+        <a:font script="Mlym" typeface="Kartika"/>
+        <a:font script="Laoo" typeface="DokChampa"/>
+        <a:font script="Sinh" typeface="Iskoola Pota"/>
+        <a:font script="Mong" typeface="Mongolian Baiti"/>
+        <a:font script="Viet" typeface="Times New Roman"/>
+        <a:font script="Uigh" typeface="Microsoft Uighur"/>
+        <a:font script="Geor" typeface="Sylfaen"/>
+      </a:majorFont>
+      <a:minorFont>
+        <a:latin typeface="Calibri"/>
+        <a:ea typeface=""/>
+        <a:cs typeface=""/>
+        <a:font script="Jpan" typeface="ＭＳ Ｐゴシック"/>
+        <a:font script="Hang" typeface="맑은 고딕"/>
+        <a:font script="Hans" typeface="宋体"/>
+        <a:font script="Hant" typeface="新細明體"/>
+        <a:font script="Arab" typeface="Arial"/>
+        <a:font script="Hebr" typeface="Arial"/>
+        <a:font script="Thai" typeface="Cordia New"/>
+        <a:font script="Ethi" typeface="Nyala"/>
+        <a:font script="Beng" typeface="Vrinda"/>
+        <a:font script="Gujr" typeface="Shruti"/>
+        <a:font script="Khmr" typeface="DaunPenh"/>
+        <a:font script="Knda" typeface="Tunga"/>
+        <a:font script="Guru" typeface="Raavi"/>
+        <a:font script="Cans" typeface="Euphemia"/>
+        <a:font script="Cher" typeface="Plantagenet Cherokee"/>
+        <a:font script="Yiii" typeface="Microsoft Yi Baiti"/>
+        <a:font script="Tibt" typeface="Microsoft Himalaya"/>
+        <a:font script="Thaa" typeface="MV Boli"/>
+        <a:font script="Deva" typeface="Mangal"/>
+        <a:font script="Telu" typeface="Gautami"/>
+        <a:font script="Taml" typeface="Latha"/>
+        <a:font script="Syrc" typeface="Estrangelo Edessa"/>
+        <a:font script="Orya" typeface="Kalinga"/>
+        <a:font script="Mlym" typeface="Kartika"/>
+        <a:font script="Laoo" typeface="DokChampa"/>
+        <a:font script="Sinh" typeface="Iskoola Pota"/>
+        <a:font script="Mong" typeface="Mongolian Baiti"/>
+        <a:font script="Viet" typeface="Arial"/>
+        <a:font script="Uigh" typeface="Microsoft Uighur"/>
+        <a:font script="Geor" typeface="Sylfaen"/>
+      </a:minorFont>
+    </a:fontScheme>
+    <a:fmtScheme name="Office">
+      <a:fillStyleLst>
+        <a:solidFill>
+          <a:schemeClr val="phClr"/>
+        </a:solidFill>
+        <a:gradFill rotWithShape="1">
+          <a:gsLst>
+            <a:gs pos="0">
+              <a:schemeClr val="phClr">
+                <a:tint val="50000"/>
+                <a:satMod val="300000"/>
+              </a:schemeClr>
+            </a:gs>
+            <a:gs pos="35000">
+              <a:schemeClr val="phClr">
+                <a:tint val="37000"/>
+                <a:satMod val="300000"/>
+              </a:schemeClr>
+            </a:gs>
+            <a:gs pos="100000">
+              <a:schemeClr val="phClr">
+                <a:tint val="15000"/>
+                <a:satMod val="350000"/>
+              </a:schemeClr>
+            </a:gs>
+          </a:gsLst>
+          <a:lin ang="16200000" scaled="1"/>
+        </a:gradFill>
+        <a:gradFill rotWithShape="1">
+          <a:gsLst>
+            <a:gs pos="0">
+              <a:schemeClr val="phClr">
+                <a:tint val="100000"/>
+                <a:shade val="100000"/>
+                <a:satMod val="130000"/>
+              </a:schemeClr>
+            </a:gs>
+            <a:gs pos="100000">
+              <a:schemeClr val="phClr">
+                <a:tint val="50000"/>
+                <a:shade val="100000"/>
+                <a:satMod val="350000"/>
+              </a:schemeClr>
+            </a:gs>
+          </a:gsLst>
+          <a:lin ang="16200000" scaled="0"/>
+        </a:gradFill>
+      </a:fillStyleLst>
+      <a:lnStyleLst>
+        <a:ln w="9525" cap="flat" cmpd="sng" algn="ctr">
+          <a:solidFill>
+            <a:schemeClr val="phClr">
+              <a:shade val="95000"/>
+              <a:satMod val="105000"/>
+            </a:schemeClr>
+          </a:solidFill>
+          <a:prstDash val="solid"/>
+        </a:ln>
+        <a:ln w="25400" cap="flat" cmpd="sng" algn="ctr">
+          <a:solidFill>
+            <a:schemeClr val="phClr"/>
+          </a:solidFill>
+          <a:prstDash val="solid"/>
+        </a:ln>
+        <a:ln w="38100" cap="flat" cmpd="sng" algn="ctr">
+          <a:solidFill>
+            <a:schemeClr val="phClr"/>
+          </a:solidFill>
+          <a:prstDash val="solid"/>
+        </a:ln>
+      </a:lnStyleLst>
+      <a:effectStyleLst>
+        <a:effectStyle>
+          <a:effectLst>
+            <a:outerShdw blurRad="40000" dist="20000" dir="5400000" rotWithShape="0">
+              <a:srgbClr val="000000">
+                <a:alpha val="38000"/>
+              </a:srgbClr>
+            </a:outerShdw>
+          </a:effectLst>
+        </a:effectStyle>
+        <a:effectStyle>
+          <a:effectLst>
+            <a:outerShdw blurRad="40000" dist="23000" dir="5400000" rotWithShape="0">
+              <a:srgbClr val="000000">
+                <a:alpha val="35000"/>
+              </a:srgbClr>
+            </a:outerShdw>
+          </a:effectLst>
+        </a:effectStyle>
+        <a:effectStyle>
+          <a:effectLst>
+            <a:outerShdw blurRad="40000" dist="23000" dir="5400000" rotWithShape="0">
+              <a:srgbClr val="000000">
+                <a:alpha val="35000"/>
+              </a:srgbClr>
+            </a:outerShdw>
+          </a:effectLst>
+          <a:scene3d>
+            <a:camera prst="orthographicFront">
+              <a:rot lat="0" lon="0" rev="0"/>
+            </a:camera>
+            <a:lightRig rig="threePt" dir="t">
+              <a:rot lat="0" lon="0" rev="1200000"/>
+            </a:lightRig>
+          </a:scene3d>
+          <a:sp3d>
+            <a:bevelT w="63500" h="25400"/>
+          </a:sp3d>
+        </a:effectStyle>
+      </a:effectStyleLst>
+      <a:bgFillStyleLst>
+        <a:solidFill>
+          <a:schemeClr val="phClr"/>
+        </a:solidFill>
+        <a:gradFill rotWithShape="1">
+          <a:gsLst>
+            <a:gs pos="0">
+              <a:schemeClr val="phClr">
+                <a:tint val="40000"/>
+                <a:satMod val="350000"/>
+              </a:schemeClr>
+            </a:gs>
+            <a:gs pos="40000">
+              <a:schemeClr val="phClr">
+                <a:tint val="45000"/>
+                <a:shade val="99000"/>
+                <a:satMod val="350000"/>
+              </a:schemeClr>
+            </a:gs>
+            <a:gs pos="100000">
+              <a:schemeClr val="phClr">
+                <a:shade val="20000"/>
+                <a:satMod val="255000"/>
+              </a:schemeClr>
+            </a:gs>
+          </a:gsLst>
+          <a:path path="circle">
+            <a:fillToRect l="50000" t="-80000" r="50000" b="180000"/>
+          </a:path>
+        </a:gradFill>
+        <a:gradFill rotWithShape="1">
+          <a:gsLst>
+            <a:gs pos="0">
+              <a:schemeClr val="phClr">
+                <a:tint val="80000"/>
+                <a:satMod val="300000"/>
+              </a:schemeClr>
+            </a:gs>
+            <a:gs pos="100000">
+              <a:schemeClr val="phClr">
+                <a:shade val="30000"/>
+                <a:satMod val="200000"/>
+              </a:schemeClr>
+            </a:gs>
+          </a:gsLst>
+          <a:path path="circle">
+            <a:fillToRect l="50000" t="50000" r="50000" b="50000"/>
+          </a:path>
+        </a:gradFill>
+      </a:bgFillStyleLst>
+    </a:fmtScheme>
+  </a:themeElements>
+  <a:objectDefaults>
+    <a:spDef>
+      <a:spPr/>
+      <a:bodyPr/>
+      <a:lstStyle/>
+      <a:style>
+        <a:lnRef idx="1">
+          <a:schemeClr val="accent1"/>
+        </a:lnRef>
+        <a:fillRef idx="3">
+          <a:schemeClr val="accent1"/>
+        </a:fillRef>
+        <a:effectRef idx="2">
+          <a:schemeClr val="accent1"/>
+        </a:effectRef>
+        <a:fontRef idx="minor">
+          <a:schemeClr val="lt1"/>
+        </a:fontRef>
+      </a:style>
+    </a:spDef>
+    <a:lnDef>
+      <a:spPr/>
+      <a:bodyPr/>
+      <a:lstStyle/>
+      <a:style>
+        <a:lnRef idx="2">
+          <a:schemeClr val="accent1"/>
+        </a:lnRef>
+        <a:fillRef idx="0">
+          <a:schemeClr val="accent1"/>
+        </a:fillRef>
+        <a:effectRef idx="1">
+          <a:schemeClr val="accent1"/>
+        </a:effectRef>
+        <a:fontRef idx="minor">
+          <a:schemeClr val="tx1"/>
+        </a:fontRef>
+      </a:style>
+    </a:lnDef>
+  </a:objectDefaults>
+  <a:extraClrSchemeLst/>
+</a:theme>
 </file>
--- a/sunumlar/6-sinif-unite4-scratch-ileri-DETAYLI.pptx
+++ b/sunumlar/6-sinif-unite4-scratch-ileri-DETAYLI.pptx
@@ -4373,7 +4373,7 @@
           <a:noFill/>
         </p:spPr>
         <p:txBody>
-          <a:bodyPr wrap="none">
+          <a:bodyPr wrap="square">
             <a:spAutoFit/>
           </a:bodyPr>
           <a:lstStyle/>
@@ -4408,7 +4408,7 @@
           <a:noFill/>
         </p:spPr>
         <p:txBody>
-          <a:bodyPr wrap="none">
+          <a:bodyPr wrap="square">
             <a:spAutoFit/>
           </a:bodyPr>
           <a:lstStyle/>
@@ -4456,7 +4456,7 @@
         </p:nvSpPr>
         <p:spPr/>
         <p:txBody>
-          <a:bodyPr/>
+          <a:bodyPr wrap="square"/>
           <a:lstStyle/>
           <a:p>
             <a:pPr>
@@ -4510,152 +4510,215 @@
             <a:spAutoFit/>
           </a:bodyPr>
           <a:lstStyle/>
-          <a:p/>
-          <a:p>
-            <a:pPr>
-              <a:spcAft>
-                <a:spcPts val="1000"/>
-              </a:spcAft>
-              <a:defRPr sz="1900"/>
-            </a:pPr>
-            <a:r>
+          <a:p>
+            <a:pPr>
+              <a:lnSpc>
+                <a:spcPct val="90000"/>
+              </a:lnSpc>
+              <a:spcAft>
+                <a:spcPts val="300"/>
+              </a:spcAft>
+            </a:pPr>
+          </a:p>
+          <a:p>
+            <a:pPr>
+              <a:lnSpc>
+                <a:spcPct val="90000"/>
+              </a:lnSpc>
+              <a:spcAft>
+                <a:spcPts val="300"/>
+              </a:spcAft>
+              <a:defRPr sz="1900"/>
+            </a:pPr>
+            <a:r>
+              <a:rPr sz="1500"/>
               <a:t>Bu ünitede neler öğreneceğiz? (İleri Seviye Scratch)</a:t>
             </a:r>
           </a:p>
           <a:p>
             <a:pPr>
-              <a:spcAft>
-                <a:spcPts val="1000"/>
-              </a:spcAft>
-              <a:defRPr sz="1900"/>
-            </a:pPr>
-          </a:p>
-          <a:p>
-            <a:pPr>
-              <a:spcAft>
-                <a:spcPts val="1000"/>
-              </a:spcAft>
-              <a:defRPr sz="1900"/>
-            </a:pPr>
-            <a:r>
+              <a:lnSpc>
+                <a:spcPct val="90000"/>
+              </a:lnSpc>
+              <a:spcAft>
+                <a:spcPts val="300"/>
+              </a:spcAft>
+              <a:defRPr sz="1900"/>
+            </a:pPr>
+          </a:p>
+          <a:p>
+            <a:pPr>
+              <a:lnSpc>
+                <a:spcPct val="90000"/>
+              </a:lnSpc>
+              <a:spcAft>
+                <a:spcPts val="300"/>
+              </a:spcAft>
+              <a:defRPr sz="1900"/>
+            </a:pPr>
+            <a:r>
+              <a:rPr sz="1500"/>
               <a:t>✅ 1. Klonlama</a:t>
             </a:r>
           </a:p>
           <a:p>
             <a:pPr>
-              <a:spcAft>
-                <a:spcPts val="1000"/>
-              </a:spcAft>
-              <a:defRPr sz="1900"/>
-            </a:pPr>
-            <a:r>
+              <a:lnSpc>
+                <a:spcPct val="90000"/>
+              </a:lnSpc>
+              <a:spcAft>
+                <a:spcPts val="300"/>
+              </a:spcAft>
+              <a:defRPr sz="1900"/>
+            </a:pPr>
+            <a:r>
+              <a:rPr sz="1500"/>
               <a:t>✅ 2. Mesajlaşma (Broadcast)</a:t>
             </a:r>
           </a:p>
           <a:p>
             <a:pPr>
-              <a:spcAft>
-                <a:spcPts val="1000"/>
-              </a:spcAft>
-              <a:defRPr sz="1900"/>
-            </a:pPr>
-            <a:r>
+              <a:lnSpc>
+                <a:spcPct val="90000"/>
+              </a:lnSpc>
+              <a:spcAft>
+                <a:spcPts val="300"/>
+              </a:spcAft>
+              <a:defRPr sz="1900"/>
+            </a:pPr>
+            <a:r>
+              <a:rPr sz="1500"/>
               <a:t>✅ 3. Kalem Uzantısı</a:t>
             </a:r>
           </a:p>
           <a:p>
             <a:pPr>
-              <a:spcAft>
-                <a:spcPts val="1000"/>
-              </a:spcAft>
-              <a:defRPr sz="1900"/>
-            </a:pPr>
-            <a:r>
+              <a:lnSpc>
+                <a:spcPct val="90000"/>
+              </a:lnSpc>
+              <a:spcAft>
+                <a:spcPts val="300"/>
+              </a:spcAft>
+              <a:defRPr sz="1900"/>
+            </a:pPr>
+            <a:r>
+              <a:rPr sz="1500"/>
               <a:t>✅ 4. Müzik Uzantısı</a:t>
             </a:r>
           </a:p>
           <a:p>
             <a:pPr>
-              <a:spcAft>
-                <a:spcPts val="1000"/>
-              </a:spcAft>
-              <a:defRPr sz="1900"/>
-            </a:pPr>
-            <a:r>
+              <a:lnSpc>
+                <a:spcPct val="90000"/>
+              </a:lnSpc>
+              <a:spcAft>
+                <a:spcPts val="300"/>
+              </a:spcAft>
+              <a:defRPr sz="1900"/>
+            </a:pPr>
+            <a:r>
+              <a:rPr sz="1500"/>
               <a:t>✅ 5. Video Algılama</a:t>
             </a:r>
           </a:p>
           <a:p>
             <a:pPr>
-              <a:spcAft>
-                <a:spcPts val="1000"/>
-              </a:spcAft>
-              <a:defRPr sz="1900"/>
-            </a:pPr>
-            <a:r>
+              <a:lnSpc>
+                <a:spcPct val="90000"/>
+              </a:lnSpc>
+              <a:spcAft>
+                <a:spcPts val="300"/>
+              </a:spcAft>
+              <a:defRPr sz="1900"/>
+            </a:pPr>
+            <a:r>
+              <a:rPr sz="1500"/>
               <a:t>✅ 6. Karmaşık Oyun Mekaniği</a:t>
             </a:r>
           </a:p>
           <a:p>
             <a:pPr>
-              <a:spcAft>
-                <a:spcPts val="1000"/>
-              </a:spcAft>
-              <a:defRPr sz="1900"/>
-            </a:pPr>
-            <a:r>
+              <a:lnSpc>
+                <a:spcPct val="90000"/>
+              </a:lnSpc>
+              <a:spcAft>
+                <a:spcPts val="300"/>
+              </a:spcAft>
+              <a:defRPr sz="1900"/>
+            </a:pPr>
+            <a:r>
+              <a:rPr sz="1500"/>
               <a:t>✅ 7. Yapay Zeka ile Scratch</a:t>
             </a:r>
           </a:p>
           <a:p>
             <a:pPr>
-              <a:spcAft>
-                <a:spcPts val="1000"/>
-              </a:spcAft>
-              <a:defRPr sz="1900"/>
-            </a:pPr>
-            <a:r>
+              <a:lnSpc>
+                <a:spcPct val="90000"/>
+              </a:lnSpc>
+              <a:spcAft>
+                <a:spcPts val="300"/>
+              </a:spcAft>
+              <a:defRPr sz="1900"/>
+            </a:pPr>
+            <a:r>
+              <a:rPr sz="1500"/>
               <a:t>✅ 8. Bulut Değişkenleri</a:t>
             </a:r>
           </a:p>
           <a:p>
             <a:pPr>
-              <a:spcAft>
-                <a:spcPts val="1000"/>
-              </a:spcAft>
-              <a:defRPr sz="1900"/>
-            </a:pPr>
-            <a:r>
+              <a:lnSpc>
+                <a:spcPct val="90000"/>
+              </a:lnSpc>
+              <a:spcAft>
+                <a:spcPts val="300"/>
+              </a:spcAft>
+              <a:defRPr sz="1900"/>
+            </a:pPr>
+            <a:r>
+              <a:rPr sz="1500"/>
               <a:t>✅ 9. Final Proje: Platform Oyunu</a:t>
             </a:r>
           </a:p>
           <a:p>
             <a:pPr>
-              <a:spcAft>
-                <a:spcPts val="1000"/>
-              </a:spcAft>
-              <a:defRPr sz="1900"/>
-            </a:pPr>
-          </a:p>
-          <a:p>
-            <a:pPr>
-              <a:spcAft>
-                <a:spcPts val="1000"/>
-              </a:spcAft>
-              <a:defRPr sz="1900"/>
-            </a:pPr>
-            <a:r>
+              <a:lnSpc>
+                <a:spcPct val="90000"/>
+              </a:lnSpc>
+              <a:spcAft>
+                <a:spcPts val="300"/>
+              </a:spcAft>
+              <a:defRPr sz="1900"/>
+            </a:pPr>
+          </a:p>
+          <a:p>
+            <a:pPr>
+              <a:lnSpc>
+                <a:spcPct val="90000"/>
+              </a:lnSpc>
+              <a:spcAft>
+                <a:spcPts val="300"/>
+              </a:spcAft>
+              <a:defRPr sz="1900"/>
+            </a:pPr>
+            <a:r>
+              <a:rPr sz="1500"/>
               <a:t>⏰ Süre: 8 Hafta</a:t>
             </a:r>
           </a:p>
           <a:p>
             <a:pPr>
-              <a:spcAft>
-                <a:spcPts val="1000"/>
-              </a:spcAft>
-              <a:defRPr sz="1900"/>
-            </a:pPr>
-            <a:r>
+              <a:lnSpc>
+                <a:spcPct val="90000"/>
+              </a:lnSpc>
+              <a:spcAft>
+                <a:spcPts val="300"/>
+              </a:spcAft>
+              <a:defRPr sz="1900"/>
+            </a:pPr>
+            <a:r>
+              <a:rPr sz="1500"/>
               <a:t>🎯 Amaç: Gelişmiş oyunlar programlamak!</a:t>
             </a:r>
           </a:p>
@@ -4691,7 +4754,7 @@
         </p:nvSpPr>
         <p:spPr/>
         <p:txBody>
-          <a:bodyPr/>
+          <a:bodyPr wrap="square"/>
           <a:lstStyle/>
           <a:p>
             <a:pPr>
@@ -4745,288 +4808,375 @@
             <a:spAutoFit/>
           </a:bodyPr>
           <a:lstStyle/>
-          <a:p/>
-          <a:p>
-            <a:pPr>
-              <a:spcAft>
-                <a:spcPts val="1000"/>
-              </a:spcAft>
-              <a:defRPr sz="1900"/>
-            </a:pPr>
-            <a:r>
-              <a:rPr sz="1600"/>
+          <a:p>
+            <a:pPr>
+              <a:lnSpc>
+                <a:spcPct val="90000"/>
+              </a:lnSpc>
+              <a:spcAft>
+                <a:spcPts val="300"/>
+              </a:spcAft>
+            </a:pPr>
+          </a:p>
+          <a:p>
+            <a:pPr>
+              <a:lnSpc>
+                <a:spcPct val="90000"/>
+              </a:lnSpc>
+              <a:spcAft>
+                <a:spcPts val="300"/>
+              </a:spcAft>
+              <a:defRPr sz="1900"/>
+            </a:pPr>
+            <a:r>
+              <a:rPr sz="1400"/>
               <a:t>Klonlama = Sprite'ın kopyalarını oluşturma</a:t>
             </a:r>
           </a:p>
           <a:p>
             <a:pPr>
-              <a:spcAft>
-                <a:spcPts val="1000"/>
-              </a:spcAft>
-              <a:defRPr sz="1900"/>
-            </a:pPr>
-          </a:p>
-          <a:p>
-            <a:pPr>
-              <a:spcAft>
-                <a:spcPts val="1000"/>
-              </a:spcAft>
-              <a:defRPr sz="1900"/>
-            </a:pPr>
-            <a:r>
-              <a:rPr sz="1600"/>
+              <a:lnSpc>
+                <a:spcPct val="90000"/>
+              </a:lnSpc>
+              <a:spcAft>
+                <a:spcPts val="300"/>
+              </a:spcAft>
+              <a:defRPr sz="1900"/>
+            </a:pPr>
+          </a:p>
+          <a:p>
+            <a:pPr>
+              <a:lnSpc>
+                <a:spcPct val="90000"/>
+              </a:lnSpc>
+              <a:spcAft>
+                <a:spcPts val="300"/>
+              </a:spcAft>
+              <a:defRPr sz="1900"/>
+            </a:pPr>
+            <a:r>
+              <a:rPr sz="1400"/>
               <a:t>✅ Neden Kullanılır?</a:t>
             </a:r>
           </a:p>
           <a:p>
             <a:pPr lvl="1">
-              <a:spcAft>
-                <a:spcPts val="1000"/>
+              <a:lnSpc>
+                <a:spcPct val="90000"/>
+              </a:lnSpc>
+              <a:spcAft>
+                <a:spcPts val="300"/>
               </a:spcAft>
               <a:defRPr sz="1700"/>
             </a:pPr>
             <a:r>
-              <a:rPr sz="1600"/>
+              <a:rPr sz="1400"/>
               <a:t>    • Çok nesne oluşturmak (düşmanlar, mermiler)</a:t>
             </a:r>
           </a:p>
           <a:p>
             <a:pPr lvl="1">
-              <a:spcAft>
-                <a:spcPts val="1000"/>
+              <a:lnSpc>
+                <a:spcPct val="90000"/>
+              </a:lnSpc>
+              <a:spcAft>
+                <a:spcPts val="300"/>
               </a:spcAft>
               <a:defRPr sz="1700"/>
             </a:pPr>
             <a:r>
-              <a:rPr sz="1600"/>
+              <a:rPr sz="1400"/>
               <a:t>    • Dinamik oyunlar</a:t>
             </a:r>
           </a:p>
           <a:p>
             <a:pPr>
-              <a:spcAft>
-                <a:spcPts val="1000"/>
-              </a:spcAft>
-              <a:defRPr sz="1900"/>
-            </a:pPr>
-          </a:p>
-          <a:p>
-            <a:pPr>
-              <a:spcAft>
-                <a:spcPts val="1000"/>
-              </a:spcAft>
-              <a:defRPr sz="1900"/>
-            </a:pPr>
-            <a:r>
-              <a:rPr sz="1600"/>
+              <a:lnSpc>
+                <a:spcPct val="90000"/>
+              </a:lnSpc>
+              <a:spcAft>
+                <a:spcPts val="300"/>
+              </a:spcAft>
+              <a:defRPr sz="1900"/>
+            </a:pPr>
+          </a:p>
+          <a:p>
+            <a:pPr>
+              <a:lnSpc>
+                <a:spcPct val="90000"/>
+              </a:lnSpc>
+              <a:spcAft>
+                <a:spcPts val="300"/>
+              </a:spcAft>
+              <a:defRPr sz="1900"/>
+            </a:pPr>
+            <a:r>
+              <a:rPr sz="1400"/>
               <a:t>✅ Klonlama Blokları:</a:t>
             </a:r>
           </a:p>
           <a:p>
             <a:pPr>
-              <a:spcAft>
-                <a:spcPts val="1000"/>
-              </a:spcAft>
-              <a:defRPr sz="1900"/>
-            </a:pPr>
-          </a:p>
-          <a:p>
-            <a:pPr>
-              <a:spcAft>
-                <a:spcPts val="1000"/>
-              </a:spcAft>
-              <a:defRPr sz="1900"/>
-            </a:pPr>
-            <a:r>
-              <a:rPr sz="1600"/>
+              <a:lnSpc>
+                <a:spcPct val="90000"/>
+              </a:lnSpc>
+              <a:spcAft>
+                <a:spcPts val="300"/>
+              </a:spcAft>
+              <a:defRPr sz="1900"/>
+            </a:pPr>
+          </a:p>
+          <a:p>
+            <a:pPr>
+              <a:lnSpc>
+                <a:spcPct val="90000"/>
+              </a:lnSpc>
+              <a:spcAft>
+                <a:spcPts val="300"/>
+              </a:spcAft>
+              <a:defRPr sz="1900"/>
+            </a:pPr>
+            <a:r>
+              <a:rPr sz="1400"/>
               <a:t>🔹 'Kendimin klonunu oluştur'</a:t>
             </a:r>
           </a:p>
           <a:p>
             <a:pPr>
-              <a:spcAft>
-                <a:spcPts val="1000"/>
-              </a:spcAft>
-              <a:defRPr sz="1900"/>
-            </a:pPr>
-            <a:r>
-              <a:rPr sz="1600"/>
+              <a:lnSpc>
+                <a:spcPct val="90000"/>
+              </a:lnSpc>
+              <a:spcAft>
+                <a:spcPts val="300"/>
+              </a:spcAft>
+              <a:defRPr sz="1900"/>
+            </a:pPr>
+            <a:r>
+              <a:rPr sz="1400"/>
               <a:t>🔹 'Klon olarak başladığımda'</a:t>
             </a:r>
           </a:p>
           <a:p>
             <a:pPr>
-              <a:spcAft>
-                <a:spcPts val="1000"/>
-              </a:spcAft>
-              <a:defRPr sz="1900"/>
-            </a:pPr>
-            <a:r>
-              <a:rPr sz="1600"/>
+              <a:lnSpc>
+                <a:spcPct val="90000"/>
+              </a:lnSpc>
+              <a:spcAft>
+                <a:spcPts val="300"/>
+              </a:spcAft>
+              <a:defRPr sz="1900"/>
+            </a:pPr>
+            <a:r>
+              <a:rPr sz="1400"/>
               <a:t>🔹 'Bu klonu sil'</a:t>
             </a:r>
           </a:p>
           <a:p>
             <a:pPr>
-              <a:spcAft>
-                <a:spcPts val="1000"/>
-              </a:spcAft>
-              <a:defRPr sz="1900"/>
-            </a:pPr>
-          </a:p>
-          <a:p>
-            <a:pPr>
-              <a:spcAft>
-                <a:spcPts val="1000"/>
-              </a:spcAft>
-              <a:defRPr sz="1900"/>
-            </a:pPr>
-            <a:r>
-              <a:rPr sz="1600"/>
+              <a:lnSpc>
+                <a:spcPct val="90000"/>
+              </a:lnSpc>
+              <a:spcAft>
+                <a:spcPts val="300"/>
+              </a:spcAft>
+              <a:defRPr sz="1900"/>
+            </a:pPr>
+          </a:p>
+          <a:p>
+            <a:pPr>
+              <a:lnSpc>
+                <a:spcPct val="90000"/>
+              </a:lnSpc>
+              <a:spcAft>
+                <a:spcPts val="300"/>
+              </a:spcAft>
+              <a:defRPr sz="1900"/>
+            </a:pPr>
+            <a:r>
+              <a:rPr sz="1400"/>
               <a:t>📌 Örnek: Yıldız Yağmuru</a:t>
             </a:r>
           </a:p>
           <a:p>
             <a:pPr>
-              <a:spcAft>
-                <a:spcPts val="1000"/>
-              </a:spcAft>
-              <a:defRPr sz="1900"/>
-            </a:pPr>
-          </a:p>
-          <a:p>
-            <a:pPr>
-              <a:spcAft>
-                <a:spcPts val="1000"/>
-              </a:spcAft>
-              <a:defRPr sz="1900"/>
-            </a:pPr>
-            <a:r>
-              <a:rPr sz="1600"/>
+              <a:lnSpc>
+                <a:spcPct val="90000"/>
+              </a:lnSpc>
+              <a:spcAft>
+                <a:spcPts val="300"/>
+              </a:spcAft>
+              <a:defRPr sz="1900"/>
+            </a:pPr>
+          </a:p>
+          <a:p>
+            <a:pPr>
+              <a:lnSpc>
+                <a:spcPct val="90000"/>
+              </a:lnSpc>
+              <a:spcAft>
+                <a:spcPts val="300"/>
+              </a:spcAft>
+              <a:defRPr sz="1900"/>
+            </a:pPr>
+            <a:r>
+              <a:rPr sz="1400"/>
               <a:t>[Yeşil bayrak]</a:t>
             </a:r>
           </a:p>
           <a:p>
             <a:pPr>
-              <a:spcAft>
-                <a:spcPts val="1000"/>
-              </a:spcAft>
-              <a:defRPr sz="1900"/>
-            </a:pPr>
-            <a:r>
-              <a:rPr sz="1600"/>
+              <a:lnSpc>
+                <a:spcPct val="90000"/>
+              </a:lnSpc>
+              <a:spcAft>
+                <a:spcPts val="300"/>
+              </a:spcAft>
+              <a:defRPr sz="1900"/>
+            </a:pPr>
+            <a:r>
+              <a:rPr sz="1400"/>
               <a:t>[Sürekli tekrarla]</a:t>
             </a:r>
           </a:p>
           <a:p>
             <a:pPr lvl="1">
-              <a:spcAft>
-                <a:spcPts val="1000"/>
+              <a:lnSpc>
+                <a:spcPct val="90000"/>
+              </a:lnSpc>
+              <a:spcAft>
+                <a:spcPts val="300"/>
               </a:spcAft>
               <a:defRPr sz="1700"/>
             </a:pPr>
             <a:r>
-              <a:rPr sz="1600"/>
+              <a:rPr sz="1400"/>
               <a:t>    [Kendimin klonunu oluştur]</a:t>
             </a:r>
           </a:p>
           <a:p>
             <a:pPr lvl="1">
-              <a:spcAft>
-                <a:spcPts val="1000"/>
+              <a:lnSpc>
+                <a:spcPct val="90000"/>
+              </a:lnSpc>
+              <a:spcAft>
+                <a:spcPts val="300"/>
               </a:spcAft>
               <a:defRPr sz="1700"/>
             </a:pPr>
             <a:r>
-              <a:rPr sz="1600"/>
+              <a:rPr sz="1400"/>
               <a:t>    [1 saniye bekle]</a:t>
             </a:r>
           </a:p>
           <a:p>
             <a:pPr>
-              <a:spcAft>
-                <a:spcPts val="1000"/>
-              </a:spcAft>
-              <a:defRPr sz="1900"/>
-            </a:pPr>
-          </a:p>
-          <a:p>
-            <a:pPr>
-              <a:spcAft>
-                <a:spcPts val="1000"/>
-              </a:spcAft>
-              <a:defRPr sz="1900"/>
-            </a:pPr>
-            <a:r>
-              <a:rPr sz="1600"/>
+              <a:lnSpc>
+                <a:spcPct val="90000"/>
+              </a:lnSpc>
+              <a:spcAft>
+                <a:spcPts val="300"/>
+              </a:spcAft>
+              <a:defRPr sz="1900"/>
+            </a:pPr>
+          </a:p>
+          <a:p>
+            <a:pPr>
+              <a:lnSpc>
+                <a:spcPct val="90000"/>
+              </a:lnSpc>
+              <a:spcAft>
+                <a:spcPts val="300"/>
+              </a:spcAft>
+              <a:defRPr sz="1900"/>
+            </a:pPr>
+            <a:r>
+              <a:rPr sz="1400"/>
               <a:t>[Klon olarak başladığımda]</a:t>
             </a:r>
           </a:p>
           <a:p>
             <a:pPr>
-              <a:spcAft>
-                <a:spcPts val="1000"/>
-              </a:spcAft>
-              <a:defRPr sz="1900"/>
-            </a:pPr>
-            <a:r>
-              <a:rPr sz="1600"/>
+              <a:lnSpc>
+                <a:spcPct val="90000"/>
+              </a:lnSpc>
+              <a:spcAft>
+                <a:spcPts val="300"/>
+              </a:spcAft>
+              <a:defRPr sz="1900"/>
+            </a:pPr>
+            <a:r>
+              <a:rPr sz="1400"/>
               <a:t>[Rastgele x, y=180]</a:t>
             </a:r>
           </a:p>
           <a:p>
             <a:pPr>
-              <a:spcAft>
-                <a:spcPts val="1000"/>
-              </a:spcAft>
-              <a:defRPr sz="1900"/>
-            </a:pPr>
-            <a:r>
-              <a:rPr sz="1600"/>
+              <a:lnSpc>
+                <a:spcPct val="90000"/>
+              </a:lnSpc>
+              <a:spcAft>
+                <a:spcPts val="300"/>
+              </a:spcAft>
+              <a:defRPr sz="1900"/>
+            </a:pPr>
+            <a:r>
+              <a:rPr sz="1400"/>
               <a:t>[y &lt; -180 olana kadar]</a:t>
             </a:r>
           </a:p>
           <a:p>
             <a:pPr lvl="1">
-              <a:spcAft>
-                <a:spcPts val="1000"/>
+              <a:lnSpc>
+                <a:spcPct val="90000"/>
+              </a:lnSpc>
+              <a:spcAft>
+                <a:spcPts val="300"/>
               </a:spcAft>
               <a:defRPr sz="1700"/>
             </a:pPr>
             <a:r>
-              <a:rPr sz="1600"/>
+              <a:rPr sz="1400"/>
               <a:t>    [y'yi 10 azalt]</a:t>
             </a:r>
           </a:p>
           <a:p>
             <a:pPr>
-              <a:spcAft>
-                <a:spcPts val="1000"/>
-              </a:spcAft>
-              <a:defRPr sz="1900"/>
-            </a:pPr>
-            <a:r>
-              <a:rPr sz="1600"/>
+              <a:lnSpc>
+                <a:spcPct val="90000"/>
+              </a:lnSpc>
+              <a:spcAft>
+                <a:spcPts val="300"/>
+              </a:spcAft>
+              <a:defRPr sz="1900"/>
+            </a:pPr>
+            <a:r>
+              <a:rPr sz="1400"/>
               <a:t>[Bu klonu sil]</a:t>
             </a:r>
           </a:p>
           <a:p>
             <a:pPr>
-              <a:spcAft>
-                <a:spcPts val="1000"/>
-              </a:spcAft>
-              <a:defRPr sz="1900"/>
-            </a:pPr>
-          </a:p>
-          <a:p>
-            <a:pPr>
-              <a:spcAft>
-                <a:spcPts val="1000"/>
-              </a:spcAft>
-              <a:defRPr sz="1900"/>
-            </a:pPr>
-            <a:r>
-              <a:rPr sz="1600"/>
+              <a:lnSpc>
+                <a:spcPct val="90000"/>
+              </a:lnSpc>
+              <a:spcAft>
+                <a:spcPts val="300"/>
+              </a:spcAft>
+              <a:defRPr sz="1900"/>
+            </a:pPr>
+          </a:p>
+          <a:p>
+            <a:pPr>
+              <a:lnSpc>
+                <a:spcPct val="90000"/>
+              </a:lnSpc>
+              <a:spcAft>
+                <a:spcPts val="300"/>
+              </a:spcAft>
+              <a:defRPr sz="1900"/>
+            </a:pPr>
+            <a:r>
+              <a:rPr sz="1400"/>
               <a:t>💡 Klonlar performans için önemli!</a:t>
             </a:r>
           </a:p>
@@ -5062,7 +5212,7 @@
         </p:nvSpPr>
         <p:spPr/>
         <p:txBody>
-          <a:bodyPr/>
+          <a:bodyPr wrap="square"/>
           <a:lstStyle/>
           <a:p>
             <a:pPr>
@@ -5116,256 +5266,334 @@
             <a:spAutoFit/>
           </a:bodyPr>
           <a:lstStyle/>
-          <a:p/>
-          <a:p>
-            <a:pPr>
-              <a:spcAft>
-                <a:spcPts val="1000"/>
-              </a:spcAft>
-              <a:defRPr sz="1900"/>
-            </a:pPr>
-            <a:r>
-              <a:rPr sz="1600"/>
+          <a:p>
+            <a:pPr>
+              <a:lnSpc>
+                <a:spcPct val="90000"/>
+              </a:lnSpc>
+              <a:spcAft>
+                <a:spcPts val="300"/>
+              </a:spcAft>
+            </a:pPr>
+          </a:p>
+          <a:p>
+            <a:pPr>
+              <a:lnSpc>
+                <a:spcPct val="90000"/>
+              </a:lnSpc>
+              <a:spcAft>
+                <a:spcPts val="300"/>
+              </a:spcAft>
+              <a:defRPr sz="1900"/>
+            </a:pPr>
+            <a:r>
+              <a:rPr sz="1400"/>
               <a:t>Sprite'lar arasında iletişim</a:t>
             </a:r>
           </a:p>
           <a:p>
             <a:pPr>
-              <a:spcAft>
-                <a:spcPts val="1000"/>
-              </a:spcAft>
-              <a:defRPr sz="1900"/>
-            </a:pPr>
-          </a:p>
-          <a:p>
-            <a:pPr>
-              <a:spcAft>
-                <a:spcPts val="1000"/>
-              </a:spcAft>
-              <a:defRPr sz="1900"/>
-            </a:pPr>
-            <a:r>
-              <a:rPr sz="1600"/>
+              <a:lnSpc>
+                <a:spcPct val="90000"/>
+              </a:lnSpc>
+              <a:spcAft>
+                <a:spcPts val="300"/>
+              </a:spcAft>
+              <a:defRPr sz="1900"/>
+            </a:pPr>
+          </a:p>
+          <a:p>
+            <a:pPr>
+              <a:lnSpc>
+                <a:spcPct val="90000"/>
+              </a:lnSpc>
+              <a:spcAft>
+                <a:spcPts val="300"/>
+              </a:spcAft>
+              <a:defRPr sz="1900"/>
+            </a:pPr>
+            <a:r>
+              <a:rPr sz="1400"/>
               <a:t>✅ Mesaj Blokları:</a:t>
             </a:r>
           </a:p>
           <a:p>
             <a:pPr lvl="1">
-              <a:spcAft>
-                <a:spcPts val="1000"/>
+              <a:lnSpc>
+                <a:spcPct val="90000"/>
+              </a:lnSpc>
+              <a:spcAft>
+                <a:spcPts val="300"/>
               </a:spcAft>
               <a:defRPr sz="1700"/>
             </a:pPr>
             <a:r>
-              <a:rPr sz="1600"/>
+              <a:rPr sz="1400"/>
               <a:t>    • 'mesaj1 mesajını yayınla'</a:t>
             </a:r>
           </a:p>
           <a:p>
             <a:pPr lvl="1">
-              <a:spcAft>
-                <a:spcPts val="1000"/>
+              <a:lnSpc>
+                <a:spcPct val="90000"/>
+              </a:lnSpc>
+              <a:spcAft>
+                <a:spcPts val="300"/>
               </a:spcAft>
               <a:defRPr sz="1700"/>
             </a:pPr>
             <a:r>
-              <a:rPr sz="1600"/>
+              <a:rPr sz="1400"/>
               <a:t>    • 'mesaj1 mesajını aldığımda'</a:t>
             </a:r>
           </a:p>
           <a:p>
             <a:pPr lvl="1">
-              <a:spcAft>
-                <a:spcPts val="1000"/>
+              <a:lnSpc>
+                <a:spcPct val="90000"/>
+              </a:lnSpc>
+              <a:spcAft>
+                <a:spcPts val="300"/>
               </a:spcAft>
               <a:defRPr sz="1700"/>
             </a:pPr>
             <a:r>
-              <a:rPr sz="1600"/>
+              <a:rPr sz="1400"/>
               <a:t>    • 'mesaj1 yayınla ve bekle'</a:t>
             </a:r>
           </a:p>
           <a:p>
             <a:pPr>
-              <a:spcAft>
-                <a:spcPts val="1000"/>
-              </a:spcAft>
-              <a:defRPr sz="1900"/>
-            </a:pPr>
-          </a:p>
-          <a:p>
-            <a:pPr>
-              <a:spcAft>
-                <a:spcPts val="1000"/>
-              </a:spcAft>
-              <a:defRPr sz="1900"/>
-            </a:pPr>
-            <a:r>
-              <a:rPr sz="1600"/>
+              <a:lnSpc>
+                <a:spcPct val="90000"/>
+              </a:lnSpc>
+              <a:spcAft>
+                <a:spcPts val="300"/>
+              </a:spcAft>
+              <a:defRPr sz="1900"/>
+            </a:pPr>
+          </a:p>
+          <a:p>
+            <a:pPr>
+              <a:lnSpc>
+                <a:spcPct val="90000"/>
+              </a:lnSpc>
+              <a:spcAft>
+                <a:spcPts val="300"/>
+              </a:spcAft>
+              <a:defRPr sz="1900"/>
+            </a:pPr>
+            <a:r>
+              <a:rPr sz="1400"/>
               <a:t>📌 Örnek: Oyun Başlatma</a:t>
             </a:r>
           </a:p>
           <a:p>
             <a:pPr>
-              <a:spcAft>
-                <a:spcPts val="1000"/>
-              </a:spcAft>
-              <a:defRPr sz="1900"/>
-            </a:pPr>
-          </a:p>
-          <a:p>
-            <a:pPr>
-              <a:spcAft>
-                <a:spcPts val="1000"/>
-              </a:spcAft>
-              <a:defRPr sz="1900"/>
-            </a:pPr>
-            <a:r>
-              <a:rPr sz="1600"/>
+              <a:lnSpc>
+                <a:spcPct val="90000"/>
+              </a:lnSpc>
+              <a:spcAft>
+                <a:spcPts val="300"/>
+              </a:spcAft>
+              <a:defRPr sz="1900"/>
+            </a:pPr>
+          </a:p>
+          <a:p>
+            <a:pPr>
+              <a:lnSpc>
+                <a:spcPct val="90000"/>
+              </a:lnSpc>
+              <a:spcAft>
+                <a:spcPts val="300"/>
+              </a:spcAft>
+              <a:defRPr sz="1900"/>
+            </a:pPr>
+            <a:r>
+              <a:rPr sz="1400"/>
               <a:t>Buton Sprite:</a:t>
             </a:r>
           </a:p>
           <a:p>
             <a:pPr>
-              <a:spcAft>
-                <a:spcPts val="1000"/>
-              </a:spcAft>
-              <a:defRPr sz="1900"/>
-            </a:pPr>
-            <a:r>
-              <a:rPr sz="1600"/>
+              <a:lnSpc>
+                <a:spcPct val="90000"/>
+              </a:lnSpc>
+              <a:spcAft>
+                <a:spcPts val="300"/>
+              </a:spcAft>
+              <a:defRPr sz="1900"/>
+            </a:pPr>
+            <a:r>
+              <a:rPr sz="1400"/>
               <a:t>[Bu sprite tıklandığında]</a:t>
             </a:r>
           </a:p>
           <a:p>
             <a:pPr>
-              <a:spcAft>
-                <a:spcPts val="1000"/>
-              </a:spcAft>
-              <a:defRPr sz="1900"/>
-            </a:pPr>
-            <a:r>
-              <a:rPr sz="1600"/>
+              <a:lnSpc>
+                <a:spcPct val="90000"/>
+              </a:lnSpc>
+              <a:spcAft>
+                <a:spcPts val="300"/>
+              </a:spcAft>
+              <a:defRPr sz="1900"/>
+            </a:pPr>
+            <a:r>
+              <a:rPr sz="1400"/>
               <a:t>['OyunBasla' mesajını yayınla]</a:t>
             </a:r>
           </a:p>
           <a:p>
             <a:pPr>
-              <a:spcAft>
-                <a:spcPts val="1000"/>
-              </a:spcAft>
-              <a:defRPr sz="1900"/>
-            </a:pPr>
-          </a:p>
-          <a:p>
-            <a:pPr>
-              <a:spcAft>
-                <a:spcPts val="1000"/>
-              </a:spcAft>
-              <a:defRPr sz="1900"/>
-            </a:pPr>
-            <a:r>
-              <a:rPr sz="1600"/>
+              <a:lnSpc>
+                <a:spcPct val="90000"/>
+              </a:lnSpc>
+              <a:spcAft>
+                <a:spcPts val="300"/>
+              </a:spcAft>
+              <a:defRPr sz="1900"/>
+            </a:pPr>
+          </a:p>
+          <a:p>
+            <a:pPr>
+              <a:lnSpc>
+                <a:spcPct val="90000"/>
+              </a:lnSpc>
+              <a:spcAft>
+                <a:spcPts val="300"/>
+              </a:spcAft>
+              <a:defRPr sz="1900"/>
+            </a:pPr>
+            <a:r>
+              <a:rPr sz="1400"/>
               <a:t>Oyuncu Sprite:</a:t>
             </a:r>
           </a:p>
           <a:p>
             <a:pPr>
-              <a:spcAft>
-                <a:spcPts val="1000"/>
-              </a:spcAft>
-              <a:defRPr sz="1900"/>
-            </a:pPr>
-            <a:r>
-              <a:rPr sz="1600"/>
+              <a:lnSpc>
+                <a:spcPct val="90000"/>
+              </a:lnSpc>
+              <a:spcAft>
+                <a:spcPts val="300"/>
+              </a:spcAft>
+              <a:defRPr sz="1900"/>
+            </a:pPr>
+            <a:r>
+              <a:rPr sz="1400"/>
               <a:t>['OyunBasla' mesajını aldığında]</a:t>
             </a:r>
           </a:p>
           <a:p>
             <a:pPr>
-              <a:spcAft>
-                <a:spcPts val="1000"/>
-              </a:spcAft>
-              <a:defRPr sz="1900"/>
-            </a:pPr>
-            <a:r>
-              <a:rPr sz="1600"/>
+              <a:lnSpc>
+                <a:spcPct val="90000"/>
+              </a:lnSpc>
+              <a:spcAft>
+                <a:spcPts val="300"/>
+              </a:spcAft>
+              <a:defRPr sz="1900"/>
+            </a:pPr>
+            <a:r>
+              <a:rPr sz="1400"/>
               <a:t>[Oyun kodları...]</a:t>
             </a:r>
           </a:p>
           <a:p>
             <a:pPr>
-              <a:spcAft>
-                <a:spcPts val="1000"/>
-              </a:spcAft>
-              <a:defRPr sz="1900"/>
-            </a:pPr>
-          </a:p>
-          <a:p>
-            <a:pPr>
-              <a:spcAft>
-                <a:spcPts val="1000"/>
-              </a:spcAft>
-              <a:defRPr sz="1900"/>
-            </a:pPr>
-            <a:r>
-              <a:rPr sz="1600"/>
+              <a:lnSpc>
+                <a:spcPct val="90000"/>
+              </a:lnSpc>
+              <a:spcAft>
+                <a:spcPts val="300"/>
+              </a:spcAft>
+              <a:defRPr sz="1900"/>
+            </a:pPr>
+          </a:p>
+          <a:p>
+            <a:pPr>
+              <a:lnSpc>
+                <a:spcPct val="90000"/>
+              </a:lnSpc>
+              <a:spcAft>
+                <a:spcPts val="300"/>
+              </a:spcAft>
+              <a:defRPr sz="1900"/>
+            </a:pPr>
+            <a:r>
+              <a:rPr sz="1400"/>
               <a:t>Düşman Sprite:</a:t>
             </a:r>
           </a:p>
           <a:p>
             <a:pPr>
-              <a:spcAft>
-                <a:spcPts val="1000"/>
-              </a:spcAft>
-              <a:defRPr sz="1900"/>
-            </a:pPr>
-            <a:r>
-              <a:rPr sz="1600"/>
+              <a:lnSpc>
+                <a:spcPct val="90000"/>
+              </a:lnSpc>
+              <a:spcAft>
+                <a:spcPts val="300"/>
+              </a:spcAft>
+              <a:defRPr sz="1900"/>
+            </a:pPr>
+            <a:r>
+              <a:rPr sz="1400"/>
               <a:t>['OyunBasla' mesajını aldığında]</a:t>
             </a:r>
           </a:p>
           <a:p>
             <a:pPr>
-              <a:spcAft>
-                <a:spcPts val="1000"/>
-              </a:spcAft>
-              <a:defRPr sz="1900"/>
-            </a:pPr>
-            <a:r>
-              <a:rPr sz="1600"/>
+              <a:lnSpc>
+                <a:spcPct val="90000"/>
+              </a:lnSpc>
+              <a:spcAft>
+                <a:spcPts val="300"/>
+              </a:spcAft>
+              <a:defRPr sz="1900"/>
+            </a:pPr>
+            <a:r>
+              <a:rPr sz="1400"/>
               <a:t>[Hareket et...]</a:t>
             </a:r>
           </a:p>
           <a:p>
             <a:pPr>
-              <a:spcAft>
-                <a:spcPts val="1000"/>
-              </a:spcAft>
-              <a:defRPr sz="1900"/>
-            </a:pPr>
-          </a:p>
-          <a:p>
-            <a:pPr>
-              <a:spcAft>
-                <a:spcPts val="1000"/>
-              </a:spcAft>
-              <a:defRPr sz="1900"/>
-            </a:pPr>
-            <a:r>
-              <a:rPr sz="1600"/>
+              <a:lnSpc>
+                <a:spcPct val="90000"/>
+              </a:lnSpc>
+              <a:spcAft>
+                <a:spcPts val="300"/>
+              </a:spcAft>
+              <a:defRPr sz="1900"/>
+            </a:pPr>
+          </a:p>
+          <a:p>
+            <a:pPr>
+              <a:lnSpc>
+                <a:spcPct val="90000"/>
+              </a:lnSpc>
+              <a:spcAft>
+                <a:spcPts val="300"/>
+              </a:spcAft>
+              <a:defRPr sz="1900"/>
+            </a:pPr>
+            <a:r>
+              <a:rPr sz="1400"/>
               <a:t>💡 Mesajlar koordinasyon sağlar</a:t>
             </a:r>
           </a:p>
           <a:p>
             <a:pPr>
-              <a:spcAft>
-                <a:spcPts val="1000"/>
-              </a:spcAft>
-              <a:defRPr sz="1900"/>
-            </a:pPr>
-            <a:r>
-              <a:rPr sz="1600"/>
+              <a:lnSpc>
+                <a:spcPct val="90000"/>
+              </a:lnSpc>
+              <a:spcAft>
+                <a:spcPts val="300"/>
+              </a:spcAft>
+              <a:defRPr sz="1900"/>
+            </a:pPr>
+            <a:r>
+              <a:rPr sz="1400"/>
               <a:t>Tüm sprite'lar senkronize çalışır</a:t>
             </a:r>
           </a:p>
@@ -5401,7 +5629,7 @@
         </p:nvSpPr>
         <p:spPr/>
         <p:txBody>
-          <a:bodyPr/>
+          <a:bodyPr wrap="square"/>
           <a:lstStyle/>
           <a:p>
             <a:pPr>
@@ -5455,260 +5683,338 @@
             <a:spAutoFit/>
           </a:bodyPr>
           <a:lstStyle/>
-          <a:p/>
-          <a:p>
-            <a:pPr>
-              <a:spcAft>
-                <a:spcPts val="1000"/>
-              </a:spcAft>
-              <a:defRPr sz="1900"/>
-            </a:pPr>
-            <a:r>
-              <a:rPr sz="1600"/>
+          <a:p>
+            <a:pPr>
+              <a:lnSpc>
+                <a:spcPct val="90000"/>
+              </a:lnSpc>
+              <a:spcAft>
+                <a:spcPts val="300"/>
+              </a:spcAft>
+            </a:pPr>
+          </a:p>
+          <a:p>
+            <a:pPr>
+              <a:lnSpc>
+                <a:spcPct val="90000"/>
+              </a:lnSpc>
+              <a:spcAft>
+                <a:spcPts val="300"/>
+              </a:spcAft>
+              <a:defRPr sz="1900"/>
+            </a:pPr>
+            <a:r>
+              <a:rPr sz="1400"/>
               <a:t>Çizim yapmak için uzantı</a:t>
             </a:r>
           </a:p>
           <a:p>
             <a:pPr>
-              <a:spcAft>
-                <a:spcPts val="1000"/>
-              </a:spcAft>
-              <a:defRPr sz="1900"/>
-            </a:pPr>
-          </a:p>
-          <a:p>
-            <a:pPr>
-              <a:spcAft>
-                <a:spcPts val="1000"/>
-              </a:spcAft>
-              <a:defRPr sz="1900"/>
-            </a:pPr>
-            <a:r>
-              <a:rPr sz="1600"/>
+              <a:lnSpc>
+                <a:spcPct val="90000"/>
+              </a:lnSpc>
+              <a:spcAft>
+                <a:spcPts val="300"/>
+              </a:spcAft>
+              <a:defRPr sz="1900"/>
+            </a:pPr>
+          </a:p>
+          <a:p>
+            <a:pPr>
+              <a:lnSpc>
+                <a:spcPct val="90000"/>
+              </a:lnSpc>
+              <a:spcAft>
+                <a:spcPts val="300"/>
+              </a:spcAft>
+              <a:defRPr sz="1900"/>
+            </a:pPr>
+            <a:r>
+              <a:rPr sz="1400"/>
               <a:t>✅ Uzantı Ekleme:</a:t>
             </a:r>
           </a:p>
           <a:p>
             <a:pPr lvl="1">
-              <a:spcAft>
-                <a:spcPts val="1000"/>
+              <a:lnSpc>
+                <a:spcPct val="90000"/>
+              </a:lnSpc>
+              <a:spcAft>
+                <a:spcPts val="300"/>
               </a:spcAft>
               <a:defRPr sz="1700"/>
             </a:pPr>
             <a:r>
-              <a:rPr sz="1600"/>
+              <a:rPr sz="1400"/>
               <a:t>    • Sol altta 'Uzantı Ekle'</a:t>
             </a:r>
           </a:p>
           <a:p>
             <a:pPr lvl="1">
-              <a:spcAft>
-                <a:spcPts val="1000"/>
+              <a:lnSpc>
+                <a:spcPct val="90000"/>
+              </a:lnSpc>
+              <a:spcAft>
+                <a:spcPts val="300"/>
               </a:spcAft>
               <a:defRPr sz="1700"/>
             </a:pPr>
             <a:r>
-              <a:rPr sz="1600"/>
+              <a:rPr sz="1400"/>
               <a:t>    • Kalem'i seç</a:t>
             </a:r>
           </a:p>
           <a:p>
             <a:pPr>
-              <a:spcAft>
-                <a:spcPts val="1000"/>
-              </a:spcAft>
-              <a:defRPr sz="1900"/>
-            </a:pPr>
-          </a:p>
-          <a:p>
-            <a:pPr>
-              <a:spcAft>
-                <a:spcPts val="1000"/>
-              </a:spcAft>
-              <a:defRPr sz="1900"/>
-            </a:pPr>
-            <a:r>
-              <a:rPr sz="1600"/>
+              <a:lnSpc>
+                <a:spcPct val="90000"/>
+              </a:lnSpc>
+              <a:spcAft>
+                <a:spcPts val="300"/>
+              </a:spcAft>
+              <a:defRPr sz="1900"/>
+            </a:pPr>
+          </a:p>
+          <a:p>
+            <a:pPr>
+              <a:lnSpc>
+                <a:spcPct val="90000"/>
+              </a:lnSpc>
+              <a:spcAft>
+                <a:spcPts val="300"/>
+              </a:spcAft>
+              <a:defRPr sz="1900"/>
+            </a:pPr>
+            <a:r>
+              <a:rPr sz="1400"/>
               <a:t>✅ Kalem Blokları:</a:t>
             </a:r>
           </a:p>
           <a:p>
             <a:pPr lvl="1">
-              <a:spcAft>
-                <a:spcPts val="1000"/>
+              <a:lnSpc>
+                <a:spcPct val="90000"/>
+              </a:lnSpc>
+              <a:spcAft>
+                <a:spcPts val="300"/>
               </a:spcAft>
               <a:defRPr sz="1700"/>
             </a:pPr>
             <a:r>
-              <a:rPr sz="1600"/>
+              <a:rPr sz="1400"/>
               <a:t>    • 'Hepsini temizle'</a:t>
             </a:r>
           </a:p>
           <a:p>
             <a:pPr lvl="1">
-              <a:spcAft>
-                <a:spcPts val="1000"/>
+              <a:lnSpc>
+                <a:spcPct val="90000"/>
+              </a:lnSpc>
+              <a:spcAft>
+                <a:spcPts val="300"/>
               </a:spcAft>
               <a:defRPr sz="1700"/>
             </a:pPr>
             <a:r>
-              <a:rPr sz="1600"/>
+              <a:rPr sz="1400"/>
               <a:t>    • 'Damga'</a:t>
             </a:r>
           </a:p>
           <a:p>
             <a:pPr lvl="1">
-              <a:spcAft>
-                <a:spcPts val="1000"/>
+              <a:lnSpc>
+                <a:spcPct val="90000"/>
+              </a:lnSpc>
+              <a:spcAft>
+                <a:spcPts val="300"/>
               </a:spcAft>
               <a:defRPr sz="1700"/>
             </a:pPr>
             <a:r>
-              <a:rPr sz="1600"/>
+              <a:rPr sz="1400"/>
               <a:t>    • 'Kalemi indir/kaldır'</a:t>
             </a:r>
           </a:p>
           <a:p>
             <a:pPr lvl="1">
-              <a:spcAft>
-                <a:spcPts val="1000"/>
+              <a:lnSpc>
+                <a:spcPct val="90000"/>
+              </a:lnSpc>
+              <a:spcAft>
+                <a:spcPts val="300"/>
               </a:spcAft>
               <a:defRPr sz="1700"/>
             </a:pPr>
             <a:r>
-              <a:rPr sz="1600"/>
+              <a:rPr sz="1400"/>
               <a:t>    • 'Kalem rengini ... yap'</a:t>
             </a:r>
           </a:p>
           <a:p>
             <a:pPr lvl="1">
-              <a:spcAft>
-                <a:spcPts val="1000"/>
+              <a:lnSpc>
+                <a:spcPct val="90000"/>
+              </a:lnSpc>
+              <a:spcAft>
+                <a:spcPts val="300"/>
               </a:spcAft>
               <a:defRPr sz="1700"/>
             </a:pPr>
             <a:r>
-              <a:rPr sz="1600"/>
+              <a:rPr sz="1400"/>
               <a:t>    • 'Kalem kalınlığını ... yap'</a:t>
             </a:r>
           </a:p>
           <a:p>
             <a:pPr>
-              <a:spcAft>
-                <a:spcPts val="1000"/>
-              </a:spcAft>
-              <a:defRPr sz="1900"/>
-            </a:pPr>
-          </a:p>
-          <a:p>
-            <a:pPr>
-              <a:spcAft>
-                <a:spcPts val="1000"/>
-              </a:spcAft>
-              <a:defRPr sz="1900"/>
-            </a:pPr>
-            <a:r>
-              <a:rPr sz="1600"/>
+              <a:lnSpc>
+                <a:spcPct val="90000"/>
+              </a:lnSpc>
+              <a:spcAft>
+                <a:spcPts val="300"/>
+              </a:spcAft>
+              <a:defRPr sz="1900"/>
+            </a:pPr>
+          </a:p>
+          <a:p>
+            <a:pPr>
+              <a:lnSpc>
+                <a:spcPct val="90000"/>
+              </a:lnSpc>
+              <a:spcAft>
+                <a:spcPts val="300"/>
+              </a:spcAft>
+              <a:defRPr sz="1900"/>
+            </a:pPr>
+            <a:r>
+              <a:rPr sz="1400"/>
               <a:t>📌 Proje: Paint Uygulaması</a:t>
             </a:r>
           </a:p>
           <a:p>
             <a:pPr>
-              <a:spcAft>
-                <a:spcPts val="1000"/>
-              </a:spcAft>
-              <a:defRPr sz="1900"/>
-            </a:pPr>
-          </a:p>
-          <a:p>
-            <a:pPr>
-              <a:spcAft>
-                <a:spcPts val="1000"/>
-              </a:spcAft>
-              <a:defRPr sz="1900"/>
-            </a:pPr>
-            <a:r>
-              <a:rPr sz="1600"/>
+              <a:lnSpc>
+                <a:spcPct val="90000"/>
+              </a:lnSpc>
+              <a:spcAft>
+                <a:spcPts val="300"/>
+              </a:spcAft>
+              <a:defRPr sz="1900"/>
+            </a:pPr>
+          </a:p>
+          <a:p>
+            <a:pPr>
+              <a:lnSpc>
+                <a:spcPct val="90000"/>
+              </a:lnSpc>
+              <a:spcAft>
+                <a:spcPts val="300"/>
+              </a:spcAft>
+              <a:defRPr sz="1900"/>
+            </a:pPr>
+            <a:r>
+              <a:rPr sz="1400"/>
               <a:t>[Sürekli tekrarla]</a:t>
             </a:r>
           </a:p>
           <a:p>
             <a:pPr lvl="1">
-              <a:spcAft>
-                <a:spcPts val="1000"/>
+              <a:lnSpc>
+                <a:spcPct val="90000"/>
+              </a:lnSpc>
+              <a:spcAft>
+                <a:spcPts val="300"/>
               </a:spcAft>
               <a:defRPr sz="1700"/>
             </a:pPr>
             <a:r>
-              <a:rPr sz="1600"/>
+              <a:rPr sz="1400"/>
               <a:t>    [Fare x, y'ye git]</a:t>
             </a:r>
           </a:p>
           <a:p>
             <a:pPr lvl="1">
-              <a:spcAft>
-                <a:spcPts val="1000"/>
+              <a:lnSpc>
+                <a:spcPct val="90000"/>
+              </a:lnSpc>
+              <a:spcAft>
+                <a:spcPts val="300"/>
               </a:spcAft>
               <a:defRPr sz="1700"/>
             </a:pPr>
             <a:r>
-              <a:rPr sz="1600"/>
+              <a:rPr sz="1400"/>
               <a:t>    [Eğer fare tıklandı ise]</a:t>
             </a:r>
           </a:p>
           <a:p>
             <a:pPr lvl="1">
-              <a:spcAft>
-                <a:spcPts val="1000"/>
+              <a:lnSpc>
+                <a:spcPct val="90000"/>
+              </a:lnSpc>
+              <a:spcAft>
+                <a:spcPts val="300"/>
               </a:spcAft>
               <a:defRPr sz="1700"/>
             </a:pPr>
             <a:r>
-              <a:rPr sz="1600"/>
+              <a:rPr sz="1400"/>
               <a:t>        [Kalemi indir]</a:t>
             </a:r>
           </a:p>
           <a:p>
             <a:pPr lvl="1">
-              <a:spcAft>
-                <a:spcPts val="1000"/>
+              <a:lnSpc>
+                <a:spcPct val="90000"/>
+              </a:lnSpc>
+              <a:spcAft>
+                <a:spcPts val="300"/>
               </a:spcAft>
               <a:defRPr sz="1700"/>
             </a:pPr>
             <a:r>
-              <a:rPr sz="1600"/>
+              <a:rPr sz="1400"/>
               <a:t>    [Değilse]</a:t>
             </a:r>
           </a:p>
           <a:p>
             <a:pPr lvl="1">
-              <a:spcAft>
-                <a:spcPts val="1000"/>
+              <a:lnSpc>
+                <a:spcPct val="90000"/>
+              </a:lnSpc>
+              <a:spcAft>
+                <a:spcPts val="300"/>
               </a:spcAft>
               <a:defRPr sz="1700"/>
             </a:pPr>
             <a:r>
-              <a:rPr sz="1600"/>
+              <a:rPr sz="1400"/>
               <a:t>        [Kalemi kaldır]</a:t>
             </a:r>
           </a:p>
           <a:p>
             <a:pPr>
-              <a:spcAft>
-                <a:spcPts val="1000"/>
-              </a:spcAft>
-              <a:defRPr sz="1900"/>
-            </a:pPr>
-          </a:p>
-          <a:p>
-            <a:pPr>
-              <a:spcAft>
-                <a:spcPts val="1000"/>
-              </a:spcAft>
-              <a:defRPr sz="1900"/>
-            </a:pPr>
-            <a:r>
-              <a:rPr sz="1600"/>
+              <a:lnSpc>
+                <a:spcPct val="90000"/>
+              </a:lnSpc>
+              <a:spcAft>
+                <a:spcPts val="300"/>
+              </a:spcAft>
+              <a:defRPr sz="1900"/>
+            </a:pPr>
+          </a:p>
+          <a:p>
+            <a:pPr>
+              <a:lnSpc>
+                <a:spcPct val="90000"/>
+              </a:lnSpc>
+              <a:spcAft>
+                <a:spcPts val="300"/>
+              </a:spcAft>
+              <a:defRPr sz="1900"/>
+            </a:pPr>
+            <a:r>
+              <a:rPr sz="1400"/>
               <a:t>💡 Geometri çizim öğretimi için harika!</a:t>
             </a:r>
           </a:p>
@@ -5744,7 +6050,7 @@
         </p:nvSpPr>
         <p:spPr/>
         <p:txBody>
-          <a:bodyPr/>
+          <a:bodyPr wrap="square"/>
           <a:lstStyle/>
           <a:p>
             <a:pPr>
@@ -5798,250 +6104,349 @@
             <a:spAutoFit/>
           </a:bodyPr>
           <a:lstStyle/>
-          <a:p/>
-          <a:p>
-            <a:pPr>
-              <a:spcAft>
-                <a:spcPts val="1000"/>
-              </a:spcAft>
-              <a:defRPr sz="1900"/>
-            </a:pPr>
-            <a:r>
+          <a:p>
+            <a:pPr>
+              <a:lnSpc>
+                <a:spcPct val="90000"/>
+              </a:lnSpc>
+              <a:spcAft>
+                <a:spcPts val="300"/>
+              </a:spcAft>
+            </a:pPr>
+          </a:p>
+          <a:p>
+            <a:pPr>
+              <a:lnSpc>
+                <a:spcPct val="90000"/>
+              </a:lnSpc>
+              <a:spcAft>
+                <a:spcPts val="300"/>
+              </a:spcAft>
+              <a:defRPr sz="1900"/>
+            </a:pPr>
+            <a:r>
+              <a:rPr sz="1500"/>
               <a:t>Kendi müziğini yap!</a:t>
             </a:r>
           </a:p>
           <a:p>
             <a:pPr>
-              <a:spcAft>
-                <a:spcPts val="1000"/>
-              </a:spcAft>
-              <a:defRPr sz="1900"/>
-            </a:pPr>
-          </a:p>
-          <a:p>
-            <a:pPr>
-              <a:spcAft>
-                <a:spcPts val="1000"/>
-              </a:spcAft>
-              <a:defRPr sz="1900"/>
-            </a:pPr>
-            <a:r>
+              <a:lnSpc>
+                <a:spcPct val="90000"/>
+              </a:lnSpc>
+              <a:spcAft>
+                <a:spcPts val="300"/>
+              </a:spcAft>
+              <a:defRPr sz="1900"/>
+            </a:pPr>
+          </a:p>
+          <a:p>
+            <a:pPr>
+              <a:lnSpc>
+                <a:spcPct val="90000"/>
+              </a:lnSpc>
+              <a:spcAft>
+                <a:spcPts val="300"/>
+              </a:spcAft>
+              <a:defRPr sz="1900"/>
+            </a:pPr>
+            <a:r>
+              <a:rPr sz="1500"/>
               <a:t>✅ Müzik Uzantısı:</a:t>
             </a:r>
           </a:p>
           <a:p>
             <a:pPr lvl="1">
-              <a:spcAft>
-                <a:spcPts val="1000"/>
+              <a:lnSpc>
+                <a:spcPct val="90000"/>
+              </a:lnSpc>
+              <a:spcAft>
+                <a:spcPts val="300"/>
               </a:spcAft>
               <a:defRPr sz="1700"/>
             </a:pPr>
             <a:r>
+              <a:rPr sz="1500"/>
               <a:t>    • Uzantı → Müzik</a:t>
             </a:r>
           </a:p>
           <a:p>
             <a:pPr>
-              <a:spcAft>
-                <a:spcPts val="1000"/>
-              </a:spcAft>
-              <a:defRPr sz="1900"/>
-            </a:pPr>
-          </a:p>
-          <a:p>
-            <a:pPr>
-              <a:spcAft>
-                <a:spcPts val="1000"/>
-              </a:spcAft>
-              <a:defRPr sz="1900"/>
-            </a:pPr>
-            <a:r>
+              <a:lnSpc>
+                <a:spcPct val="90000"/>
+              </a:lnSpc>
+              <a:spcAft>
+                <a:spcPts val="300"/>
+              </a:spcAft>
+              <a:defRPr sz="1900"/>
+            </a:pPr>
+          </a:p>
+          <a:p>
+            <a:pPr>
+              <a:lnSpc>
+                <a:spcPct val="90000"/>
+              </a:lnSpc>
+              <a:spcAft>
+                <a:spcPts val="300"/>
+              </a:spcAft>
+              <a:defRPr sz="1900"/>
+            </a:pPr>
+            <a:r>
+              <a:rPr sz="1500"/>
               <a:t>✅ Müzik Blokları:</a:t>
             </a:r>
           </a:p>
           <a:p>
             <a:pPr lvl="1">
-              <a:spcAft>
-                <a:spcPts val="1000"/>
+              <a:lnSpc>
+                <a:spcPct val="90000"/>
+              </a:lnSpc>
+              <a:spcAft>
+                <a:spcPts val="300"/>
               </a:spcAft>
               <a:defRPr sz="1700"/>
             </a:pPr>
             <a:r>
+              <a:rPr sz="1500"/>
               <a:t>    • 'Nota ... çal ...'</a:t>
             </a:r>
           </a:p>
           <a:p>
             <a:pPr lvl="1">
-              <a:spcAft>
-                <a:spcPts val="1000"/>
+              <a:lnSpc>
+                <a:spcPct val="90000"/>
+              </a:lnSpc>
+              <a:spcAft>
+                <a:spcPts val="300"/>
               </a:spcAft>
               <a:defRPr sz="1700"/>
             </a:pPr>
             <a:r>
+              <a:rPr sz="1500"/>
               <a:t>    • 'Enstrümanı ... yap'</a:t>
             </a:r>
           </a:p>
           <a:p>
             <a:pPr lvl="1">
-              <a:spcAft>
-                <a:spcPts val="1000"/>
+              <a:lnSpc>
+                <a:spcPct val="90000"/>
+              </a:lnSpc>
+              <a:spcAft>
+                <a:spcPts val="300"/>
               </a:spcAft>
               <a:defRPr sz="1700"/>
             </a:pPr>
             <a:r>
+              <a:rPr sz="1500"/>
               <a:t>    • 'Tempo ... yap'</a:t>
             </a:r>
           </a:p>
           <a:p>
             <a:pPr lvl="1">
-              <a:spcAft>
-                <a:spcPts val="1000"/>
+              <a:lnSpc>
+                <a:spcPct val="90000"/>
+              </a:lnSpc>
+              <a:spcAft>
+                <a:spcPts val="300"/>
               </a:spcAft>
               <a:defRPr sz="1700"/>
             </a:pPr>
             <a:r>
+              <a:rPr sz="1500"/>
               <a:t>    • 'Davul ... çal'</a:t>
             </a:r>
           </a:p>
           <a:p>
             <a:pPr>
-              <a:spcAft>
-                <a:spcPts val="1000"/>
-              </a:spcAft>
-              <a:defRPr sz="1900"/>
-            </a:pPr>
-          </a:p>
-          <a:p>
-            <a:pPr>
-              <a:spcAft>
-                <a:spcPts val="1000"/>
-              </a:spcAft>
-              <a:defRPr sz="1900"/>
-            </a:pPr>
-            <a:r>
+              <a:lnSpc>
+                <a:spcPct val="90000"/>
+              </a:lnSpc>
+              <a:spcAft>
+                <a:spcPts val="300"/>
+              </a:spcAft>
+              <a:defRPr sz="1900"/>
+            </a:pPr>
+          </a:p>
+          <a:p>
+            <a:pPr>
+              <a:lnSpc>
+                <a:spcPct val="90000"/>
+              </a:lnSpc>
+              <a:spcAft>
+                <a:spcPts val="300"/>
+              </a:spcAft>
+              <a:defRPr sz="1900"/>
+            </a:pPr>
+            <a:r>
+              <a:rPr sz="1500"/>
               <a:t>📌 Basit Melodi:</a:t>
             </a:r>
           </a:p>
           <a:p>
             <a:pPr>
-              <a:spcAft>
-                <a:spcPts val="1000"/>
-              </a:spcAft>
-              <a:defRPr sz="1900"/>
-            </a:pPr>
-          </a:p>
-          <a:p>
-            <a:pPr>
-              <a:spcAft>
-                <a:spcPts val="1000"/>
-              </a:spcAft>
-              <a:defRPr sz="1900"/>
-            </a:pPr>
-            <a:r>
+              <a:lnSpc>
+                <a:spcPct val="90000"/>
+              </a:lnSpc>
+              <a:spcAft>
+                <a:spcPts val="300"/>
+              </a:spcAft>
+              <a:defRPr sz="1900"/>
+            </a:pPr>
+          </a:p>
+          <a:p>
+            <a:pPr>
+              <a:lnSpc>
+                <a:spcPct val="90000"/>
+              </a:lnSpc>
+              <a:spcAft>
+                <a:spcPts val="300"/>
+              </a:spcAft>
+              <a:defRPr sz="1900"/>
+            </a:pPr>
+            <a:r>
+              <a:rPr sz="1500"/>
               <a:t>[Do notasını 0.5 vuruş çal]</a:t>
             </a:r>
           </a:p>
           <a:p>
             <a:pPr>
-              <a:spcAft>
-                <a:spcPts val="1000"/>
-              </a:spcAft>
-              <a:defRPr sz="1900"/>
-            </a:pPr>
-            <a:r>
+              <a:lnSpc>
+                <a:spcPct val="90000"/>
+              </a:lnSpc>
+              <a:spcAft>
+                <a:spcPts val="300"/>
+              </a:spcAft>
+              <a:defRPr sz="1900"/>
+            </a:pPr>
+            <a:r>
+              <a:rPr sz="1500"/>
               <a:t>[Re notasını 0.5 vuruş çal]</a:t>
             </a:r>
           </a:p>
           <a:p>
             <a:pPr>
-              <a:spcAft>
-                <a:spcPts val="1000"/>
-              </a:spcAft>
-              <a:defRPr sz="1900"/>
-            </a:pPr>
-            <a:r>
+              <a:lnSpc>
+                <a:spcPct val="90000"/>
+              </a:lnSpc>
+              <a:spcAft>
+                <a:spcPts val="300"/>
+              </a:spcAft>
+              <a:defRPr sz="1900"/>
+            </a:pPr>
+            <a:r>
+              <a:rPr sz="1500"/>
               <a:t>[Mi notasını 0.5 vuruş çal]</a:t>
             </a:r>
           </a:p>
           <a:p>
             <a:pPr>
-              <a:spcAft>
-                <a:spcPts val="1000"/>
-              </a:spcAft>
-              <a:defRPr sz="1900"/>
-            </a:pPr>
-            <a:r>
+              <a:lnSpc>
+                <a:spcPct val="90000"/>
+              </a:lnSpc>
+              <a:spcAft>
+                <a:spcPts val="300"/>
+              </a:spcAft>
+              <a:defRPr sz="1900"/>
+            </a:pPr>
+            <a:r>
+              <a:rPr sz="1500"/>
               <a:t>[Do notasını 1 vuruş çal]</a:t>
             </a:r>
           </a:p>
           <a:p>
             <a:pPr>
-              <a:spcAft>
-                <a:spcPts val="1000"/>
-              </a:spcAft>
-              <a:defRPr sz="1900"/>
-            </a:pPr>
-          </a:p>
-          <a:p>
-            <a:pPr>
-              <a:spcAft>
-                <a:spcPts val="1000"/>
-              </a:spcAft>
-              <a:defRPr sz="1900"/>
-            </a:pPr>
-            <a:r>
+              <a:lnSpc>
+                <a:spcPct val="90000"/>
+              </a:lnSpc>
+              <a:spcAft>
+                <a:spcPts val="300"/>
+              </a:spcAft>
+              <a:defRPr sz="1900"/>
+            </a:pPr>
+          </a:p>
+          <a:p>
+            <a:pPr>
+              <a:lnSpc>
+                <a:spcPct val="90000"/>
+              </a:lnSpc>
+              <a:spcAft>
+                <a:spcPts val="300"/>
+              </a:spcAft>
+              <a:defRPr sz="1900"/>
+            </a:pPr>
+            <a:r>
+              <a:rPr sz="1500"/>
               <a:t>🎯 Proje Fikirleri:</a:t>
             </a:r>
           </a:p>
           <a:p>
             <a:pPr lvl="1">
-              <a:spcAft>
-                <a:spcPts val="1000"/>
+              <a:lnSpc>
+                <a:spcPct val="90000"/>
+              </a:lnSpc>
+              <a:spcAft>
+                <a:spcPts val="300"/>
               </a:spcAft>
               <a:defRPr sz="1700"/>
             </a:pPr>
             <a:r>
+              <a:rPr sz="1500"/>
               <a:t>    • Piyano uygulaması</a:t>
             </a:r>
           </a:p>
           <a:p>
             <a:pPr lvl="1">
-              <a:spcAft>
-                <a:spcPts val="1000"/>
+              <a:lnSpc>
+                <a:spcPct val="90000"/>
+              </a:lnSpc>
+              <a:spcAft>
+                <a:spcPts val="300"/>
               </a:spcAft>
               <a:defRPr sz="1700"/>
             </a:pPr>
             <a:r>
+              <a:rPr sz="1500"/>
               <a:t>    • Müzik kompozisyonu</a:t>
             </a:r>
           </a:p>
           <a:p>
             <a:pPr lvl="1">
-              <a:spcAft>
-                <a:spcPts val="1000"/>
+              <a:lnSpc>
+                <a:spcPct val="90000"/>
+              </a:lnSpc>
+              <a:spcAft>
+                <a:spcPts val="300"/>
               </a:spcAft>
               <a:defRPr sz="1700"/>
             </a:pPr>
             <a:r>
+              <a:rPr sz="1500"/>
               <a:t>    • Ritim oyunu</a:t>
             </a:r>
           </a:p>
           <a:p>
             <a:pPr>
-              <a:spcAft>
-                <a:spcPts val="1000"/>
-              </a:spcAft>
-              <a:defRPr sz="1900"/>
-            </a:pPr>
-          </a:p>
-          <a:p>
-            <a:pPr>
-              <a:spcAft>
-                <a:spcPts val="1000"/>
-              </a:spcAft>
-              <a:defRPr sz="1900"/>
-            </a:pPr>
-            <a:r>
+              <a:lnSpc>
+                <a:spcPct val="90000"/>
+              </a:lnSpc>
+              <a:spcAft>
+                <a:spcPts val="300"/>
+              </a:spcAft>
+              <a:defRPr sz="1900"/>
+            </a:pPr>
+          </a:p>
+          <a:p>
+            <a:pPr>
+              <a:lnSpc>
+                <a:spcPct val="90000"/>
+              </a:lnSpc>
+              <a:spcAft>
+                <a:spcPts val="300"/>
+              </a:spcAft>
+              <a:defRPr sz="1900"/>
+            </a:pPr>
+            <a:r>
+              <a:rPr sz="1500"/>
               <a:t>💡 Müzik + Kodlama = Yaratıcılık!</a:t>
             </a:r>
           </a:p>
@@ -6077,7 +6482,7 @@
         </p:nvSpPr>
         <p:spPr/>
         <p:txBody>
-          <a:bodyPr/>
+          <a:bodyPr wrap="square"/>
           <a:lstStyle/>
           <a:p>
             <a:pPr>
@@ -6131,264 +6536,342 @@
             <a:spAutoFit/>
           </a:bodyPr>
           <a:lstStyle/>
-          <a:p/>
-          <a:p>
-            <a:pPr>
-              <a:spcAft>
-                <a:spcPts val="1000"/>
-              </a:spcAft>
-              <a:defRPr sz="1900"/>
-            </a:pPr>
-            <a:r>
-              <a:rPr sz="1600"/>
+          <a:p>
+            <a:pPr>
+              <a:lnSpc>
+                <a:spcPct val="90000"/>
+              </a:lnSpc>
+              <a:spcAft>
+                <a:spcPts val="300"/>
+              </a:spcAft>
+            </a:pPr>
+          </a:p>
+          <a:p>
+            <a:pPr>
+              <a:lnSpc>
+                <a:spcPct val="90000"/>
+              </a:lnSpc>
+              <a:spcAft>
+                <a:spcPts val="300"/>
+              </a:spcAft>
+              <a:defRPr sz="1900"/>
+            </a:pPr>
+            <a:r>
+              <a:rPr sz="1400"/>
               <a:t>Final Proje: Kendi platform oyununu yap!</a:t>
             </a:r>
           </a:p>
           <a:p>
             <a:pPr>
-              <a:spcAft>
-                <a:spcPts val="1000"/>
-              </a:spcAft>
-              <a:defRPr sz="1900"/>
-            </a:pPr>
-          </a:p>
-          <a:p>
-            <a:pPr>
-              <a:spcAft>
-                <a:spcPts val="1000"/>
-              </a:spcAft>
-              <a:defRPr sz="1900"/>
-            </a:pPr>
-            <a:r>
-              <a:rPr sz="1600"/>
+              <a:lnSpc>
+                <a:spcPct val="90000"/>
+              </a:lnSpc>
+              <a:spcAft>
+                <a:spcPts val="300"/>
+              </a:spcAft>
+              <a:defRPr sz="1900"/>
+            </a:pPr>
+          </a:p>
+          <a:p>
+            <a:pPr>
+              <a:lnSpc>
+                <a:spcPct val="90000"/>
+              </a:lnSpc>
+              <a:spcAft>
+                <a:spcPts val="300"/>
+              </a:spcAft>
+              <a:defRPr sz="1900"/>
+            </a:pPr>
+            <a:r>
+              <a:rPr sz="1400"/>
               <a:t>✅ Gereksinimler:</a:t>
             </a:r>
           </a:p>
           <a:p>
             <a:pPr lvl="1">
-              <a:spcAft>
-                <a:spcPts val="1000"/>
+              <a:lnSpc>
+                <a:spcPct val="90000"/>
+              </a:lnSpc>
+              <a:spcAft>
+                <a:spcPts val="300"/>
               </a:spcAft>
               <a:defRPr sz="1700"/>
             </a:pPr>
             <a:r>
-              <a:rPr sz="1600"/>
+              <a:rPr sz="1400"/>
               <a:t>    • Oyuncu karakteri (zıplama, hareket)</a:t>
             </a:r>
           </a:p>
           <a:p>
             <a:pPr lvl="1">
-              <a:spcAft>
-                <a:spcPts val="1000"/>
+              <a:lnSpc>
+                <a:spcPct val="90000"/>
+              </a:lnSpc>
+              <a:spcAft>
+                <a:spcPts val="300"/>
               </a:spcAft>
               <a:defRPr sz="1700"/>
             </a:pPr>
             <a:r>
-              <a:rPr sz="1600"/>
+              <a:rPr sz="1400"/>
               <a:t>    • Platformlar</a:t>
             </a:r>
           </a:p>
           <a:p>
             <a:pPr lvl="1">
-              <a:spcAft>
-                <a:spcPts val="1000"/>
+              <a:lnSpc>
+                <a:spcPct val="90000"/>
+              </a:lnSpc>
+              <a:spcAft>
+                <a:spcPts val="300"/>
               </a:spcAft>
               <a:defRPr sz="1700"/>
             </a:pPr>
             <a:r>
-              <a:rPr sz="1600"/>
+              <a:rPr sz="1400"/>
               <a:t>    • Düşmanlar (AI)</a:t>
             </a:r>
           </a:p>
           <a:p>
             <a:pPr lvl="1">
-              <a:spcAft>
-                <a:spcPts val="1000"/>
+              <a:lnSpc>
+                <a:spcPct val="90000"/>
+              </a:lnSpc>
+              <a:spcAft>
+                <a:spcPts val="300"/>
               </a:spcAft>
               <a:defRPr sz="1700"/>
             </a:pPr>
             <a:r>
-              <a:rPr sz="1600"/>
+              <a:rPr sz="1400"/>
               <a:t>    • Puanlama sistemi</a:t>
             </a:r>
           </a:p>
           <a:p>
             <a:pPr lvl="1">
-              <a:spcAft>
-                <a:spcPts val="1000"/>
+              <a:lnSpc>
+                <a:spcPct val="90000"/>
+              </a:lnSpc>
+              <a:spcAft>
+                <a:spcPts val="300"/>
               </a:spcAft>
               <a:defRPr sz="1700"/>
             </a:pPr>
             <a:r>
-              <a:rPr sz="1600"/>
+              <a:rPr sz="1400"/>
               <a:t>    • Seviye tasarımı</a:t>
             </a:r>
           </a:p>
           <a:p>
             <a:pPr lvl="1">
-              <a:spcAft>
-                <a:spcPts val="1000"/>
+              <a:lnSpc>
+                <a:spcPct val="90000"/>
+              </a:lnSpc>
+              <a:spcAft>
+                <a:spcPts val="300"/>
               </a:spcAft>
               <a:defRPr sz="1700"/>
             </a:pPr>
             <a:r>
-              <a:rPr sz="1600"/>
+              <a:rPr sz="1400"/>
               <a:t>    • Yer çekimi mekaniği</a:t>
             </a:r>
           </a:p>
           <a:p>
             <a:pPr>
-              <a:spcAft>
-                <a:spcPts val="1000"/>
-              </a:spcAft>
-              <a:defRPr sz="1900"/>
-            </a:pPr>
-          </a:p>
-          <a:p>
-            <a:pPr>
-              <a:spcAft>
-                <a:spcPts val="1000"/>
-              </a:spcAft>
-              <a:defRPr sz="1900"/>
-            </a:pPr>
-            <a:r>
-              <a:rPr sz="1600"/>
+              <a:lnSpc>
+                <a:spcPct val="90000"/>
+              </a:lnSpc>
+              <a:spcAft>
+                <a:spcPts val="300"/>
+              </a:spcAft>
+              <a:defRPr sz="1900"/>
+            </a:pPr>
+          </a:p>
+          <a:p>
+            <a:pPr>
+              <a:lnSpc>
+                <a:spcPct val="90000"/>
+              </a:lnSpc>
+              <a:spcAft>
+                <a:spcPts val="300"/>
+              </a:spcAft>
+              <a:defRPr sz="1900"/>
+            </a:pPr>
+            <a:r>
+              <a:rPr sz="1400"/>
               <a:t>📌 Teknik Özellikler:</a:t>
             </a:r>
           </a:p>
           <a:p>
             <a:pPr lvl="1">
-              <a:spcAft>
-                <a:spcPts val="1000"/>
+              <a:lnSpc>
+                <a:spcPct val="90000"/>
+              </a:lnSpc>
+              <a:spcAft>
+                <a:spcPts val="300"/>
               </a:spcAft>
               <a:defRPr sz="1700"/>
             </a:pPr>
             <a:r>
-              <a:rPr sz="1600"/>
+              <a:rPr sz="1400"/>
               <a:t>    • Klonlama kullan</a:t>
             </a:r>
           </a:p>
           <a:p>
             <a:pPr lvl="1">
-              <a:spcAft>
-                <a:spcPts val="1000"/>
+              <a:lnSpc>
+                <a:spcPct val="90000"/>
+              </a:lnSpc>
+              <a:spcAft>
+                <a:spcPts val="300"/>
               </a:spcAft>
               <a:defRPr sz="1700"/>
             </a:pPr>
             <a:r>
-              <a:rPr sz="1600"/>
+              <a:rPr sz="1400"/>
               <a:t>    • Mesajlaşma kullan</a:t>
             </a:r>
           </a:p>
           <a:p>
             <a:pPr lvl="1">
-              <a:spcAft>
-                <a:spcPts val="1000"/>
+              <a:lnSpc>
+                <a:spcPct val="90000"/>
+              </a:lnSpc>
+              <a:spcAft>
+                <a:spcPts val="300"/>
               </a:spcAft>
               <a:defRPr sz="1700"/>
             </a:pPr>
             <a:r>
-              <a:rPr sz="1600"/>
+              <a:rPr sz="1400"/>
               <a:t>    • Değişkenler (puan, can)</a:t>
             </a:r>
           </a:p>
           <a:p>
             <a:pPr lvl="1">
-              <a:spcAft>
-                <a:spcPts val="1000"/>
+              <a:lnSpc>
+                <a:spcPct val="90000"/>
+              </a:lnSpc>
+              <a:spcAft>
+                <a:spcPts val="300"/>
               </a:spcAft>
               <a:defRPr sz="1700"/>
             </a:pPr>
             <a:r>
-              <a:rPr sz="1600"/>
+              <a:rPr sz="1400"/>
               <a:t>    • Çarpışma algılama</a:t>
             </a:r>
           </a:p>
           <a:p>
             <a:pPr lvl="1">
-              <a:spcAft>
-                <a:spcPts val="1000"/>
+              <a:lnSpc>
+                <a:spcPct val="90000"/>
+              </a:lnSpc>
+              <a:spcAft>
+                <a:spcPts val="300"/>
               </a:spcAft>
               <a:defRPr sz="1700"/>
             </a:pPr>
             <a:r>
-              <a:rPr sz="1600"/>
+              <a:rPr sz="1400"/>
               <a:t>    • Ses efektleri</a:t>
             </a:r>
           </a:p>
           <a:p>
             <a:pPr>
-              <a:spcAft>
-                <a:spcPts val="1000"/>
-              </a:spcAft>
-              <a:defRPr sz="1900"/>
-            </a:pPr>
-          </a:p>
-          <a:p>
-            <a:pPr>
-              <a:spcAft>
-                <a:spcPts val="1000"/>
-              </a:spcAft>
-              <a:defRPr sz="1900"/>
-            </a:pPr>
-            <a:r>
-              <a:rPr sz="1600"/>
+              <a:lnSpc>
+                <a:spcPct val="90000"/>
+              </a:lnSpc>
+              <a:spcAft>
+                <a:spcPts val="300"/>
+              </a:spcAft>
+              <a:defRPr sz="1900"/>
+            </a:pPr>
+          </a:p>
+          <a:p>
+            <a:pPr>
+              <a:lnSpc>
+                <a:spcPct val="90000"/>
+              </a:lnSpc>
+              <a:spcAft>
+                <a:spcPts val="300"/>
+              </a:spcAft>
+              <a:defRPr sz="1900"/>
+            </a:pPr>
+            <a:r>
+              <a:rPr sz="1400"/>
               <a:t>💡 Örnek Oyunlar:</a:t>
             </a:r>
           </a:p>
           <a:p>
             <a:pPr lvl="1">
-              <a:spcAft>
-                <a:spcPts val="1000"/>
+              <a:lnSpc>
+                <a:spcPct val="90000"/>
+              </a:lnSpc>
+              <a:spcAft>
+                <a:spcPts val="300"/>
               </a:spcAft>
               <a:defRPr sz="1700"/>
             </a:pPr>
             <a:r>
-              <a:rPr sz="1600"/>
+              <a:rPr sz="1400"/>
               <a:t>    • Mario benzeri</a:t>
             </a:r>
           </a:p>
           <a:p>
             <a:pPr lvl="1">
-              <a:spcAft>
-                <a:spcPts val="1000"/>
+              <a:lnSpc>
+                <a:spcPct val="90000"/>
+              </a:lnSpc>
+              <a:spcAft>
+                <a:spcPts val="300"/>
               </a:spcAft>
               <a:defRPr sz="1700"/>
             </a:pPr>
             <a:r>
-              <a:rPr sz="1600"/>
+              <a:rPr sz="1400"/>
               <a:t>    • Sonic benzeri</a:t>
             </a:r>
           </a:p>
           <a:p>
             <a:pPr lvl="1">
-              <a:spcAft>
-                <a:spcPts val="1000"/>
+              <a:lnSpc>
+                <a:spcPct val="90000"/>
+              </a:lnSpc>
+              <a:spcAft>
+                <a:spcPts val="300"/>
               </a:spcAft>
               <a:defRPr sz="1700"/>
             </a:pPr>
             <a:r>
-              <a:rPr sz="1600"/>
+              <a:rPr sz="1400"/>
               <a:t>    • Geometry Dash benzeri</a:t>
             </a:r>
           </a:p>
           <a:p>
             <a:pPr>
-              <a:spcAft>
-                <a:spcPts val="1000"/>
-              </a:spcAft>
-              <a:defRPr sz="1900"/>
-            </a:pPr>
-          </a:p>
-          <a:p>
-            <a:pPr>
-              <a:spcAft>
-                <a:spcPts val="1000"/>
-              </a:spcAft>
-              <a:defRPr sz="1900"/>
-            </a:pPr>
-            <a:r>
-              <a:rPr sz="1600"/>
+              <a:lnSpc>
+                <a:spcPct val="90000"/>
+              </a:lnSpc>
+              <a:spcAft>
+                <a:spcPts val="300"/>
+              </a:spcAft>
+              <a:defRPr sz="1900"/>
+            </a:pPr>
+          </a:p>
+          <a:p>
+            <a:pPr>
+              <a:lnSpc>
+                <a:spcPct val="90000"/>
+              </a:lnSpc>
+              <a:spcAft>
+                <a:spcPts val="300"/>
+              </a:spcAft>
+              <a:defRPr sz="1900"/>
+            </a:pPr>
+            <a:r>
+              <a:rPr sz="1400"/>
               <a:t>🎯 Bu proje tüm öğrendiklerini birleştiriyor!</a:t>
             </a:r>
           </a:p>
@@ -6424,7 +6907,7 @@
         </p:nvSpPr>
         <p:spPr/>
         <p:txBody>
-          <a:bodyPr/>
+          <a:bodyPr wrap="square"/>
           <a:lstStyle/>
           <a:p>
             <a:pPr>
@@ -6478,160 +6961,226 @@
             <a:spAutoFit/>
           </a:bodyPr>
           <a:lstStyle/>
-          <a:p/>
-          <a:p>
-            <a:pPr>
-              <a:spcAft>
-                <a:spcPts val="1000"/>
-              </a:spcAft>
-              <a:defRPr sz="1900"/>
-            </a:pPr>
-            <a:r>
+          <a:p>
+            <a:pPr>
+              <a:lnSpc>
+                <a:spcPct val="90000"/>
+              </a:lnSpc>
+              <a:spcAft>
+                <a:spcPts val="300"/>
+              </a:spcAft>
+            </a:pPr>
+          </a:p>
+          <a:p>
+            <a:pPr>
+              <a:lnSpc>
+                <a:spcPct val="90000"/>
+              </a:lnSpc>
+              <a:spcAft>
+                <a:spcPts val="300"/>
+              </a:spcAft>
+              <a:defRPr sz="1900"/>
+            </a:pPr>
+            <a:r>
+              <a:rPr sz="1500"/>
               <a:t>Bu ünitede neler öğrendik?</a:t>
             </a:r>
           </a:p>
           <a:p>
             <a:pPr>
-              <a:spcAft>
-                <a:spcPts val="1000"/>
-              </a:spcAft>
-              <a:defRPr sz="1900"/>
-            </a:pPr>
-          </a:p>
-          <a:p>
-            <a:pPr>
-              <a:spcAft>
-                <a:spcPts val="1000"/>
-              </a:spcAft>
-              <a:defRPr sz="1900"/>
-            </a:pPr>
-            <a:r>
+              <a:lnSpc>
+                <a:spcPct val="90000"/>
+              </a:lnSpc>
+              <a:spcAft>
+                <a:spcPts val="300"/>
+              </a:spcAft>
+              <a:defRPr sz="1900"/>
+            </a:pPr>
+          </a:p>
+          <a:p>
+            <a:pPr>
+              <a:lnSpc>
+                <a:spcPct val="90000"/>
+              </a:lnSpc>
+              <a:spcAft>
+                <a:spcPts val="300"/>
+              </a:spcAft>
+              <a:defRPr sz="1900"/>
+            </a:pPr>
+            <a:r>
+              <a:rPr sz="1500"/>
               <a:t>✅ Klonlama (çok nesne oluşturma)</a:t>
             </a:r>
           </a:p>
           <a:p>
             <a:pPr>
-              <a:spcAft>
-                <a:spcPts val="1000"/>
-              </a:spcAft>
-              <a:defRPr sz="1900"/>
-            </a:pPr>
-            <a:r>
+              <a:lnSpc>
+                <a:spcPct val="90000"/>
+              </a:lnSpc>
+              <a:spcAft>
+                <a:spcPts val="300"/>
+              </a:spcAft>
+              <a:defRPr sz="1900"/>
+            </a:pPr>
+            <a:r>
+              <a:rPr sz="1500"/>
               <a:t>✅ Mesajlaşma (sprite iletişimi)</a:t>
             </a:r>
           </a:p>
           <a:p>
             <a:pPr>
-              <a:spcAft>
-                <a:spcPts val="1000"/>
-              </a:spcAft>
-              <a:defRPr sz="1900"/>
-            </a:pPr>
-            <a:r>
+              <a:lnSpc>
+                <a:spcPct val="90000"/>
+              </a:lnSpc>
+              <a:spcAft>
+                <a:spcPts val="300"/>
+              </a:spcAft>
+              <a:defRPr sz="1900"/>
+            </a:pPr>
+            <a:r>
+              <a:rPr sz="1500"/>
               <a:t>✅ Kalem uzantısı (çizim)</a:t>
             </a:r>
           </a:p>
           <a:p>
             <a:pPr>
-              <a:spcAft>
-                <a:spcPts val="1000"/>
-              </a:spcAft>
-              <a:defRPr sz="1900"/>
-            </a:pPr>
-            <a:r>
+              <a:lnSpc>
+                <a:spcPct val="90000"/>
+              </a:lnSpc>
+              <a:spcAft>
+                <a:spcPts val="300"/>
+              </a:spcAft>
+              <a:defRPr sz="1900"/>
+            </a:pPr>
+            <a:r>
+              <a:rPr sz="1500"/>
               <a:t>✅ Müzik uzantısı (melodi)</a:t>
             </a:r>
           </a:p>
           <a:p>
             <a:pPr>
-              <a:spcAft>
-                <a:spcPts val="1000"/>
-              </a:spcAft>
-              <a:defRPr sz="1900"/>
-            </a:pPr>
-            <a:r>
+              <a:lnSpc>
+                <a:spcPct val="90000"/>
+              </a:lnSpc>
+              <a:spcAft>
+                <a:spcPts val="300"/>
+              </a:spcAft>
+              <a:defRPr sz="1900"/>
+            </a:pPr>
+            <a:r>
+              <a:rPr sz="1500"/>
               <a:t>✅ Video algılama (kamera)</a:t>
             </a:r>
           </a:p>
           <a:p>
             <a:pPr>
-              <a:spcAft>
-                <a:spcPts val="1000"/>
-              </a:spcAft>
-              <a:defRPr sz="1900"/>
-            </a:pPr>
-            <a:r>
+              <a:lnSpc>
+                <a:spcPct val="90000"/>
+              </a:lnSpc>
+              <a:spcAft>
+                <a:spcPts val="300"/>
+              </a:spcAft>
+              <a:defRPr sz="1900"/>
+            </a:pPr>
+            <a:r>
+              <a:rPr sz="1500"/>
               <a:t>✅ Karmaşık oyun mekaniği</a:t>
             </a:r>
           </a:p>
           <a:p>
             <a:pPr>
-              <a:spcAft>
-                <a:spcPts val="1000"/>
-              </a:spcAft>
-              <a:defRPr sz="1900"/>
-            </a:pPr>
-            <a:r>
+              <a:lnSpc>
+                <a:spcPct val="90000"/>
+              </a:lnSpc>
+              <a:spcAft>
+                <a:spcPts val="300"/>
+              </a:spcAft>
+              <a:defRPr sz="1900"/>
+            </a:pPr>
+            <a:r>
+              <a:rPr sz="1500"/>
               <a:t>✅ Platform oyunu projesi</a:t>
             </a:r>
           </a:p>
           <a:p>
             <a:pPr>
-              <a:spcAft>
-                <a:spcPts val="1000"/>
-              </a:spcAft>
-              <a:defRPr sz="1900"/>
-            </a:pPr>
-          </a:p>
-          <a:p>
-            <a:pPr>
-              <a:spcAft>
-                <a:spcPts val="1000"/>
-              </a:spcAft>
-              <a:defRPr sz="1900"/>
-            </a:pPr>
-            <a:r>
+              <a:lnSpc>
+                <a:spcPct val="90000"/>
+              </a:lnSpc>
+              <a:spcAft>
+                <a:spcPts val="300"/>
+              </a:spcAft>
+              <a:defRPr sz="1900"/>
+            </a:pPr>
+          </a:p>
+          <a:p>
+            <a:pPr>
+              <a:lnSpc>
+                <a:spcPct val="90000"/>
+              </a:lnSpc>
+              <a:spcAft>
+                <a:spcPts val="300"/>
+              </a:spcAft>
+              <a:defRPr sz="1900"/>
+            </a:pPr>
+            <a:r>
+              <a:rPr sz="1500"/>
               <a:t>💡 Anahtar Mesaj:</a:t>
             </a:r>
           </a:p>
           <a:p>
             <a:pPr>
-              <a:spcAft>
-                <a:spcPts val="1000"/>
-              </a:spcAft>
-              <a:defRPr sz="1900"/>
-            </a:pPr>
-            <a:r>
+              <a:lnSpc>
+                <a:spcPct val="90000"/>
+              </a:lnSpc>
+              <a:spcAft>
+                <a:spcPts val="300"/>
+              </a:spcAft>
+              <a:defRPr sz="1900"/>
+            </a:pPr>
+            <a:r>
+              <a:rPr sz="1500"/>
               <a:t>Artık profesyonel seviye oyunlar yapabilirsin!</a:t>
             </a:r>
           </a:p>
           <a:p>
             <a:pPr>
-              <a:spcAft>
-                <a:spcPts val="1000"/>
-              </a:spcAft>
-              <a:defRPr sz="1900"/>
-            </a:pPr>
-          </a:p>
-          <a:p>
-            <a:pPr>
-              <a:spcAft>
-                <a:spcPts val="1000"/>
-              </a:spcAft>
-              <a:defRPr sz="1900"/>
-            </a:pPr>
-            <a:r>
+              <a:lnSpc>
+                <a:spcPct val="90000"/>
+              </a:lnSpc>
+              <a:spcAft>
+                <a:spcPts val="300"/>
+              </a:spcAft>
+              <a:defRPr sz="1900"/>
+            </a:pPr>
+          </a:p>
+          <a:p>
+            <a:pPr>
+              <a:lnSpc>
+                <a:spcPct val="90000"/>
+              </a:lnSpc>
+              <a:spcAft>
+                <a:spcPts val="300"/>
+              </a:spcAft>
+              <a:defRPr sz="1900"/>
+            </a:pPr>
+            <a:r>
+              <a:rPr sz="1500"/>
               <a:t>🎯 Scratch'in tüm özelliklerini öğrendin!</a:t>
             </a:r>
           </a:p>
           <a:p>
             <a:pPr>
-              <a:spcAft>
-                <a:spcPts val="1000"/>
-              </a:spcAft>
-              <a:defRPr sz="1900"/>
-            </a:pPr>
-            <a:r>
+              <a:lnSpc>
+                <a:spcPct val="90000"/>
+              </a:lnSpc>
+              <a:spcAft>
+                <a:spcPts val="300"/>
+              </a:spcAft>
+              <a:defRPr sz="1900"/>
+            </a:pPr>
+            <a:r>
+              <a:rPr sz="1500"/>
               <a:t>🚀 Sıra kendi büyük projendeartık!</a:t>
             </a:r>
           </a:p>

--- a/sunumlar/6-sinif-unite4-scratch-ileri-DETAYLI.pptx
+++ b/sunumlar/6-sinif-unite4-scratch-ileri-DETAYLI.pptx
@@ -4373,12 +4373,21 @@
           <a:noFill/>
         </p:spPr>
         <p:txBody>
-          <a:bodyPr wrap="square">
+          <a:bodyPr wrap="square" tIns="25400" bIns="25400" lIns="63500" rIns="63500">
             <a:spAutoFit/>
           </a:bodyPr>
           <a:lstStyle/>
           <a:p>
             <a:pPr algn="ctr">
+              <a:lnSpc>
+                <a:spcPct val="85000"/>
+              </a:lnSpc>
+              <a:spcBef>
+                <a:spcPts val="200"/>
+              </a:spcBef>
+              <a:spcAft>
+                <a:spcPts val="200"/>
+              </a:spcAft>
               <a:defRPr sz="5400" b="1">
                 <a:solidFill>
                   <a:srgbClr val="FFFFFF"/>
@@ -4386,6 +4395,7 @@
               </a:defRPr>
             </a:pPr>
             <a:r>
+              <a:rPr/>
               <a:t>6. SINIF - ÜNİTE 4</a:t>
             </a:r>
           </a:p>
@@ -4408,12 +4418,21 @@
           <a:noFill/>
         </p:spPr>
         <p:txBody>
-          <a:bodyPr wrap="square">
+          <a:bodyPr wrap="square" tIns="25400" bIns="25400" lIns="63500" rIns="63500">
             <a:spAutoFit/>
           </a:bodyPr>
           <a:lstStyle/>
           <a:p>
             <a:pPr algn="ctr">
+              <a:lnSpc>
+                <a:spcPct val="85000"/>
+              </a:lnSpc>
+              <a:spcBef>
+                <a:spcPts val="200"/>
+              </a:spcBef>
+              <a:spcAft>
+                <a:spcPts val="200"/>
+              </a:spcAft>
               <a:defRPr sz="2800">
                 <a:solidFill>
                   <a:srgbClr val="FFFFFF"/>
@@ -4421,6 +4440,7 @@
               </a:defRPr>
             </a:pPr>
             <a:r>
+              <a:rPr/>
               <a:t>Blok Tabanlı Programlama II</a:t>
             </a:r>
           </a:p>
@@ -4456,10 +4476,19 @@
         </p:nvSpPr>
         <p:spPr/>
         <p:txBody>
-          <a:bodyPr wrap="square"/>
+          <a:bodyPr wrap="square" tIns="25400" bIns="25400" lIns="63500" rIns="63500"/>
           <a:lstStyle/>
           <a:p>
             <a:pPr>
+              <a:lnSpc>
+                <a:spcPct val="85000"/>
+              </a:lnSpc>
+              <a:spcBef>
+                <a:spcPts val="200"/>
+              </a:spcBef>
+              <a:spcAft>
+                <a:spcPts val="200"/>
+              </a:spcAft>
               <a:defRPr sz="3800" b="1">
                 <a:solidFill>
                   <a:srgbClr val="764BA2"/>
@@ -4467,6 +4496,7 @@
               </a:defRPr>
             </a:pPr>
             <a:r>
+              <a:rPr/>
               <a:t>📚 Ünitenin Konuları</a:t>
             </a:r>
           </a:p>
@@ -4506,7 +4536,7 @@
           <a:noFill/>
         </p:spPr>
         <p:txBody>
-          <a:bodyPr wrap="square">
+          <a:bodyPr wrap="square" tIns="25400" bIns="25400" lIns="63500" rIns="63500">
             <a:spAutoFit/>
           </a:bodyPr>
           <a:lstStyle/>
@@ -4523,10 +4553,13 @@
           <a:p>
             <a:pPr>
               <a:lnSpc>
-                <a:spcPct val="90000"/>
-              </a:lnSpc>
-              <a:spcAft>
-                <a:spcPts val="300"/>
+                <a:spcPct val="85000"/>
+              </a:lnSpc>
+              <a:spcBef>
+                <a:spcPts val="200"/>
+              </a:spcBef>
+              <a:spcAft>
+                <a:spcPts val="200"/>
               </a:spcAft>
               <a:defRPr sz="1900"/>
             </a:pPr>
@@ -4549,10 +4582,13 @@
           <a:p>
             <a:pPr>
               <a:lnSpc>
-                <a:spcPct val="90000"/>
-              </a:lnSpc>
-              <a:spcAft>
-                <a:spcPts val="300"/>
+                <a:spcPct val="85000"/>
+              </a:lnSpc>
+              <a:spcBef>
+                <a:spcPts val="200"/>
+              </a:spcBef>
+              <a:spcAft>
+                <a:spcPts val="200"/>
               </a:spcAft>
               <a:defRPr sz="1900"/>
             </a:pPr>
@@ -4564,10 +4600,13 @@
           <a:p>
             <a:pPr>
               <a:lnSpc>
-                <a:spcPct val="90000"/>
-              </a:lnSpc>
-              <a:spcAft>
-                <a:spcPts val="300"/>
+                <a:spcPct val="85000"/>
+              </a:lnSpc>
+              <a:spcBef>
+                <a:spcPts val="200"/>
+              </a:spcBef>
+              <a:spcAft>
+                <a:spcPts val="200"/>
               </a:spcAft>
               <a:defRPr sz="1900"/>
             </a:pPr>
@@ -4579,10 +4618,13 @@
           <a:p>
             <a:pPr>
               <a:lnSpc>
-                <a:spcPct val="90000"/>
-              </a:lnSpc>
-              <a:spcAft>
-                <a:spcPts val="300"/>
+                <a:spcPct val="85000"/>
+              </a:lnSpc>
+              <a:spcBef>
+                <a:spcPts val="200"/>
+              </a:spcBef>
+              <a:spcAft>
+                <a:spcPts val="200"/>
               </a:spcAft>
               <a:defRPr sz="1900"/>
             </a:pPr>
@@ -4594,10 +4636,13 @@
           <a:p>
             <a:pPr>
               <a:lnSpc>
-                <a:spcPct val="90000"/>
-              </a:lnSpc>
-              <a:spcAft>
-                <a:spcPts val="300"/>
+                <a:spcPct val="85000"/>
+              </a:lnSpc>
+              <a:spcBef>
+                <a:spcPts val="200"/>
+              </a:spcBef>
+              <a:spcAft>
+                <a:spcPts val="200"/>
               </a:spcAft>
               <a:defRPr sz="1900"/>
             </a:pPr>
@@ -4609,10 +4654,13 @@
           <a:p>
             <a:pPr>
               <a:lnSpc>
-                <a:spcPct val="90000"/>
-              </a:lnSpc>
-              <a:spcAft>
-                <a:spcPts val="300"/>
+                <a:spcPct val="85000"/>
+              </a:lnSpc>
+              <a:spcBef>
+                <a:spcPts val="200"/>
+              </a:spcBef>
+              <a:spcAft>
+                <a:spcPts val="200"/>
               </a:spcAft>
               <a:defRPr sz="1900"/>
             </a:pPr>
@@ -4624,10 +4672,13 @@
           <a:p>
             <a:pPr>
               <a:lnSpc>
-                <a:spcPct val="90000"/>
-              </a:lnSpc>
-              <a:spcAft>
-                <a:spcPts val="300"/>
+                <a:spcPct val="85000"/>
+              </a:lnSpc>
+              <a:spcBef>
+                <a:spcPts val="200"/>
+              </a:spcBef>
+              <a:spcAft>
+                <a:spcPts val="200"/>
               </a:spcAft>
               <a:defRPr sz="1900"/>
             </a:pPr>
@@ -4639,10 +4690,13 @@
           <a:p>
             <a:pPr>
               <a:lnSpc>
-                <a:spcPct val="90000"/>
-              </a:lnSpc>
-              <a:spcAft>
-                <a:spcPts val="300"/>
+                <a:spcPct val="85000"/>
+              </a:lnSpc>
+              <a:spcBef>
+                <a:spcPts val="200"/>
+              </a:spcBef>
+              <a:spcAft>
+                <a:spcPts val="200"/>
               </a:spcAft>
               <a:defRPr sz="1900"/>
             </a:pPr>
@@ -4654,10 +4708,13 @@
           <a:p>
             <a:pPr>
               <a:lnSpc>
-                <a:spcPct val="90000"/>
-              </a:lnSpc>
-              <a:spcAft>
-                <a:spcPts val="300"/>
+                <a:spcPct val="85000"/>
+              </a:lnSpc>
+              <a:spcBef>
+                <a:spcPts val="200"/>
+              </a:spcBef>
+              <a:spcAft>
+                <a:spcPts val="200"/>
               </a:spcAft>
               <a:defRPr sz="1900"/>
             </a:pPr>
@@ -4669,10 +4726,13 @@
           <a:p>
             <a:pPr>
               <a:lnSpc>
-                <a:spcPct val="90000"/>
-              </a:lnSpc>
-              <a:spcAft>
-                <a:spcPts val="300"/>
+                <a:spcPct val="85000"/>
+              </a:lnSpc>
+              <a:spcBef>
+                <a:spcPts val="200"/>
+              </a:spcBef>
+              <a:spcAft>
+                <a:spcPts val="200"/>
               </a:spcAft>
               <a:defRPr sz="1900"/>
             </a:pPr>
@@ -4695,10 +4755,13 @@
           <a:p>
             <a:pPr>
               <a:lnSpc>
-                <a:spcPct val="90000"/>
-              </a:lnSpc>
-              <a:spcAft>
-                <a:spcPts val="300"/>
+                <a:spcPct val="85000"/>
+              </a:lnSpc>
+              <a:spcBef>
+                <a:spcPts val="200"/>
+              </a:spcBef>
+              <a:spcAft>
+                <a:spcPts val="200"/>
               </a:spcAft>
               <a:defRPr sz="1900"/>
             </a:pPr>
@@ -4710,10 +4773,13 @@
           <a:p>
             <a:pPr>
               <a:lnSpc>
-                <a:spcPct val="90000"/>
-              </a:lnSpc>
-              <a:spcAft>
-                <a:spcPts val="300"/>
+                <a:spcPct val="85000"/>
+              </a:lnSpc>
+              <a:spcBef>
+                <a:spcPts val="200"/>
+              </a:spcBef>
+              <a:spcAft>
+                <a:spcPts val="200"/>
               </a:spcAft>
               <a:defRPr sz="1900"/>
             </a:pPr>
@@ -4754,10 +4820,19 @@
         </p:nvSpPr>
         <p:spPr/>
         <p:txBody>
-          <a:bodyPr wrap="square"/>
+          <a:bodyPr wrap="square" tIns="25400" bIns="25400" lIns="63500" rIns="63500"/>
           <a:lstStyle/>
           <a:p>
             <a:pPr>
+              <a:lnSpc>
+                <a:spcPct val="85000"/>
+              </a:lnSpc>
+              <a:spcBef>
+                <a:spcPts val="200"/>
+              </a:spcBef>
+              <a:spcAft>
+                <a:spcPts val="200"/>
+              </a:spcAft>
               <a:defRPr sz="3800" b="1">
                 <a:solidFill>
                   <a:srgbClr val="764BA2"/>
@@ -4765,6 +4840,7 @@
               </a:defRPr>
             </a:pPr>
             <a:r>
+              <a:rPr/>
               <a:t>👥 Klonlama</a:t>
             </a:r>
           </a:p>
@@ -4804,7 +4880,7 @@
           <a:noFill/>
         </p:spPr>
         <p:txBody>
-          <a:bodyPr wrap="square">
+          <a:bodyPr wrap="square" tIns="25400" bIns="25400" lIns="63500" rIns="63500">
             <a:spAutoFit/>
           </a:bodyPr>
           <a:lstStyle/>
@@ -4821,10 +4897,13 @@
           <a:p>
             <a:pPr>
               <a:lnSpc>
-                <a:spcPct val="90000"/>
-              </a:lnSpc>
-              <a:spcAft>
-                <a:spcPts val="300"/>
+                <a:spcPct val="85000"/>
+              </a:lnSpc>
+              <a:spcBef>
+                <a:spcPts val="200"/>
+              </a:spcBef>
+              <a:spcAft>
+                <a:spcPts val="200"/>
               </a:spcAft>
               <a:defRPr sz="1900"/>
             </a:pPr>
@@ -4847,10 +4926,13 @@
           <a:p>
             <a:pPr>
               <a:lnSpc>
-                <a:spcPct val="90000"/>
-              </a:lnSpc>
-              <a:spcAft>
-                <a:spcPts val="300"/>
+                <a:spcPct val="85000"/>
+              </a:lnSpc>
+              <a:spcBef>
+                <a:spcPts val="200"/>
+              </a:spcBef>
+              <a:spcAft>
+                <a:spcPts val="200"/>
               </a:spcAft>
               <a:defRPr sz="1900"/>
             </a:pPr>
@@ -4862,10 +4944,13 @@
           <a:p>
             <a:pPr lvl="1">
               <a:lnSpc>
-                <a:spcPct val="90000"/>
-              </a:lnSpc>
-              <a:spcAft>
-                <a:spcPts val="300"/>
+                <a:spcPct val="85000"/>
+              </a:lnSpc>
+              <a:spcBef>
+                <a:spcPts val="200"/>
+              </a:spcBef>
+              <a:spcAft>
+                <a:spcPts val="200"/>
               </a:spcAft>
               <a:defRPr sz="1700"/>
             </a:pPr>
@@ -4877,10 +4962,13 @@
           <a:p>
             <a:pPr lvl="1">
               <a:lnSpc>
-                <a:spcPct val="90000"/>
-              </a:lnSpc>
-              <a:spcAft>
-                <a:spcPts val="300"/>
+                <a:spcPct val="85000"/>
+              </a:lnSpc>
+              <a:spcBef>
+                <a:spcPts val="200"/>
+              </a:spcBef>
+              <a:spcAft>
+                <a:spcPts val="200"/>
               </a:spcAft>
               <a:defRPr sz="1700"/>
             </a:pPr>
@@ -4903,10 +4991,13 @@
           <a:p>
             <a:pPr>
               <a:lnSpc>
-                <a:spcPct val="90000"/>
-              </a:lnSpc>
-              <a:spcAft>
-                <a:spcPts val="300"/>
+                <a:spcPct val="85000"/>
+              </a:lnSpc>
+              <a:spcBef>
+                <a:spcPts val="200"/>
+              </a:spcBef>
+              <a:spcAft>
+                <a:spcPts val="200"/>
               </a:spcAft>
               <a:defRPr sz="1900"/>
             </a:pPr>
@@ -4929,10 +5020,13 @@
           <a:p>
             <a:pPr>
               <a:lnSpc>
-                <a:spcPct val="90000"/>
-              </a:lnSpc>
-              <a:spcAft>
-                <a:spcPts val="300"/>
+                <a:spcPct val="85000"/>
+              </a:lnSpc>
+              <a:spcBef>
+                <a:spcPts val="200"/>
+              </a:spcBef>
+              <a:spcAft>
+                <a:spcPts val="200"/>
               </a:spcAft>
               <a:defRPr sz="1900"/>
             </a:pPr>
@@ -4944,10 +5038,13 @@
           <a:p>
             <a:pPr>
               <a:lnSpc>
-                <a:spcPct val="90000"/>
-              </a:lnSpc>
-              <a:spcAft>
-                <a:spcPts val="300"/>
+                <a:spcPct val="85000"/>
+              </a:lnSpc>
+              <a:spcBef>
+                <a:spcPts val="200"/>
+              </a:spcBef>
+              <a:spcAft>
+                <a:spcPts val="200"/>
               </a:spcAft>
               <a:defRPr sz="1900"/>
             </a:pPr>
@@ -4959,10 +5056,13 @@
           <a:p>
             <a:pPr>
               <a:lnSpc>
-                <a:spcPct val="90000"/>
-              </a:lnSpc>
-              <a:spcAft>
-                <a:spcPts val="300"/>
+                <a:spcPct val="85000"/>
+              </a:lnSpc>
+              <a:spcBef>
+                <a:spcPts val="200"/>
+              </a:spcBef>
+              <a:spcAft>
+                <a:spcPts val="200"/>
               </a:spcAft>
               <a:defRPr sz="1900"/>
             </a:pPr>
@@ -4985,10 +5085,13 @@
           <a:p>
             <a:pPr>
               <a:lnSpc>
-                <a:spcPct val="90000"/>
-              </a:lnSpc>
-              <a:spcAft>
-                <a:spcPts val="300"/>
+                <a:spcPct val="85000"/>
+              </a:lnSpc>
+              <a:spcBef>
+                <a:spcPts val="200"/>
+              </a:spcBef>
+              <a:spcAft>
+                <a:spcPts val="200"/>
               </a:spcAft>
               <a:defRPr sz="1900"/>
             </a:pPr>
@@ -5011,10 +5114,13 @@
           <a:p>
             <a:pPr>
               <a:lnSpc>
-                <a:spcPct val="90000"/>
-              </a:lnSpc>
-              <a:spcAft>
-                <a:spcPts val="300"/>
+                <a:spcPct val="85000"/>
+              </a:lnSpc>
+              <a:spcBef>
+                <a:spcPts val="200"/>
+              </a:spcBef>
+              <a:spcAft>
+                <a:spcPts val="200"/>
               </a:spcAft>
               <a:defRPr sz="1900"/>
             </a:pPr>
@@ -5026,10 +5132,13 @@
           <a:p>
             <a:pPr>
               <a:lnSpc>
-                <a:spcPct val="90000"/>
-              </a:lnSpc>
-              <a:spcAft>
-                <a:spcPts val="300"/>
+                <a:spcPct val="85000"/>
+              </a:lnSpc>
+              <a:spcBef>
+                <a:spcPts val="200"/>
+              </a:spcBef>
+              <a:spcAft>
+                <a:spcPts val="200"/>
               </a:spcAft>
               <a:defRPr sz="1900"/>
             </a:pPr>
@@ -5041,10 +5150,13 @@
           <a:p>
             <a:pPr lvl="1">
               <a:lnSpc>
-                <a:spcPct val="90000"/>
-              </a:lnSpc>
-              <a:spcAft>
-                <a:spcPts val="300"/>
+                <a:spcPct val="85000"/>
+              </a:lnSpc>
+              <a:spcBef>
+                <a:spcPts val="200"/>
+              </a:spcBef>
+              <a:spcAft>
+                <a:spcPts val="200"/>
               </a:spcAft>
               <a:defRPr sz="1700"/>
             </a:pPr>
@@ -5056,10 +5168,13 @@
           <a:p>
             <a:pPr lvl="1">
               <a:lnSpc>
-                <a:spcPct val="90000"/>
-              </a:lnSpc>
-              <a:spcAft>
-                <a:spcPts val="300"/>
+                <a:spcPct val="85000"/>
+              </a:lnSpc>
+              <a:spcBef>
+                <a:spcPts val="200"/>
+              </a:spcBef>
+              <a:spcAft>
+                <a:spcPts val="200"/>
               </a:spcAft>
               <a:defRPr sz="1700"/>
             </a:pPr>
@@ -5082,10 +5197,13 @@
           <a:p>
             <a:pPr>
               <a:lnSpc>
-                <a:spcPct val="90000"/>
-              </a:lnSpc>
-              <a:spcAft>
-                <a:spcPts val="300"/>
+                <a:spcPct val="85000"/>
+              </a:lnSpc>
+              <a:spcBef>
+                <a:spcPts val="200"/>
+              </a:spcBef>
+              <a:spcAft>
+                <a:spcPts val="200"/>
               </a:spcAft>
               <a:defRPr sz="1900"/>
             </a:pPr>
@@ -5097,10 +5215,13 @@
           <a:p>
             <a:pPr>
               <a:lnSpc>
-                <a:spcPct val="90000"/>
-              </a:lnSpc>
-              <a:spcAft>
-                <a:spcPts val="300"/>
+                <a:spcPct val="85000"/>
+              </a:lnSpc>
+              <a:spcBef>
+                <a:spcPts val="200"/>
+              </a:spcBef>
+              <a:spcAft>
+                <a:spcPts val="200"/>
               </a:spcAft>
               <a:defRPr sz="1900"/>
             </a:pPr>
@@ -5112,10 +5233,13 @@
           <a:p>
             <a:pPr>
               <a:lnSpc>
-                <a:spcPct val="90000"/>
-              </a:lnSpc>
-              <a:spcAft>
-                <a:spcPts val="300"/>
+                <a:spcPct val="85000"/>
+              </a:lnSpc>
+              <a:spcBef>
+                <a:spcPts val="200"/>
+              </a:spcBef>
+              <a:spcAft>
+                <a:spcPts val="200"/>
               </a:spcAft>
               <a:defRPr sz="1900"/>
             </a:pPr>
@@ -5127,10 +5251,13 @@
           <a:p>
             <a:pPr lvl="1">
               <a:lnSpc>
-                <a:spcPct val="90000"/>
-              </a:lnSpc>
-              <a:spcAft>
-                <a:spcPts val="300"/>
+                <a:spcPct val="85000"/>
+              </a:lnSpc>
+              <a:spcBef>
+                <a:spcPts val="200"/>
+              </a:spcBef>
+              <a:spcAft>
+                <a:spcPts val="200"/>
               </a:spcAft>
               <a:defRPr sz="1700"/>
             </a:pPr>
@@ -5142,10 +5269,13 @@
           <a:p>
             <a:pPr>
               <a:lnSpc>
-                <a:spcPct val="90000"/>
-              </a:lnSpc>
-              <a:spcAft>
-                <a:spcPts val="300"/>
+                <a:spcPct val="85000"/>
+              </a:lnSpc>
+              <a:spcBef>
+                <a:spcPts val="200"/>
+              </a:spcBef>
+              <a:spcAft>
+                <a:spcPts val="200"/>
               </a:spcAft>
               <a:defRPr sz="1900"/>
             </a:pPr>
@@ -5168,10 +5298,13 @@
           <a:p>
             <a:pPr>
               <a:lnSpc>
-                <a:spcPct val="90000"/>
-              </a:lnSpc>
-              <a:spcAft>
-                <a:spcPts val="300"/>
+                <a:spcPct val="85000"/>
+              </a:lnSpc>
+              <a:spcBef>
+                <a:spcPts val="200"/>
+              </a:spcBef>
+              <a:spcAft>
+                <a:spcPts val="200"/>
               </a:spcAft>
               <a:defRPr sz="1900"/>
             </a:pPr>
@@ -5212,10 +5345,19 @@
         </p:nvSpPr>
         <p:spPr/>
         <p:txBody>
-          <a:bodyPr wrap="square"/>
+          <a:bodyPr wrap="square" tIns="25400" bIns="25400" lIns="63500" rIns="63500"/>
           <a:lstStyle/>
           <a:p>
             <a:pPr>
+              <a:lnSpc>
+                <a:spcPct val="85000"/>
+              </a:lnSpc>
+              <a:spcBef>
+                <a:spcPts val="200"/>
+              </a:spcBef>
+              <a:spcAft>
+                <a:spcPts val="200"/>
+              </a:spcAft>
               <a:defRPr sz="3800" b="1">
                 <a:solidFill>
                   <a:srgbClr val="764BA2"/>
@@ -5223,6 +5365,7 @@
               </a:defRPr>
             </a:pPr>
             <a:r>
+              <a:rPr/>
               <a:t>📡 Mesajlaşma</a:t>
             </a:r>
           </a:p>
@@ -5262,7 +5405,7 @@
           <a:noFill/>
         </p:spPr>
         <p:txBody>
-          <a:bodyPr wrap="square">
+          <a:bodyPr wrap="square" tIns="25400" bIns="25400" lIns="63500" rIns="63500">
             <a:spAutoFit/>
           </a:bodyPr>
           <a:lstStyle/>
@@ -5279,10 +5422,13 @@
           <a:p>
             <a:pPr>
               <a:lnSpc>
-                <a:spcPct val="90000"/>
-              </a:lnSpc>
-              <a:spcAft>
-                <a:spcPts val="300"/>
+                <a:spcPct val="85000"/>
+              </a:lnSpc>
+              <a:spcBef>
+                <a:spcPts val="200"/>
+              </a:spcBef>
+              <a:spcAft>
+                <a:spcPts val="200"/>
               </a:spcAft>
               <a:defRPr sz="1900"/>
             </a:pPr>
@@ -5305,10 +5451,13 @@
           <a:p>
             <a:pPr>
               <a:lnSpc>
-                <a:spcPct val="90000"/>
-              </a:lnSpc>
-              <a:spcAft>
-                <a:spcPts val="300"/>
+                <a:spcPct val="85000"/>
+              </a:lnSpc>
+              <a:spcBef>
+                <a:spcPts val="200"/>
+              </a:spcBef>
+              <a:spcAft>
+                <a:spcPts val="200"/>
               </a:spcAft>
               <a:defRPr sz="1900"/>
             </a:pPr>
@@ -5320,10 +5469,13 @@
           <a:p>
             <a:pPr lvl="1">
               <a:lnSpc>
-                <a:spcPct val="90000"/>
-              </a:lnSpc>
-              <a:spcAft>
-                <a:spcPts val="300"/>
+                <a:spcPct val="85000"/>
+              </a:lnSpc>
+              <a:spcBef>
+                <a:spcPts val="200"/>
+              </a:spcBef>
+              <a:spcAft>
+                <a:spcPts val="200"/>
               </a:spcAft>
               <a:defRPr sz="1700"/>
             </a:pPr>
@@ -5335,10 +5487,13 @@
           <a:p>
             <a:pPr lvl="1">
               <a:lnSpc>
-                <a:spcPct val="90000"/>
-              </a:lnSpc>
-              <a:spcAft>
-                <a:spcPts val="300"/>
+                <a:spcPct val="85000"/>
+              </a:lnSpc>
+              <a:spcBef>
+                <a:spcPts val="200"/>
+              </a:spcBef>
+              <a:spcAft>
+                <a:spcPts val="200"/>
               </a:spcAft>
               <a:defRPr sz="1700"/>
             </a:pPr>
@@ -5350,10 +5505,13 @@
           <a:p>
             <a:pPr lvl="1">
               <a:lnSpc>
-                <a:spcPct val="90000"/>
-              </a:lnSpc>
-              <a:spcAft>
-                <a:spcPts val="300"/>
+                <a:spcPct val="85000"/>
+              </a:lnSpc>
+              <a:spcBef>
+                <a:spcPts val="200"/>
+              </a:spcBef>
+              <a:spcAft>
+                <a:spcPts val="200"/>
               </a:spcAft>
               <a:defRPr sz="1700"/>
             </a:pPr>
@@ -5376,10 +5534,13 @@
           <a:p>
             <a:pPr>
               <a:lnSpc>
-                <a:spcPct val="90000"/>
-              </a:lnSpc>
-              <a:spcAft>
-                <a:spcPts val="300"/>
+                <a:spcPct val="85000"/>
+              </a:lnSpc>
+              <a:spcBef>
+                <a:spcPts val="200"/>
+              </a:spcBef>
+              <a:spcAft>
+                <a:spcPts val="200"/>
               </a:spcAft>
               <a:defRPr sz="1900"/>
             </a:pPr>
@@ -5402,10 +5563,13 @@
           <a:p>
             <a:pPr>
               <a:lnSpc>
-                <a:spcPct val="90000"/>
-              </a:lnSpc>
-              <a:spcAft>
-                <a:spcPts val="300"/>
+                <a:spcPct val="85000"/>
+              </a:lnSpc>
+              <a:spcBef>
+                <a:spcPts val="200"/>
+              </a:spcBef>
+              <a:spcAft>
+                <a:spcPts val="200"/>
               </a:spcAft>
               <a:defRPr sz="1900"/>
             </a:pPr>
@@ -5417,10 +5581,13 @@
           <a:p>
             <a:pPr>
               <a:lnSpc>
-                <a:spcPct val="90000"/>
-              </a:lnSpc>
-              <a:spcAft>
-                <a:spcPts val="300"/>
+                <a:spcPct val="85000"/>
+              </a:lnSpc>
+              <a:spcBef>
+                <a:spcPts val="200"/>
+              </a:spcBef>
+              <a:spcAft>
+                <a:spcPts val="200"/>
               </a:spcAft>
               <a:defRPr sz="1900"/>
             </a:pPr>
@@ -5432,10 +5599,13 @@
           <a:p>
             <a:pPr>
               <a:lnSpc>
-                <a:spcPct val="90000"/>
-              </a:lnSpc>
-              <a:spcAft>
-                <a:spcPts val="300"/>
+                <a:spcPct val="85000"/>
+              </a:lnSpc>
+              <a:spcBef>
+                <a:spcPts val="200"/>
+              </a:spcBef>
+              <a:spcAft>
+                <a:spcPts val="200"/>
               </a:spcAft>
               <a:defRPr sz="1900"/>
             </a:pPr>
@@ -5458,10 +5628,13 @@
           <a:p>
             <a:pPr>
               <a:lnSpc>
-                <a:spcPct val="90000"/>
-              </a:lnSpc>
-              <a:spcAft>
-                <a:spcPts val="300"/>
+                <a:spcPct val="85000"/>
+              </a:lnSpc>
+              <a:spcBef>
+                <a:spcPts val="200"/>
+              </a:spcBef>
+              <a:spcAft>
+                <a:spcPts val="200"/>
               </a:spcAft>
               <a:defRPr sz="1900"/>
             </a:pPr>
@@ -5473,10 +5646,13 @@
           <a:p>
             <a:pPr>
               <a:lnSpc>
-                <a:spcPct val="90000"/>
-              </a:lnSpc>
-              <a:spcAft>
-                <a:spcPts val="300"/>
+                <a:spcPct val="85000"/>
+              </a:lnSpc>
+              <a:spcBef>
+                <a:spcPts val="200"/>
+              </a:spcBef>
+              <a:spcAft>
+                <a:spcPts val="200"/>
               </a:spcAft>
               <a:defRPr sz="1900"/>
             </a:pPr>
@@ -5488,10 +5664,13 @@
           <a:p>
             <a:pPr>
               <a:lnSpc>
-                <a:spcPct val="90000"/>
-              </a:lnSpc>
-              <a:spcAft>
-                <a:spcPts val="300"/>
+                <a:spcPct val="85000"/>
+              </a:lnSpc>
+              <a:spcBef>
+                <a:spcPts val="200"/>
+              </a:spcBef>
+              <a:spcAft>
+                <a:spcPts val="200"/>
               </a:spcAft>
               <a:defRPr sz="1900"/>
             </a:pPr>
@@ -5514,10 +5693,13 @@
           <a:p>
             <a:pPr>
               <a:lnSpc>
-                <a:spcPct val="90000"/>
-              </a:lnSpc>
-              <a:spcAft>
-                <a:spcPts val="300"/>
+                <a:spcPct val="85000"/>
+              </a:lnSpc>
+              <a:spcBef>
+                <a:spcPts val="200"/>
+              </a:spcBef>
+              <a:spcAft>
+                <a:spcPts val="200"/>
               </a:spcAft>
               <a:defRPr sz="1900"/>
             </a:pPr>
@@ -5529,10 +5711,13 @@
           <a:p>
             <a:pPr>
               <a:lnSpc>
-                <a:spcPct val="90000"/>
-              </a:lnSpc>
-              <a:spcAft>
-                <a:spcPts val="300"/>
+                <a:spcPct val="85000"/>
+              </a:lnSpc>
+              <a:spcBef>
+                <a:spcPts val="200"/>
+              </a:spcBef>
+              <a:spcAft>
+                <a:spcPts val="200"/>
               </a:spcAft>
               <a:defRPr sz="1900"/>
             </a:pPr>
@@ -5544,10 +5729,13 @@
           <a:p>
             <a:pPr>
               <a:lnSpc>
-                <a:spcPct val="90000"/>
-              </a:lnSpc>
-              <a:spcAft>
-                <a:spcPts val="300"/>
+                <a:spcPct val="85000"/>
+              </a:lnSpc>
+              <a:spcBef>
+                <a:spcPts val="200"/>
+              </a:spcBef>
+              <a:spcAft>
+                <a:spcPts val="200"/>
               </a:spcAft>
               <a:defRPr sz="1900"/>
             </a:pPr>
@@ -5570,10 +5758,13 @@
           <a:p>
             <a:pPr>
               <a:lnSpc>
-                <a:spcPct val="90000"/>
-              </a:lnSpc>
-              <a:spcAft>
-                <a:spcPts val="300"/>
+                <a:spcPct val="85000"/>
+              </a:lnSpc>
+              <a:spcBef>
+                <a:spcPts val="200"/>
+              </a:spcBef>
+              <a:spcAft>
+                <a:spcPts val="200"/>
               </a:spcAft>
               <a:defRPr sz="1900"/>
             </a:pPr>
@@ -5585,10 +5776,13 @@
           <a:p>
             <a:pPr>
               <a:lnSpc>
-                <a:spcPct val="90000"/>
-              </a:lnSpc>
-              <a:spcAft>
-                <a:spcPts val="300"/>
+                <a:spcPct val="85000"/>
+              </a:lnSpc>
+              <a:spcBef>
+                <a:spcPts val="200"/>
+              </a:spcBef>
+              <a:spcAft>
+                <a:spcPts val="200"/>
               </a:spcAft>
               <a:defRPr sz="1900"/>
             </a:pPr>
@@ -5629,10 +5823,19 @@
         </p:nvSpPr>
         <p:spPr/>
         <p:txBody>
-          <a:bodyPr wrap="square"/>
+          <a:bodyPr wrap="square" tIns="25400" bIns="25400" lIns="63500" rIns="63500"/>
           <a:lstStyle/>
           <a:p>
             <a:pPr>
+              <a:lnSpc>
+                <a:spcPct val="85000"/>
+              </a:lnSpc>
+              <a:spcBef>
+                <a:spcPts val="200"/>
+              </a:spcBef>
+              <a:spcAft>
+                <a:spcPts val="200"/>
+              </a:spcAft>
               <a:defRPr sz="3800" b="1">
                 <a:solidFill>
                   <a:srgbClr val="764BA2"/>
@@ -5640,6 +5843,7 @@
               </a:defRPr>
             </a:pPr>
             <a:r>
+              <a:rPr/>
               <a:t>🎨 Kalem Uzantısı</a:t>
             </a:r>
           </a:p>
@@ -5679,7 +5883,7 @@
           <a:noFill/>
         </p:spPr>
         <p:txBody>
-          <a:bodyPr wrap="square">
+          <a:bodyPr wrap="square" tIns="25400" bIns="25400" lIns="63500" rIns="63500">
             <a:spAutoFit/>
           </a:bodyPr>
           <a:lstStyle/>
@@ -5696,10 +5900,13 @@
           <a:p>
             <a:pPr>
               <a:lnSpc>
-                <a:spcPct val="90000"/>
-              </a:lnSpc>
-              <a:spcAft>
-                <a:spcPts val="300"/>
+                <a:spcPct val="85000"/>
+              </a:lnSpc>
+              <a:spcBef>
+                <a:spcPts val="200"/>
+              </a:spcBef>
+              <a:spcAft>
+                <a:spcPts val="200"/>
               </a:spcAft>
               <a:defRPr sz="1900"/>
             </a:pPr>
@@ -5722,10 +5929,13 @@
           <a:p>
             <a:pPr>
               <a:lnSpc>
-                <a:spcPct val="90000"/>
-              </a:lnSpc>
-              <a:spcAft>
-                <a:spcPts val="300"/>
+                <a:spcPct val="85000"/>
+              </a:lnSpc>
+              <a:spcBef>
+                <a:spcPts val="200"/>
+              </a:spcBef>
+              <a:spcAft>
+                <a:spcPts val="200"/>
               </a:spcAft>
               <a:defRPr sz="1900"/>
             </a:pPr>
@@ -5737,10 +5947,13 @@
           <a:p>
             <a:pPr lvl="1">
               <a:lnSpc>
-                <a:spcPct val="90000"/>
-              </a:lnSpc>
-              <a:spcAft>
-                <a:spcPts val="300"/>
+                <a:spcPct val="85000"/>
+              </a:lnSpc>
+              <a:spcBef>
+                <a:spcPts val="200"/>
+              </a:spcBef>
+              <a:spcAft>
+                <a:spcPts val="200"/>
               </a:spcAft>
               <a:defRPr sz="1700"/>
             </a:pPr>
@@ -5752,10 +5965,13 @@
           <a:p>
             <a:pPr lvl="1">
               <a:lnSpc>
-                <a:spcPct val="90000"/>
-              </a:lnSpc>
-              <a:spcAft>
-                <a:spcPts val="300"/>
+                <a:spcPct val="85000"/>
+              </a:lnSpc>
+              <a:spcBef>
+                <a:spcPts val="200"/>
+              </a:spcBef>
+              <a:spcAft>
+                <a:spcPts val="200"/>
               </a:spcAft>
               <a:defRPr sz="1700"/>
             </a:pPr>
@@ -5778,10 +5994,13 @@
           <a:p>
             <a:pPr>
               <a:lnSpc>
-                <a:spcPct val="90000"/>
-              </a:lnSpc>
-              <a:spcAft>
-                <a:spcPts val="300"/>
+                <a:spcPct val="85000"/>
+              </a:lnSpc>
+              <a:spcBef>
+                <a:spcPts val="200"/>
+              </a:spcBef>
+              <a:spcAft>
+                <a:spcPts val="200"/>
               </a:spcAft>
               <a:defRPr sz="1900"/>
             </a:pPr>
@@ -5793,10 +6012,13 @@
           <a:p>
             <a:pPr lvl="1">
               <a:lnSpc>
-                <a:spcPct val="90000"/>
-              </a:lnSpc>
-              <a:spcAft>
-                <a:spcPts val="300"/>
+                <a:spcPct val="85000"/>
+              </a:lnSpc>
+              <a:spcBef>
+                <a:spcPts val="200"/>
+              </a:spcBef>
+              <a:spcAft>
+                <a:spcPts val="200"/>
               </a:spcAft>
               <a:defRPr sz="1700"/>
             </a:pPr>
@@ -5808,10 +6030,13 @@
           <a:p>
             <a:pPr lvl="1">
               <a:lnSpc>
-                <a:spcPct val="90000"/>
-              </a:lnSpc>
-              <a:spcAft>
-                <a:spcPts val="300"/>
+                <a:spcPct val="85000"/>
+              </a:lnSpc>
+              <a:spcBef>
+                <a:spcPts val="200"/>
+              </a:spcBef>
+              <a:spcAft>
+                <a:spcPts val="200"/>
               </a:spcAft>
               <a:defRPr sz="1700"/>
             </a:pPr>
@@ -5823,10 +6048,13 @@
           <a:p>
             <a:pPr lvl="1">
               <a:lnSpc>
-                <a:spcPct val="90000"/>
-              </a:lnSpc>
-              <a:spcAft>
-                <a:spcPts val="300"/>
+                <a:spcPct val="85000"/>
+              </a:lnSpc>
+              <a:spcBef>
+                <a:spcPts val="200"/>
+              </a:spcBef>
+              <a:spcAft>
+                <a:spcPts val="200"/>
               </a:spcAft>
               <a:defRPr sz="1700"/>
             </a:pPr>
@@ -5838,10 +6066,13 @@
           <a:p>
             <a:pPr lvl="1">
               <a:lnSpc>
-                <a:spcPct val="90000"/>
-              </a:lnSpc>
-              <a:spcAft>
-                <a:spcPts val="300"/>
+                <a:spcPct val="85000"/>
+              </a:lnSpc>
+              <a:spcBef>
+                <a:spcPts val="200"/>
+              </a:spcBef>
+              <a:spcAft>
+                <a:spcPts val="200"/>
               </a:spcAft>
               <a:defRPr sz="1700"/>
             </a:pPr>
@@ -5853,10 +6084,13 @@
           <a:p>
             <a:pPr lvl="1">
               <a:lnSpc>
-                <a:spcPct val="90000"/>
-              </a:lnSpc>
-              <a:spcAft>
-                <a:spcPts val="300"/>
+                <a:spcPct val="85000"/>
+              </a:lnSpc>
+              <a:spcBef>
+                <a:spcPts val="200"/>
+              </a:spcBef>
+              <a:spcAft>
+                <a:spcPts val="200"/>
               </a:spcAft>
               <a:defRPr sz="1700"/>
             </a:pPr>
@@ -5879,10 +6113,13 @@
           <a:p>
             <a:pPr>
               <a:lnSpc>
-                <a:spcPct val="90000"/>
-              </a:lnSpc>
-              <a:spcAft>
-                <a:spcPts val="300"/>
+                <a:spcPct val="85000"/>
+              </a:lnSpc>
+              <a:spcBef>
+                <a:spcPts val="200"/>
+              </a:spcBef>
+              <a:spcAft>
+                <a:spcPts val="200"/>
               </a:spcAft>
               <a:defRPr sz="1900"/>
             </a:pPr>
@@ -5905,10 +6142,13 @@
           <a:p>
             <a:pPr>
               <a:lnSpc>
-                <a:spcPct val="90000"/>
-              </a:lnSpc>
-              <a:spcAft>
-                <a:spcPts val="300"/>
+                <a:spcPct val="85000"/>
+              </a:lnSpc>
+              <a:spcBef>
+                <a:spcPts val="200"/>
+              </a:spcBef>
+              <a:spcAft>
+                <a:spcPts val="200"/>
               </a:spcAft>
               <a:defRPr sz="1900"/>
             </a:pPr>
@@ -5920,10 +6160,13 @@
           <a:p>
             <a:pPr lvl="1">
               <a:lnSpc>
-                <a:spcPct val="90000"/>
-              </a:lnSpc>
-              <a:spcAft>
-                <a:spcPts val="300"/>
+                <a:spcPct val="85000"/>
+              </a:lnSpc>
+              <a:spcBef>
+                <a:spcPts val="200"/>
+              </a:spcBef>
+              <a:spcAft>
+                <a:spcPts val="200"/>
               </a:spcAft>
               <a:defRPr sz="1700"/>
             </a:pPr>
@@ -5935,10 +6178,13 @@
           <a:p>
             <a:pPr lvl="1">
               <a:lnSpc>
-                <a:spcPct val="90000"/>
-              </a:lnSpc>
-              <a:spcAft>
-                <a:spcPts val="300"/>
+                <a:spcPct val="85000"/>
+              </a:lnSpc>
+              <a:spcBef>
+                <a:spcPts val="200"/>
+              </a:spcBef>
+              <a:spcAft>
+                <a:spcPts val="200"/>
               </a:spcAft>
               <a:defRPr sz="1700"/>
             </a:pPr>
@@ -5950,10 +6196,13 @@
           <a:p>
             <a:pPr lvl="1">
               <a:lnSpc>
-                <a:spcPct val="90000"/>
-              </a:lnSpc>
-              <a:spcAft>
-                <a:spcPts val="300"/>
+                <a:spcPct val="85000"/>
+              </a:lnSpc>
+              <a:spcBef>
+                <a:spcPts val="200"/>
+              </a:spcBef>
+              <a:spcAft>
+                <a:spcPts val="200"/>
               </a:spcAft>
               <a:defRPr sz="1700"/>
             </a:pPr>
@@ -5965,10 +6214,13 @@
           <a:p>
             <a:pPr lvl="1">
               <a:lnSpc>
-                <a:spcPct val="90000"/>
-              </a:lnSpc>
-              <a:spcAft>
-                <a:spcPts val="300"/>
+                <a:spcPct val="85000"/>
+              </a:lnSpc>
+              <a:spcBef>
+                <a:spcPts val="200"/>
+              </a:spcBef>
+              <a:spcAft>
+                <a:spcPts val="200"/>
               </a:spcAft>
               <a:defRPr sz="1700"/>
             </a:pPr>
@@ -5980,10 +6232,13 @@
           <a:p>
             <a:pPr lvl="1">
               <a:lnSpc>
-                <a:spcPct val="90000"/>
-              </a:lnSpc>
-              <a:spcAft>
-                <a:spcPts val="300"/>
+                <a:spcPct val="85000"/>
+              </a:lnSpc>
+              <a:spcBef>
+                <a:spcPts val="200"/>
+              </a:spcBef>
+              <a:spcAft>
+                <a:spcPts val="200"/>
               </a:spcAft>
               <a:defRPr sz="1700"/>
             </a:pPr>
@@ -6006,10 +6261,13 @@
           <a:p>
             <a:pPr>
               <a:lnSpc>
-                <a:spcPct val="90000"/>
-              </a:lnSpc>
-              <a:spcAft>
-                <a:spcPts val="300"/>
+                <a:spcPct val="85000"/>
+              </a:lnSpc>
+              <a:spcBef>
+                <a:spcPts val="200"/>
+              </a:spcBef>
+              <a:spcAft>
+                <a:spcPts val="200"/>
               </a:spcAft>
               <a:defRPr sz="1900"/>
             </a:pPr>
@@ -6050,10 +6308,19 @@
         </p:nvSpPr>
         <p:spPr/>
         <p:txBody>
-          <a:bodyPr wrap="square"/>
+          <a:bodyPr wrap="square" tIns="25400" bIns="25400" lIns="63500" rIns="63500"/>
           <a:lstStyle/>
           <a:p>
             <a:pPr>
+              <a:lnSpc>
+                <a:spcPct val="85000"/>
+              </a:lnSpc>
+              <a:spcBef>
+                <a:spcPts val="200"/>
+              </a:spcBef>
+              <a:spcAft>
+                <a:spcPts val="200"/>
+              </a:spcAft>
               <a:defRPr sz="3800" b="1">
                 <a:solidFill>
                   <a:srgbClr val="764BA2"/>
@@ -6061,6 +6328,7 @@
               </a:defRPr>
             </a:pPr>
             <a:r>
+              <a:rPr/>
               <a:t>🎵 Müzik Uzantısı</a:t>
             </a:r>
           </a:p>
@@ -6100,7 +6368,7 @@
           <a:noFill/>
         </p:spPr>
         <p:txBody>
-          <a:bodyPr wrap="square">
+          <a:bodyPr wrap="square" tIns="25400" bIns="25400" lIns="63500" rIns="63500">
             <a:spAutoFit/>
           </a:bodyPr>
           <a:lstStyle/>
@@ -6117,10 +6385,13 @@
           <a:p>
             <a:pPr>
               <a:lnSpc>
-                <a:spcPct val="90000"/>
-              </a:lnSpc>
-              <a:spcAft>
-                <a:spcPts val="300"/>
+                <a:spcPct val="85000"/>
+              </a:lnSpc>
+              <a:spcBef>
+                <a:spcPts val="200"/>
+              </a:spcBef>
+              <a:spcAft>
+                <a:spcPts val="200"/>
               </a:spcAft>
               <a:defRPr sz="1900"/>
             </a:pPr>
@@ -6143,10 +6414,13 @@
           <a:p>
             <a:pPr>
               <a:lnSpc>
-                <a:spcPct val="90000"/>
-              </a:lnSpc>
-              <a:spcAft>
-                <a:spcPts val="300"/>
+                <a:spcPct val="85000"/>
+              </a:lnSpc>
+              <a:spcBef>
+                <a:spcPts val="200"/>
+              </a:spcBef>
+              <a:spcAft>
+                <a:spcPts val="200"/>
               </a:spcAft>
               <a:defRPr sz="1900"/>
             </a:pPr>
@@ -6158,10 +6432,13 @@
           <a:p>
             <a:pPr lvl="1">
               <a:lnSpc>
-                <a:spcPct val="90000"/>
-              </a:lnSpc>
-              <a:spcAft>
-                <a:spcPts val="300"/>
+                <a:spcPct val="85000"/>
+              </a:lnSpc>
+              <a:spcBef>
+                <a:spcPts val="200"/>
+              </a:spcBef>
+              <a:spcAft>
+                <a:spcPts val="200"/>
               </a:spcAft>
               <a:defRPr sz="1700"/>
             </a:pPr>
@@ -6184,10 +6461,13 @@
           <a:p>
             <a:pPr>
               <a:lnSpc>
-                <a:spcPct val="90000"/>
-              </a:lnSpc>
-              <a:spcAft>
-                <a:spcPts val="300"/>
+                <a:spcPct val="85000"/>
+              </a:lnSpc>
+              <a:spcBef>
+                <a:spcPts val="200"/>
+              </a:spcBef>
+              <a:spcAft>
+                <a:spcPts val="200"/>
               </a:spcAft>
               <a:defRPr sz="1900"/>
             </a:pPr>
@@ -6199,10 +6479,13 @@
           <a:p>
             <a:pPr lvl="1">
               <a:lnSpc>
-                <a:spcPct val="90000"/>
-              </a:lnSpc>
-              <a:spcAft>
-                <a:spcPts val="300"/>
+                <a:spcPct val="85000"/>
+              </a:lnSpc>
+              <a:spcBef>
+                <a:spcPts val="200"/>
+              </a:spcBef>
+              <a:spcAft>
+                <a:spcPts val="200"/>
               </a:spcAft>
               <a:defRPr sz="1700"/>
             </a:pPr>
@@ -6214,10 +6497,13 @@
           <a:p>
             <a:pPr lvl="1">
               <a:lnSpc>
-                <a:spcPct val="90000"/>
-              </a:lnSpc>
-              <a:spcAft>
-                <a:spcPts val="300"/>
+                <a:spcPct val="85000"/>
+              </a:lnSpc>
+              <a:spcBef>
+                <a:spcPts val="200"/>
+              </a:spcBef>
+              <a:spcAft>
+                <a:spcPts val="200"/>
               </a:spcAft>
               <a:defRPr sz="1700"/>
             </a:pPr>
@@ -6229,10 +6515,13 @@
           <a:p>
             <a:pPr lvl="1">
               <a:lnSpc>
-                <a:spcPct val="90000"/>
-              </a:lnSpc>
-              <a:spcAft>
-                <a:spcPts val="300"/>
+                <a:spcPct val="85000"/>
+              </a:lnSpc>
+              <a:spcBef>
+                <a:spcPts val="200"/>
+              </a:spcBef>
+              <a:spcAft>
+                <a:spcPts val="200"/>
               </a:spcAft>
               <a:defRPr sz="1700"/>
             </a:pPr>
@@ -6244,10 +6533,13 @@
           <a:p>
             <a:pPr lvl="1">
               <a:lnSpc>
-                <a:spcPct val="90000"/>
-              </a:lnSpc>
-              <a:spcAft>
-                <a:spcPts val="300"/>
+                <a:spcPct val="85000"/>
+              </a:lnSpc>
+              <a:spcBef>
+                <a:spcPts val="200"/>
+              </a:spcBef>
+              <a:spcAft>
+                <a:spcPts val="200"/>
               </a:spcAft>
               <a:defRPr sz="1700"/>
             </a:pPr>
@@ -6270,10 +6562,13 @@
           <a:p>
             <a:pPr>
               <a:lnSpc>
-                <a:spcPct val="90000"/>
-              </a:lnSpc>
-              <a:spcAft>
-                <a:spcPts val="300"/>
+                <a:spcPct val="85000"/>
+              </a:lnSpc>
+              <a:spcBef>
+                <a:spcPts val="200"/>
+              </a:spcBef>
+              <a:spcAft>
+                <a:spcPts val="200"/>
               </a:spcAft>
               <a:defRPr sz="1900"/>
             </a:pPr>
@@ -6296,10 +6591,13 @@
           <a:p>
             <a:pPr>
               <a:lnSpc>
-                <a:spcPct val="90000"/>
-              </a:lnSpc>
-              <a:spcAft>
-                <a:spcPts val="300"/>
+                <a:spcPct val="85000"/>
+              </a:lnSpc>
+              <a:spcBef>
+                <a:spcPts val="200"/>
+              </a:spcBef>
+              <a:spcAft>
+                <a:spcPts val="200"/>
               </a:spcAft>
               <a:defRPr sz="1900"/>
             </a:pPr>
@@ -6311,10 +6609,13 @@
           <a:p>
             <a:pPr>
               <a:lnSpc>
-                <a:spcPct val="90000"/>
-              </a:lnSpc>
-              <a:spcAft>
-                <a:spcPts val="300"/>
+                <a:spcPct val="85000"/>
+              </a:lnSpc>
+              <a:spcBef>
+                <a:spcPts val="200"/>
+              </a:spcBef>
+              <a:spcAft>
+                <a:spcPts val="200"/>
               </a:spcAft>
               <a:defRPr sz="1900"/>
             </a:pPr>
@@ -6326,10 +6627,13 @@
           <a:p>
             <a:pPr>
               <a:lnSpc>
-                <a:spcPct val="90000"/>
-              </a:lnSpc>
-              <a:spcAft>
-                <a:spcPts val="300"/>
+                <a:spcPct val="85000"/>
+              </a:lnSpc>
+              <a:spcBef>
+                <a:spcPts val="200"/>
+              </a:spcBef>
+              <a:spcAft>
+                <a:spcPts val="200"/>
               </a:spcAft>
               <a:defRPr sz="1900"/>
             </a:pPr>
@@ -6341,10 +6645,13 @@
           <a:p>
             <a:pPr>
               <a:lnSpc>
-                <a:spcPct val="90000"/>
-              </a:lnSpc>
-              <a:spcAft>
-                <a:spcPts val="300"/>
+                <a:spcPct val="85000"/>
+              </a:lnSpc>
+              <a:spcBef>
+                <a:spcPts val="200"/>
+              </a:spcBef>
+              <a:spcAft>
+                <a:spcPts val="200"/>
               </a:spcAft>
               <a:defRPr sz="1900"/>
             </a:pPr>
@@ -6367,10 +6674,13 @@
           <a:p>
             <a:pPr>
               <a:lnSpc>
-                <a:spcPct val="90000"/>
-              </a:lnSpc>
-              <a:spcAft>
-                <a:spcPts val="300"/>
+                <a:spcPct val="85000"/>
+              </a:lnSpc>
+              <a:spcBef>
+                <a:spcPts val="200"/>
+              </a:spcBef>
+              <a:spcAft>
+                <a:spcPts val="200"/>
               </a:spcAft>
               <a:defRPr sz="1900"/>
             </a:pPr>
@@ -6382,10 +6692,13 @@
           <a:p>
             <a:pPr lvl="1">
               <a:lnSpc>
-                <a:spcPct val="90000"/>
-              </a:lnSpc>
-              <a:spcAft>
-                <a:spcPts val="300"/>
+                <a:spcPct val="85000"/>
+              </a:lnSpc>
+              <a:spcBef>
+                <a:spcPts val="200"/>
+              </a:spcBef>
+              <a:spcAft>
+                <a:spcPts val="200"/>
               </a:spcAft>
               <a:defRPr sz="1700"/>
             </a:pPr>
@@ -6397,10 +6710,13 @@
           <a:p>
             <a:pPr lvl="1">
               <a:lnSpc>
-                <a:spcPct val="90000"/>
-              </a:lnSpc>
-              <a:spcAft>
-                <a:spcPts val="300"/>
+                <a:spcPct val="85000"/>
+              </a:lnSpc>
+              <a:spcBef>
+                <a:spcPts val="200"/>
+              </a:spcBef>
+              <a:spcAft>
+                <a:spcPts val="200"/>
               </a:spcAft>
               <a:defRPr sz="1700"/>
             </a:pPr>
@@ -6412,10 +6728,13 @@
           <a:p>
             <a:pPr lvl="1">
               <a:lnSpc>
-                <a:spcPct val="90000"/>
-              </a:lnSpc>
-              <a:spcAft>
-                <a:spcPts val="300"/>
+                <a:spcPct val="85000"/>
+              </a:lnSpc>
+              <a:spcBef>
+                <a:spcPts val="200"/>
+              </a:spcBef>
+              <a:spcAft>
+                <a:spcPts val="200"/>
               </a:spcAft>
               <a:defRPr sz="1700"/>
             </a:pPr>
@@ -6438,10 +6757,13 @@
           <a:p>
             <a:pPr>
               <a:lnSpc>
-                <a:spcPct val="90000"/>
-              </a:lnSpc>
-              <a:spcAft>
-                <a:spcPts val="300"/>
+                <a:spcPct val="85000"/>
+              </a:lnSpc>
+              <a:spcBef>
+                <a:spcPts val="200"/>
+              </a:spcBef>
+              <a:spcAft>
+                <a:spcPts val="200"/>
               </a:spcAft>
               <a:defRPr sz="1900"/>
             </a:pPr>
@@ -6482,10 +6804,19 @@
         </p:nvSpPr>
         <p:spPr/>
         <p:txBody>
-          <a:bodyPr wrap="square"/>
+          <a:bodyPr wrap="square" tIns="25400" bIns="25400" lIns="63500" rIns="63500"/>
           <a:lstStyle/>
           <a:p>
             <a:pPr>
+              <a:lnSpc>
+                <a:spcPct val="85000"/>
+              </a:lnSpc>
+              <a:spcBef>
+                <a:spcPts val="200"/>
+              </a:spcBef>
+              <a:spcAft>
+                <a:spcPts val="200"/>
+              </a:spcAft>
               <a:defRPr sz="3800" b="1">
                 <a:solidFill>
                   <a:srgbClr val="764BA2"/>
@@ -6493,6 +6824,7 @@
               </a:defRPr>
             </a:pPr>
             <a:r>
+              <a:rPr/>
               <a:t>🎮 Platform Oyunu Projesi</a:t>
             </a:r>
           </a:p>
@@ -6532,7 +6864,7 @@
           <a:noFill/>
         </p:spPr>
         <p:txBody>
-          <a:bodyPr wrap="square">
+          <a:bodyPr wrap="square" tIns="25400" bIns="25400" lIns="63500" rIns="63500">
             <a:spAutoFit/>
           </a:bodyPr>
           <a:lstStyle/>
@@ -6549,10 +6881,13 @@
           <a:p>
             <a:pPr>
               <a:lnSpc>
-                <a:spcPct val="90000"/>
-              </a:lnSpc>
-              <a:spcAft>
-                <a:spcPts val="300"/>
+                <a:spcPct val="85000"/>
+              </a:lnSpc>
+              <a:spcBef>
+                <a:spcPts val="200"/>
+              </a:spcBef>
+              <a:spcAft>
+                <a:spcPts val="200"/>
               </a:spcAft>
               <a:defRPr sz="1900"/>
             </a:pPr>
@@ -6575,10 +6910,13 @@
           <a:p>
             <a:pPr>
               <a:lnSpc>
-                <a:spcPct val="90000"/>
-              </a:lnSpc>
-              <a:spcAft>
-                <a:spcPts val="300"/>
+                <a:spcPct val="85000"/>
+              </a:lnSpc>
+              <a:spcBef>
+                <a:spcPts val="200"/>
+              </a:spcBef>
+              <a:spcAft>
+                <a:spcPts val="200"/>
               </a:spcAft>
               <a:defRPr sz="1900"/>
             </a:pPr>
@@ -6590,10 +6928,13 @@
           <a:p>
             <a:pPr lvl="1">
               <a:lnSpc>
-                <a:spcPct val="90000"/>
-              </a:lnSpc>
-              <a:spcAft>
-                <a:spcPts val="300"/>
+                <a:spcPct val="85000"/>
+              </a:lnSpc>
+              <a:spcBef>
+                <a:spcPts val="200"/>
+              </a:spcBef>
+              <a:spcAft>
+                <a:spcPts val="200"/>
               </a:spcAft>
               <a:defRPr sz="1700"/>
             </a:pPr>
@@ -6605,10 +6946,13 @@
           <a:p>
             <a:pPr lvl="1">
               <a:lnSpc>
-                <a:spcPct val="90000"/>
-              </a:lnSpc>
-              <a:spcAft>
-                <a:spcPts val="300"/>
+                <a:spcPct val="85000"/>
+              </a:lnSpc>
+              <a:spcBef>
+                <a:spcPts val="200"/>
+              </a:spcBef>
+              <a:spcAft>
+                <a:spcPts val="200"/>
               </a:spcAft>
               <a:defRPr sz="1700"/>
             </a:pPr>
@@ -6620,10 +6964,13 @@
           <a:p>
             <a:pPr lvl="1">
               <a:lnSpc>
-                <a:spcPct val="90000"/>
-              </a:lnSpc>
-              <a:spcAft>
-                <a:spcPts val="300"/>
+                <a:spcPct val="85000"/>
+              </a:lnSpc>
+              <a:spcBef>
+                <a:spcPts val="200"/>
+              </a:spcBef>
+              <a:spcAft>
+                <a:spcPts val="200"/>
               </a:spcAft>
               <a:defRPr sz="1700"/>
             </a:pPr>
@@ -6635,10 +6982,13 @@
           <a:p>
             <a:pPr lvl="1">
               <a:lnSpc>
-                <a:spcPct val="90000"/>
-              </a:lnSpc>
-              <a:spcAft>
-                <a:spcPts val="300"/>
+                <a:spcPct val="85000"/>
+              </a:lnSpc>
+              <a:spcBef>
+                <a:spcPts val="200"/>
+              </a:spcBef>
+              <a:spcAft>
+                <a:spcPts val="200"/>
               </a:spcAft>
               <a:defRPr sz="1700"/>
             </a:pPr>
@@ -6650,10 +7000,13 @@
           <a:p>
             <a:pPr lvl="1">
               <a:lnSpc>
-                <a:spcPct val="90000"/>
-              </a:lnSpc>
-              <a:spcAft>
-                <a:spcPts val="300"/>
+                <a:spcPct val="85000"/>
+              </a:lnSpc>
+              <a:spcBef>
+                <a:spcPts val="200"/>
+              </a:spcBef>
+              <a:spcAft>
+                <a:spcPts val="200"/>
               </a:spcAft>
               <a:defRPr sz="1700"/>
             </a:pPr>
@@ -6665,10 +7018,13 @@
           <a:p>
             <a:pPr lvl="1">
               <a:lnSpc>
-                <a:spcPct val="90000"/>
-              </a:lnSpc>
-              <a:spcAft>
-                <a:spcPts val="300"/>
+                <a:spcPct val="85000"/>
+              </a:lnSpc>
+              <a:spcBef>
+                <a:spcPts val="200"/>
+              </a:spcBef>
+              <a:spcAft>
+                <a:spcPts val="200"/>
               </a:spcAft>
               <a:defRPr sz="1700"/>
             </a:pPr>
@@ -6691,10 +7047,13 @@
           <a:p>
             <a:pPr>
               <a:lnSpc>
-                <a:spcPct val="90000"/>
-              </a:lnSpc>
-              <a:spcAft>
-                <a:spcPts val="300"/>
+                <a:spcPct val="85000"/>
+              </a:lnSpc>
+              <a:spcBef>
+                <a:spcPts val="200"/>
+              </a:spcBef>
+              <a:spcAft>
+                <a:spcPts val="200"/>
               </a:spcAft>
               <a:defRPr sz="1900"/>
             </a:pPr>
@@ -6706,10 +7065,13 @@
           <a:p>
             <a:pPr lvl="1">
               <a:lnSpc>
-                <a:spcPct val="90000"/>
-              </a:lnSpc>
-              <a:spcAft>
-                <a:spcPts val="300"/>
+                <a:spcPct val="85000"/>
+              </a:lnSpc>
+              <a:spcBef>
+                <a:spcPts val="200"/>
+              </a:spcBef>
+              <a:spcAft>
+                <a:spcPts val="200"/>
               </a:spcAft>
               <a:defRPr sz="1700"/>
             </a:pPr>
@@ -6721,10 +7083,13 @@
           <a:p>
             <a:pPr lvl="1">
               <a:lnSpc>
-                <a:spcPct val="90000"/>
-              </a:lnSpc>
-              <a:spcAft>
-                <a:spcPts val="300"/>
+                <a:spcPct val="85000"/>
+              </a:lnSpc>
+              <a:spcBef>
+                <a:spcPts val="200"/>
+              </a:spcBef>
+              <a:spcAft>
+                <a:spcPts val="200"/>
               </a:spcAft>
               <a:defRPr sz="1700"/>
             </a:pPr>
@@ -6736,10 +7101,13 @@
           <a:p>
             <a:pPr lvl="1">
               <a:lnSpc>
-                <a:spcPct val="90000"/>
-              </a:lnSpc>
-              <a:spcAft>
-                <a:spcPts val="300"/>
+                <a:spcPct val="85000"/>
+              </a:lnSpc>
+              <a:spcBef>
+                <a:spcPts val="200"/>
+              </a:spcBef>
+              <a:spcAft>
+                <a:spcPts val="200"/>
               </a:spcAft>
               <a:defRPr sz="1700"/>
             </a:pPr>
@@ -6751,10 +7119,13 @@
           <a:p>
             <a:pPr lvl="1">
               <a:lnSpc>
-                <a:spcPct val="90000"/>
-              </a:lnSpc>
-              <a:spcAft>
-                <a:spcPts val="300"/>
+                <a:spcPct val="85000"/>
+              </a:lnSpc>
+              <a:spcBef>
+                <a:spcPts val="200"/>
+              </a:spcBef>
+              <a:spcAft>
+                <a:spcPts val="200"/>
               </a:spcAft>
               <a:defRPr sz="1700"/>
             </a:pPr>
@@ -6766,10 +7137,13 @@
           <a:p>
             <a:pPr lvl="1">
               <a:lnSpc>
-                <a:spcPct val="90000"/>
-              </a:lnSpc>
-              <a:spcAft>
-                <a:spcPts val="300"/>
+                <a:spcPct val="85000"/>
+              </a:lnSpc>
+              <a:spcBef>
+                <a:spcPts val="200"/>
+              </a:spcBef>
+              <a:spcAft>
+                <a:spcPts val="200"/>
               </a:spcAft>
               <a:defRPr sz="1700"/>
             </a:pPr>
@@ -6792,10 +7166,13 @@
           <a:p>
             <a:pPr>
               <a:lnSpc>
-                <a:spcPct val="90000"/>
-              </a:lnSpc>
-              <a:spcAft>
-                <a:spcPts val="300"/>
+                <a:spcPct val="85000"/>
+              </a:lnSpc>
+              <a:spcBef>
+                <a:spcPts val="200"/>
+              </a:spcBef>
+              <a:spcAft>
+                <a:spcPts val="200"/>
               </a:spcAft>
               <a:defRPr sz="1900"/>
             </a:pPr>
@@ -6807,10 +7184,13 @@
           <a:p>
             <a:pPr lvl="1">
               <a:lnSpc>
-                <a:spcPct val="90000"/>
-              </a:lnSpc>
-              <a:spcAft>
-                <a:spcPts val="300"/>
+                <a:spcPct val="85000"/>
+              </a:lnSpc>
+              <a:spcBef>
+                <a:spcPts val="200"/>
+              </a:spcBef>
+              <a:spcAft>
+                <a:spcPts val="200"/>
               </a:spcAft>
               <a:defRPr sz="1700"/>
             </a:pPr>
@@ -6822,10 +7202,13 @@
           <a:p>
             <a:pPr lvl="1">
               <a:lnSpc>
-                <a:spcPct val="90000"/>
-              </a:lnSpc>
-              <a:spcAft>
-                <a:spcPts val="300"/>
+                <a:spcPct val="85000"/>
+              </a:lnSpc>
+              <a:spcBef>
+                <a:spcPts val="200"/>
+              </a:spcBef>
+              <a:spcAft>
+                <a:spcPts val="200"/>
               </a:spcAft>
               <a:defRPr sz="1700"/>
             </a:pPr>
@@ -6837,10 +7220,13 @@
           <a:p>
             <a:pPr lvl="1">
               <a:lnSpc>
-                <a:spcPct val="90000"/>
-              </a:lnSpc>
-              <a:spcAft>
-                <a:spcPts val="300"/>
+                <a:spcPct val="85000"/>
+              </a:lnSpc>
+              <a:spcBef>
+                <a:spcPts val="200"/>
+              </a:spcBef>
+              <a:spcAft>
+                <a:spcPts val="200"/>
               </a:spcAft>
               <a:defRPr sz="1700"/>
             </a:pPr>
@@ -6863,10 +7249,13 @@
           <a:p>
             <a:pPr>
               <a:lnSpc>
-                <a:spcPct val="90000"/>
-              </a:lnSpc>
-              <a:spcAft>
-                <a:spcPts val="300"/>
+                <a:spcPct val="85000"/>
+              </a:lnSpc>
+              <a:spcBef>
+                <a:spcPts val="200"/>
+              </a:spcBef>
+              <a:spcAft>
+                <a:spcPts val="200"/>
               </a:spcAft>
               <a:defRPr sz="1900"/>
             </a:pPr>
@@ -6907,10 +7296,19 @@
         </p:nvSpPr>
         <p:spPr/>
         <p:txBody>
-          <a:bodyPr wrap="square"/>
+          <a:bodyPr wrap="square" tIns="25400" bIns="25400" lIns="63500" rIns="63500"/>
           <a:lstStyle/>
           <a:p>
             <a:pPr>
+              <a:lnSpc>
+                <a:spcPct val="85000"/>
+              </a:lnSpc>
+              <a:spcBef>
+                <a:spcPts val="200"/>
+              </a:spcBef>
+              <a:spcAft>
+                <a:spcPts val="200"/>
+              </a:spcAft>
               <a:defRPr sz="3800" b="1">
                 <a:solidFill>
                   <a:srgbClr val="764BA2"/>
@@ -6918,6 +7316,7 @@
               </a:defRPr>
             </a:pPr>
             <a:r>
+              <a:rPr/>
               <a:t>📝 Ünite Özeti</a:t>
             </a:r>
           </a:p>
@@ -6957,7 +7356,7 @@
           <a:noFill/>
         </p:spPr>
         <p:txBody>
-          <a:bodyPr wrap="square">
+          <a:bodyPr wrap="square" tIns="25400" bIns="25400" lIns="63500" rIns="63500">
             <a:spAutoFit/>
           </a:bodyPr>
           <a:lstStyle/>
@@ -6974,10 +7373,13 @@
           <a:p>
             <a:pPr>
               <a:lnSpc>
-                <a:spcPct val="90000"/>
-              </a:lnSpc>
-              <a:spcAft>
-                <a:spcPts val="300"/>
+                <a:spcPct val="85000"/>
+              </a:lnSpc>
+              <a:spcBef>
+                <a:spcPts val="200"/>
+              </a:spcBef>
+              <a:spcAft>
+                <a:spcPts val="200"/>
               </a:spcAft>
               <a:defRPr sz="1900"/>
             </a:pPr>
@@ -7000,10 +7402,13 @@
           <a:p>
             <a:pPr>
               <a:lnSpc>
-                <a:spcPct val="90000"/>
-              </a:lnSpc>
-              <a:spcAft>
-                <a:spcPts val="300"/>
+                <a:spcPct val="85000"/>
+              </a:lnSpc>
+              <a:spcBef>
+                <a:spcPts val="200"/>
+              </a:spcBef>
+              <a:spcAft>
+                <a:spcPts val="200"/>
               </a:spcAft>
               <a:defRPr sz="1900"/>
             </a:pPr>
@@ -7015,10 +7420,13 @@
           <a:p>
             <a:pPr>
               <a:lnSpc>
-                <a:spcPct val="90000"/>
-              </a:lnSpc>
-              <a:spcAft>
-                <a:spcPts val="300"/>
+                <a:spcPct val="85000"/>
+              </a:lnSpc>
+              <a:spcBef>
+                <a:spcPts val="200"/>
+              </a:spcBef>
+              <a:spcAft>
+                <a:spcPts val="200"/>
               </a:spcAft>
               <a:defRPr sz="1900"/>
             </a:pPr>
@@ -7030,10 +7438,13 @@
           <a:p>
             <a:pPr>
               <a:lnSpc>
-                <a:spcPct val="90000"/>
-              </a:lnSpc>
-              <a:spcAft>
-                <a:spcPts val="300"/>
+                <a:spcPct val="85000"/>
+              </a:lnSpc>
+              <a:spcBef>
+                <a:spcPts val="200"/>
+              </a:spcBef>
+              <a:spcAft>
+                <a:spcPts val="200"/>
               </a:spcAft>
               <a:defRPr sz="1900"/>
             </a:pPr>
@@ -7045,10 +7456,13 @@
           <a:p>
             <a:pPr>
               <a:lnSpc>
-                <a:spcPct val="90000"/>
-              </a:lnSpc>
-              <a:spcAft>
-                <a:spcPts val="300"/>
+                <a:spcPct val="85000"/>
+              </a:lnSpc>
+              <a:spcBef>
+                <a:spcPts val="200"/>
+              </a:spcBef>
+              <a:spcAft>
+                <a:spcPts val="200"/>
               </a:spcAft>
               <a:defRPr sz="1900"/>
             </a:pPr>
@@ -7060,10 +7474,13 @@
           <a:p>
             <a:pPr>
               <a:lnSpc>
-                <a:spcPct val="90000"/>
-              </a:lnSpc>
-              <a:spcAft>
-                <a:spcPts val="300"/>
+                <a:spcPct val="85000"/>
+              </a:lnSpc>
+              <a:spcBef>
+                <a:spcPts val="200"/>
+              </a:spcBef>
+              <a:spcAft>
+                <a:spcPts val="200"/>
               </a:spcAft>
               <a:defRPr sz="1900"/>
             </a:pPr>
@@ -7075,10 +7492,13 @@
           <a:p>
             <a:pPr>
               <a:lnSpc>
-                <a:spcPct val="90000"/>
-              </a:lnSpc>
-              <a:spcAft>
-                <a:spcPts val="300"/>
+                <a:spcPct val="85000"/>
+              </a:lnSpc>
+              <a:spcBef>
+                <a:spcPts val="200"/>
+              </a:spcBef>
+              <a:spcAft>
+                <a:spcPts val="200"/>
               </a:spcAft>
               <a:defRPr sz="1900"/>
             </a:pPr>
@@ -7090,10 +7510,13 @@
           <a:p>
             <a:pPr>
               <a:lnSpc>
-                <a:spcPct val="90000"/>
-              </a:lnSpc>
-              <a:spcAft>
-                <a:spcPts val="300"/>
+                <a:spcPct val="85000"/>
+              </a:lnSpc>
+              <a:spcBef>
+                <a:spcPts val="200"/>
+              </a:spcBef>
+              <a:spcAft>
+                <a:spcPts val="200"/>
               </a:spcAft>
               <a:defRPr sz="1900"/>
             </a:pPr>
@@ -7116,10 +7539,13 @@
           <a:p>
             <a:pPr>
               <a:lnSpc>
-                <a:spcPct val="90000"/>
-              </a:lnSpc>
-              <a:spcAft>
-                <a:spcPts val="300"/>
+                <a:spcPct val="85000"/>
+              </a:lnSpc>
+              <a:spcBef>
+                <a:spcPts val="200"/>
+              </a:spcBef>
+              <a:spcAft>
+                <a:spcPts val="200"/>
               </a:spcAft>
               <a:defRPr sz="1900"/>
             </a:pPr>
@@ -7131,10 +7557,13 @@
           <a:p>
             <a:pPr>
               <a:lnSpc>
-                <a:spcPct val="90000"/>
-              </a:lnSpc>
-              <a:spcAft>
-                <a:spcPts val="300"/>
+                <a:spcPct val="85000"/>
+              </a:lnSpc>
+              <a:spcBef>
+                <a:spcPts val="200"/>
+              </a:spcBef>
+              <a:spcAft>
+                <a:spcPts val="200"/>
               </a:spcAft>
               <a:defRPr sz="1900"/>
             </a:pPr>
@@ -7157,10 +7586,13 @@
           <a:p>
             <a:pPr>
               <a:lnSpc>
-                <a:spcPct val="90000"/>
-              </a:lnSpc>
-              <a:spcAft>
-                <a:spcPts val="300"/>
+                <a:spcPct val="85000"/>
+              </a:lnSpc>
+              <a:spcBef>
+                <a:spcPts val="200"/>
+              </a:spcBef>
+              <a:spcAft>
+                <a:spcPts val="200"/>
               </a:spcAft>
               <a:defRPr sz="1900"/>
             </a:pPr>
@@ -7172,10 +7604,13 @@
           <a:p>
             <a:pPr>
               <a:lnSpc>
-                <a:spcPct val="90000"/>
-              </a:lnSpc>
-              <a:spcAft>
-                <a:spcPts val="300"/>
+                <a:spcPct val="85000"/>
+              </a:lnSpc>
+              <a:spcBef>
+                <a:spcPts val="200"/>
+              </a:spcBef>
+              <a:spcAft>
+                <a:spcPts val="200"/>
               </a:spcAft>
               <a:defRPr sz="1900"/>
             </a:pPr>
